--- a/発表/数理生物学会2026_発表スライド.pptx
+++ b/発表/数理生物学会2026_発表スライド.pptx
@@ -29,6 +29,11 @@
     <p:sldId id="277" r:id="rId28"/>
     <p:sldId id="278" r:id="rId29"/>
     <p:sldId id="279" r:id="rId30"/>
+    <p:sldId id="280" r:id="rId31"/>
+    <p:sldId id="281" r:id="rId32"/>
+    <p:sldId id="282" r:id="rId33"/>
+    <p:sldId id="283" r:id="rId34"/>
+    <p:sldId id="284" r:id="rId35"/>
   </p:sldIdLst>
   <p:sldSz cx="12191695" cy="6858000" type="screen4x3"/>
   <p:notesSz cx="6858000" cy="9144000"/>
@@ -5884,8 +5889,8 @@
         </p:nvSpPr>
         <p:spPr>
           <a:xfrm>
-            <a:off x="2032779" y="1405798"/>
-            <a:ext cx="3131820" cy="241173"/>
+            <a:off x="1604154" y="1405798"/>
+            <a:ext cx="3989070" cy="241173"/>
           </a:xfrm>
           <a:prstGeom prst="rect">
             <a:avLst/>
@@ -5915,7 +5920,7 @@
                 <a:ea typeface="Meiryo"/>
                 <a:cs typeface="Meiryo"/>
               </a:rPr>
-              <a:t>上限を上げるほど、答えも上がり続ける</a:t>
+              <a:t>制約なし：上限を上げるほど、答えも上がり続ける</a:t>
             </a:r>
           </a:p>
         </p:txBody>
@@ -6016,7 +6021,7 @@
         </p:nvSpPr>
         <p:spPr>
           <a:xfrm>
-            <a:off x="1837523" y="1775224"/>
+            <a:off x="2085893" y="1775224"/>
             <a:ext cx="744220" cy="199898"/>
           </a:xfrm>
           <a:prstGeom prst="rect">
@@ -6060,7 +6065,7 @@
         </p:nvSpPr>
         <p:spPr>
           <a:xfrm>
-            <a:off x="1837523" y="2003686"/>
+            <a:off x="2085893" y="2003686"/>
             <a:ext cx="464820" cy="199898"/>
           </a:xfrm>
           <a:prstGeom prst="rect">
@@ -6104,8 +6109,8 @@
         </p:nvSpPr>
         <p:spPr>
           <a:xfrm>
-            <a:off x="7755826" y="1405798"/>
-            <a:ext cx="2884931" cy="241173"/>
+            <a:off x="7460932" y="1405798"/>
+            <a:ext cx="3474720" cy="241173"/>
           </a:xfrm>
           <a:prstGeom prst="rect">
             <a:avLst/>
@@ -6135,7 +6140,7 @@
                 <a:ea typeface="Meiryo"/>
                 <a:cs typeface="Meiryo"/>
               </a:rPr>
-              <a:t>4種のうち3種が端（0か上限）に寄る</a:t>
+              <a:t>制約つきの最適でも、端に張り付く種が残る</a:t>
             </a:r>
           </a:p>
         </p:txBody>
@@ -6148,8 +6153,8 @@
         </p:nvSpPr>
         <p:spPr>
           <a:xfrm>
-            <a:off x="7030704" y="1961482"/>
-            <a:ext cx="717550" cy="208153"/>
+            <a:off x="7391969" y="1748346"/>
+            <a:ext cx="744220" cy="199898"/>
           </a:xfrm>
           <a:prstGeom prst="rect">
             <a:avLst/>
@@ -6171,249 +6176,381 @@
               </a:spcAft>
             </a:pPr>
             <a:r>
+              <a:rPr sz="1100" b="0">
+                <a:solidFill>
+                  <a:srgbClr val="222222"/>
+                </a:solidFill>
+                <a:latin typeface="Meiryo"/>
+                <a:ea typeface="Meiryo"/>
+                <a:cs typeface="Meiryo"/>
+              </a:rPr>
+              <a:t>大蛇行なし</a:t>
+            </a:r>
+          </a:p>
+        </p:txBody>
+      </p:sp>
+      <p:sp>
+        <p:nvSpPr>
+          <p:cNvPr id="12" name="figlabel"/>
+          <p:cNvSpPr txBox="1"/>
+          <p:nvPr/>
+        </p:nvSpPr>
+        <p:spPr>
+          <a:xfrm>
+            <a:off x="7391969" y="1954410"/>
+            <a:ext cx="464820" cy="199898"/>
+          </a:xfrm>
+          <a:prstGeom prst="rect">
+            <a:avLst/>
+          </a:prstGeom>
+          <a:noFill/>
+        </p:spPr>
+        <p:txBody>
+          <a:bodyPr wrap="none" anchor="ctr" lIns="0" rIns="0" tIns="0" bIns="0">
+            <a:spAutoFit/>
+          </a:bodyPr>
+          <a:lstStyle/>
+          <a:p>
+            <a:pPr algn="l">
+              <a:lnSpc>
+                <a:spcPct val="120000"/>
+              </a:lnSpc>
+              <a:spcAft>
+                <a:spcPts val="0"/>
+              </a:spcAft>
+            </a:pPr>
+            <a:r>
+              <a:rPr sz="1100" b="0">
+                <a:solidFill>
+                  <a:srgbClr val="222222"/>
+                </a:solidFill>
+                <a:latin typeface="Meiryo"/>
+                <a:ea typeface="Meiryo"/>
+                <a:cs typeface="Meiryo"/>
+              </a:rPr>
+              <a:t>大蛇行</a:t>
+            </a:r>
+          </a:p>
+        </p:txBody>
+      </p:sp>
+      <p:sp>
+        <p:nvSpPr>
+          <p:cNvPr id="13" name="figlabel"/>
+          <p:cNvSpPr txBox="1"/>
+          <p:nvPr/>
+        </p:nvSpPr>
+        <p:spPr>
+          <a:xfrm>
+            <a:off x="7906771" y="2160474"/>
+            <a:ext cx="688340" cy="199898"/>
+          </a:xfrm>
+          <a:prstGeom prst="rect">
+            <a:avLst/>
+          </a:prstGeom>
+          <a:noFill/>
+        </p:spPr>
+        <p:txBody>
+          <a:bodyPr wrap="none" anchor="ctr" lIns="0" rIns="0" tIns="0" bIns="0">
+            <a:spAutoFit/>
+          </a:bodyPr>
+          <a:lstStyle/>
+          <a:p>
+            <a:pPr algn="l">
+              <a:lnSpc>
+                <a:spcPct val="120000"/>
+              </a:lnSpc>
+              <a:spcAft>
+                <a:spcPts val="0"/>
+              </a:spcAft>
+            </a:pPr>
+            <a:r>
+              <a:rPr sz="1100" b="0">
+                <a:solidFill>
+                  <a:srgbClr val="6E6E6E"/>
+                </a:solidFill>
+                <a:latin typeface="Meiryo"/>
+                <a:ea typeface="Meiryo"/>
+                <a:cs typeface="Meiryo"/>
+              </a:rPr>
+              <a:t>上限 0.95</a:t>
+            </a:r>
+          </a:p>
+        </p:txBody>
+      </p:sp>
+      <p:sp>
+        <p:nvSpPr>
+          <p:cNvPr id="14" name="figlabel"/>
+          <p:cNvSpPr txBox="1"/>
+          <p:nvPr/>
+        </p:nvSpPr>
+        <p:spPr>
+          <a:xfrm>
+            <a:off x="7334043" y="4081399"/>
+            <a:ext cx="502920" cy="216408"/>
+          </a:xfrm>
+          <a:prstGeom prst="rect">
+            <a:avLst/>
+          </a:prstGeom>
+          <a:noFill/>
+        </p:spPr>
+        <p:txBody>
+          <a:bodyPr wrap="none" anchor="ctr" lIns="0" rIns="0" tIns="0" bIns="0">
+            <a:spAutoFit/>
+          </a:bodyPr>
+          <a:lstStyle/>
+          <a:p>
+            <a:pPr algn="ctr">
+              <a:lnSpc>
+                <a:spcPct val="120000"/>
+              </a:lnSpc>
+              <a:spcAft>
+                <a:spcPts val="0"/>
+              </a:spcAft>
+            </a:pPr>
+            <a:r>
+              <a:rPr sz="1200" b="0">
+                <a:solidFill>
+                  <a:srgbClr val="222222"/>
+                </a:solidFill>
+                <a:latin typeface="Meiryo"/>
+                <a:ea typeface="Meiryo"/>
+                <a:cs typeface="Meiryo"/>
+              </a:rPr>
+              <a:t>マアジ</a:t>
+            </a:r>
+          </a:p>
+        </p:txBody>
+      </p:sp>
+      <p:sp>
+        <p:nvSpPr>
+          <p:cNvPr id="15" name="figlabel"/>
+          <p:cNvSpPr txBox="1"/>
+          <p:nvPr/>
+        </p:nvSpPr>
+        <p:spPr>
+          <a:xfrm>
+            <a:off x="8180636" y="4081399"/>
+            <a:ext cx="960120" cy="216408"/>
+          </a:xfrm>
+          <a:prstGeom prst="rect">
+            <a:avLst/>
+          </a:prstGeom>
+          <a:noFill/>
+        </p:spPr>
+        <p:txBody>
+          <a:bodyPr wrap="none" anchor="ctr" lIns="0" rIns="0" tIns="0" bIns="0">
+            <a:spAutoFit/>
+          </a:bodyPr>
+          <a:lstStyle/>
+          <a:p>
+            <a:pPr algn="ctr">
+              <a:lnSpc>
+                <a:spcPct val="120000"/>
+              </a:lnSpc>
+              <a:spcAft>
+                <a:spcPts val="0"/>
+              </a:spcAft>
+            </a:pPr>
+            <a:r>
+              <a:rPr sz="1200" b="0">
+                <a:solidFill>
+                  <a:srgbClr val="222222"/>
+                </a:solidFill>
+                <a:latin typeface="Meiryo"/>
+                <a:ea typeface="Meiryo"/>
+                <a:cs typeface="Meiryo"/>
+              </a:rPr>
+              <a:t>ウルメイワシ</a:t>
+            </a:r>
+          </a:p>
+        </p:txBody>
+      </p:sp>
+      <p:sp>
+        <p:nvSpPr>
+          <p:cNvPr id="16" name="figlabel"/>
+          <p:cNvSpPr txBox="1"/>
+          <p:nvPr/>
+        </p:nvSpPr>
+        <p:spPr>
+          <a:xfrm>
+            <a:off x="9560629" y="4081399"/>
+            <a:ext cx="350520" cy="216408"/>
+          </a:xfrm>
+          <a:prstGeom prst="rect">
+            <a:avLst/>
+          </a:prstGeom>
+          <a:noFill/>
+        </p:spPr>
+        <p:txBody>
+          <a:bodyPr wrap="none" anchor="ctr" lIns="0" rIns="0" tIns="0" bIns="0">
+            <a:spAutoFit/>
+          </a:bodyPr>
+          <a:lstStyle/>
+          <a:p>
+            <a:pPr algn="ctr">
+              <a:lnSpc>
+                <a:spcPct val="120000"/>
+              </a:lnSpc>
+              <a:spcAft>
+                <a:spcPts val="0"/>
+              </a:spcAft>
+            </a:pPr>
+            <a:r>
+              <a:rPr sz="1200" b="0">
+                <a:solidFill>
+                  <a:srgbClr val="222222"/>
+                </a:solidFill>
+                <a:latin typeface="Meiryo"/>
+                <a:ea typeface="Meiryo"/>
+                <a:cs typeface="Meiryo"/>
+              </a:rPr>
+              <a:t>ブリ</a:t>
+            </a:r>
+          </a:p>
+        </p:txBody>
+      </p:sp>
+      <p:sp>
+        <p:nvSpPr>
+          <p:cNvPr id="17" name="figlabel"/>
+          <p:cNvSpPr txBox="1"/>
+          <p:nvPr/>
+        </p:nvSpPr>
+        <p:spPr>
+          <a:xfrm>
+            <a:off x="10559621" y="4081399"/>
+            <a:ext cx="502920" cy="216408"/>
+          </a:xfrm>
+          <a:prstGeom prst="rect">
+            <a:avLst/>
+          </a:prstGeom>
+          <a:noFill/>
+        </p:spPr>
+        <p:txBody>
+          <a:bodyPr wrap="none" anchor="ctr" lIns="0" rIns="0" tIns="0" bIns="0">
+            <a:spAutoFit/>
+          </a:bodyPr>
+          <a:lstStyle/>
+          <a:p>
+            <a:pPr algn="ctr">
+              <a:lnSpc>
+                <a:spcPct val="120000"/>
+              </a:lnSpc>
+              <a:spcAft>
+                <a:spcPts val="0"/>
+              </a:spcAft>
+            </a:pPr>
+            <a:r>
+              <a:rPr sz="1200" b="0">
+                <a:solidFill>
+                  <a:srgbClr val="222222"/>
+                </a:solidFill>
+                <a:latin typeface="Meiryo"/>
+                <a:ea typeface="Meiryo"/>
+                <a:cs typeface="Meiryo"/>
+              </a:rPr>
+              <a:t>サワラ</a:t>
+            </a:r>
+          </a:p>
+        </p:txBody>
+      </p:sp>
+      <p:sp>
+        <p:nvSpPr>
+          <p:cNvPr id="18" name="figlabel"/>
+          <p:cNvSpPr txBox="1"/>
+          <p:nvPr/>
+        </p:nvSpPr>
+        <p:spPr>
+          <a:xfrm>
+            <a:off x="9017483" y="4328947"/>
+            <a:ext cx="2560320" cy="199898"/>
+          </a:xfrm>
+          <a:prstGeom prst="rect">
+            <a:avLst/>
+          </a:prstGeom>
+          <a:noFill/>
+        </p:spPr>
+        <p:txBody>
+          <a:bodyPr wrap="none" anchor="ctr" lIns="0" rIns="0" tIns="0" bIns="0">
+            <a:spAutoFit/>
+          </a:bodyPr>
+          <a:lstStyle/>
+          <a:p>
+            <a:pPr algn="r">
+              <a:lnSpc>
+                <a:spcPct val="120000"/>
+              </a:lnSpc>
+              <a:spcAft>
+                <a:spcPts val="0"/>
+              </a:spcAft>
+            </a:pPr>
+            <a:r>
+              <a:rPr sz="1100" b="0">
+                <a:solidFill>
+                  <a:srgbClr val="6E6E6E"/>
+                </a:solidFill>
+                <a:latin typeface="Meiryo"/>
+                <a:ea typeface="Meiryo"/>
+                <a:cs typeface="Meiryo"/>
+              </a:rPr>
+              <a:t>縦軸：最適とされた漁獲率（制約つき）</a:t>
+            </a:r>
+          </a:p>
+        </p:txBody>
+      </p:sp>
+      <p:sp>
+        <p:nvSpPr>
+          <p:cNvPr id="19" name="TextBox 18"/>
+          <p:cNvSpPr txBox="1"/>
+          <p:nvPr/>
+        </p:nvSpPr>
+        <p:spPr>
+          <a:xfrm>
+            <a:off x="566928" y="4590288"/>
+            <a:ext cx="9869119" cy="274320"/>
+          </a:xfrm>
+          <a:prstGeom prst="rect">
+            <a:avLst/>
+          </a:prstGeom>
+          <a:noFill/>
+        </p:spPr>
+        <p:txBody>
+          <a:bodyPr wrap="square" anchor="t" lIns="0" rIns="0" tIns="0" bIns="0">
+            <a:spAutoFit/>
+          </a:bodyPr>
+          <a:lstStyle/>
+          <a:p>
+            <a:pPr algn="l">
+              <a:lnSpc>
+                <a:spcPct val="132000"/>
+              </a:lnSpc>
+              <a:spcAft>
+                <a:spcPts val="600"/>
+              </a:spcAft>
+            </a:pPr>
+            <a:r>
               <a:rPr sz="1150" b="0">
                 <a:solidFill>
-                  <a:srgbClr val="C0561A"/>
-                </a:solidFill>
-                <a:latin typeface="Meiryo"/>
-                <a:ea typeface="Meiryo"/>
-                <a:cs typeface="Meiryo"/>
-              </a:rPr>
-              <a:t>上限 0.95</a:t>
-            </a:r>
-          </a:p>
-        </p:txBody>
-      </p:sp>
-      <p:sp>
-        <p:nvSpPr>
-          <p:cNvPr id="12" name="figlabel"/>
-          <p:cNvSpPr txBox="1"/>
-          <p:nvPr/>
-        </p:nvSpPr>
-        <p:spPr>
-          <a:xfrm>
-            <a:off x="7253404" y="4081399"/>
-            <a:ext cx="502920" cy="216408"/>
-          </a:xfrm>
-          <a:prstGeom prst="rect">
-            <a:avLst/>
-          </a:prstGeom>
-          <a:noFill/>
-        </p:spPr>
-        <p:txBody>
-          <a:bodyPr wrap="none" anchor="ctr" lIns="0" rIns="0" tIns="0" bIns="0">
-            <a:spAutoFit/>
-          </a:bodyPr>
-          <a:lstStyle/>
-          <a:p>
-            <a:pPr algn="ctr">
-              <a:lnSpc>
-                <a:spcPct val="120000"/>
-              </a:lnSpc>
-              <a:spcAft>
-                <a:spcPts val="0"/>
-              </a:spcAft>
-            </a:pPr>
-            <a:r>
-              <a:rPr sz="1200" b="0">
-                <a:solidFill>
-                  <a:srgbClr val="222222"/>
-                </a:solidFill>
-                <a:latin typeface="Meiryo"/>
-                <a:ea typeface="Meiryo"/>
-                <a:cs typeface="Meiryo"/>
-              </a:rPr>
-              <a:t>マアジ</a:t>
-            </a:r>
-          </a:p>
-        </p:txBody>
-      </p:sp>
-      <p:sp>
-        <p:nvSpPr>
-          <p:cNvPr id="13" name="figlabel"/>
-          <p:cNvSpPr txBox="1"/>
-          <p:nvPr/>
-        </p:nvSpPr>
-        <p:spPr>
-          <a:xfrm>
-            <a:off x="8153756" y="4081399"/>
-            <a:ext cx="960120" cy="216408"/>
-          </a:xfrm>
-          <a:prstGeom prst="rect">
-            <a:avLst/>
-          </a:prstGeom>
-          <a:noFill/>
-        </p:spPr>
-        <p:txBody>
-          <a:bodyPr wrap="none" anchor="ctr" lIns="0" rIns="0" tIns="0" bIns="0">
-            <a:spAutoFit/>
-          </a:bodyPr>
-          <a:lstStyle/>
-          <a:p>
-            <a:pPr algn="ctr">
-              <a:lnSpc>
-                <a:spcPct val="120000"/>
-              </a:lnSpc>
-              <a:spcAft>
-                <a:spcPts val="0"/>
-              </a:spcAft>
-            </a:pPr>
-            <a:r>
-              <a:rPr sz="1200" b="0">
-                <a:solidFill>
-                  <a:srgbClr val="222222"/>
-                </a:solidFill>
-                <a:latin typeface="Meiryo"/>
-                <a:ea typeface="Meiryo"/>
-                <a:cs typeface="Meiryo"/>
-              </a:rPr>
-              <a:t>ウルメイワシ</a:t>
-            </a:r>
-          </a:p>
-        </p:txBody>
-      </p:sp>
-      <p:sp>
-        <p:nvSpPr>
-          <p:cNvPr id="14" name="figlabel"/>
-          <p:cNvSpPr txBox="1"/>
-          <p:nvPr/>
-        </p:nvSpPr>
-        <p:spPr>
-          <a:xfrm>
-            <a:off x="9587509" y="4081399"/>
-            <a:ext cx="350520" cy="216408"/>
-          </a:xfrm>
-          <a:prstGeom prst="rect">
-            <a:avLst/>
-          </a:prstGeom>
-          <a:noFill/>
-        </p:spPr>
-        <p:txBody>
-          <a:bodyPr wrap="none" anchor="ctr" lIns="0" rIns="0" tIns="0" bIns="0">
-            <a:spAutoFit/>
-          </a:bodyPr>
-          <a:lstStyle/>
-          <a:p>
-            <a:pPr algn="ctr">
-              <a:lnSpc>
-                <a:spcPct val="120000"/>
-              </a:lnSpc>
-              <a:spcAft>
-                <a:spcPts val="0"/>
-              </a:spcAft>
-            </a:pPr>
-            <a:r>
-              <a:rPr sz="1200" b="0">
-                <a:solidFill>
-                  <a:srgbClr val="222222"/>
-                </a:solidFill>
-                <a:latin typeface="Meiryo"/>
-                <a:ea typeface="Meiryo"/>
-                <a:cs typeface="Meiryo"/>
-              </a:rPr>
-              <a:t>ブリ</a:t>
-            </a:r>
-          </a:p>
-        </p:txBody>
-      </p:sp>
-      <p:sp>
-        <p:nvSpPr>
-          <p:cNvPr id="15" name="figlabel"/>
-          <p:cNvSpPr txBox="1"/>
-          <p:nvPr/>
-        </p:nvSpPr>
-        <p:spPr>
-          <a:xfrm>
-            <a:off x="10640261" y="4081399"/>
-            <a:ext cx="502920" cy="216408"/>
-          </a:xfrm>
-          <a:prstGeom prst="rect">
-            <a:avLst/>
-          </a:prstGeom>
-          <a:noFill/>
-        </p:spPr>
-        <p:txBody>
-          <a:bodyPr wrap="none" anchor="ctr" lIns="0" rIns="0" tIns="0" bIns="0">
-            <a:spAutoFit/>
-          </a:bodyPr>
-          <a:lstStyle/>
-          <a:p>
-            <a:pPr algn="ctr">
-              <a:lnSpc>
-                <a:spcPct val="120000"/>
-              </a:lnSpc>
-              <a:spcAft>
-                <a:spcPts val="0"/>
-              </a:spcAft>
-            </a:pPr>
-            <a:r>
-              <a:rPr sz="1200" b="0">
-                <a:solidFill>
-                  <a:srgbClr val="222222"/>
-                </a:solidFill>
-                <a:latin typeface="Meiryo"/>
-                <a:ea typeface="Meiryo"/>
-                <a:cs typeface="Meiryo"/>
-              </a:rPr>
-              <a:t>サワラ</a:t>
-            </a:r>
-          </a:p>
-        </p:txBody>
-      </p:sp>
-      <p:sp>
-        <p:nvSpPr>
-          <p:cNvPr id="16" name="figlabel"/>
-          <p:cNvSpPr txBox="1"/>
-          <p:nvPr/>
-        </p:nvSpPr>
-        <p:spPr>
-          <a:xfrm>
-            <a:off x="9855683" y="4328947"/>
-            <a:ext cx="1722120" cy="199898"/>
-          </a:xfrm>
-          <a:prstGeom prst="rect">
-            <a:avLst/>
-          </a:prstGeom>
-          <a:noFill/>
-        </p:spPr>
-        <p:txBody>
-          <a:bodyPr wrap="none" anchor="ctr" lIns="0" rIns="0" tIns="0" bIns="0">
-            <a:spAutoFit/>
-          </a:bodyPr>
-          <a:lstStyle/>
-          <a:p>
-            <a:pPr algn="r">
-              <a:lnSpc>
-                <a:spcPct val="120000"/>
-              </a:lnSpc>
-              <a:spcAft>
-                <a:spcPts val="0"/>
-              </a:spcAft>
-            </a:pPr>
-            <a:r>
-              <a:rPr sz="1100" b="0">
-                <a:solidFill>
                   <a:srgbClr val="6E6E6E"/>
                 </a:solidFill>
                 <a:latin typeface="Meiryo"/>
                 <a:ea typeface="Meiryo"/>
                 <a:cs typeface="Meiryo"/>
               </a:rPr>
-              <a:t>縦軸：最適とされた漁獲率</a:t>
-            </a:r>
-          </a:p>
-        </p:txBody>
-      </p:sp>
-      <p:sp>
-        <p:nvSpPr>
-          <p:cNvPr id="17" name="Rectangle 16"/>
+              <a:t>左＝制約なしの上限感度、右＝制約つきグリッド探索の f*。どちらも漁獲率の刻みは0.05に固定（制約MSY 527.7／254.9 千トン/年）。</a:t>
+            </a:r>
+          </a:p>
+        </p:txBody>
+      </p:sp>
+      <p:sp>
+        <p:nvSpPr>
+          <p:cNvPr id="20" name="Rectangle 19"/>
           <p:cNvSpPr/>
           <p:nvPr/>
         </p:nvSpPr>
         <p:spPr>
           <a:xfrm>
-            <a:off x="566928" y="5257800"/>
-            <a:ext cx="11057839" cy="960120"/>
+            <a:off x="566928" y="4956048"/>
+            <a:ext cx="11057839" cy="1234440"/>
           </a:xfrm>
           <a:prstGeom prst="rect">
             <a:avLst/>
@@ -6452,14 +6589,14 @@
       </p:sp>
       <p:sp>
         <p:nvSpPr>
-          <p:cNvPr id="18" name="TextBox 17"/>
-          <p:cNvSpPr txBox="1"/>
-          <p:nvPr/>
-        </p:nvSpPr>
-        <p:spPr>
-          <a:xfrm>
-            <a:off x="768096" y="5394960"/>
-            <a:ext cx="10655503" cy="731520"/>
+          <p:cNvPr id="21" name="TextBox 20"/>
+          <p:cNvSpPr txBox="1"/>
+          <p:nvPr/>
+        </p:nvSpPr>
+        <p:spPr>
+          <a:xfrm>
+            <a:off x="768096" y="5084064"/>
+            <a:ext cx="10655503" cy="1005840"/>
           </a:xfrm>
           <a:prstGeom prst="rect">
             <a:avLst/>
@@ -6489,7 +6626,28 @@
                 <a:ea typeface="Meiryo"/>
                 <a:cs typeface="Meiryo"/>
               </a:rPr>
-              <a:t>探索で許す上限を 0.25 → 1.25 と上げると、答えの漁獲量も 207 → 1094 千トンと上がり続ける。</a:t>
+              <a:t>制約なしでは、探索の上限を 0.25 → 1.25 と上げると答えも 207 → 1094 千トンと上がり続ける。</a:t>
+            </a:r>
+          </a:p>
+          <a:p>
+            <a:pPr algn="l">
+              <a:lnSpc>
+                <a:spcPct val="132000"/>
+              </a:lnSpc>
+              <a:spcAft>
+                <a:spcPts val="500"/>
+              </a:spcAft>
+            </a:pPr>
+            <a:r>
+              <a:rPr sz="1600" b="0">
+                <a:solidFill>
+                  <a:srgbClr val="222222"/>
+                </a:solidFill>
+                <a:latin typeface="Meiryo"/>
+                <a:ea typeface="Meiryo"/>
+                <a:cs typeface="Meiryo"/>
+              </a:rPr>
+              <a:t>資源が減りすぎない条件をつけても、サワラは両時期とも上限 0.95 に張り付いたまま。</a:t>
             </a:r>
           </a:p>
           <a:p>
@@ -17901,6 +18059,7204 @@
                 <a:cs typeface="Meiryo"/>
               </a:rPr>
               <a:t>餌の魚どうしの取り合いを入れると対角はゼロでなくなり、内側の最大が戻りうる。</a:t>
+            </a:r>
+          </a:p>
+        </p:txBody>
+      </p:sp>
+    </p:spTree>
+  </p:cSld>
+  <p:clrMapOvr>
+    <a:masterClrMapping/>
+  </p:clrMapOvr>
+</p:sld>
+</file>
+
+<file path=ppt/slides/slide25.xml><?xml version="1.0" encoding="utf-8"?>
+<p:sld xmlns:a="http://schemas.openxmlformats.org/drawingml/2006/main" xmlns:p="http://schemas.openxmlformats.org/presentationml/2006/main" xmlns:r="http://schemas.openxmlformats.org/officeDocument/2006/relationships">
+  <p:cSld>
+    <p:spTree>
+      <p:nvGrpSpPr>
+        <p:cNvPr id="1" name=""/>
+        <p:cNvGrpSpPr/>
+        <p:nvPr/>
+      </p:nvGrpSpPr>
+      <p:grpSpPr/>
+      <p:sp>
+        <p:nvSpPr>
+          <p:cNvPr id="2" name="TextBox 1"/>
+          <p:cNvSpPr txBox="1"/>
+          <p:nvPr/>
+        </p:nvSpPr>
+        <p:spPr>
+          <a:xfrm>
+            <a:off x="566928" y="329184"/>
+            <a:ext cx="11057839" cy="822960"/>
+          </a:xfrm>
+          <a:prstGeom prst="rect">
+            <a:avLst/>
+          </a:prstGeom>
+          <a:noFill/>
+        </p:spPr>
+        <p:txBody>
+          <a:bodyPr wrap="square" anchor="t" lIns="0" rIns="0" tIns="0" bIns="0">
+            <a:spAutoFit/>
+          </a:bodyPr>
+          <a:lstStyle/>
+          <a:p>
+            <a:pPr algn="l">
+              <a:lnSpc>
+                <a:spcPct val="115000"/>
+              </a:lnSpc>
+              <a:spcAft>
+                <a:spcPts val="600"/>
+              </a:spcAft>
+            </a:pPr>
+            <a:r>
+              <a:rPr sz="2600" b="1">
+                <a:solidFill>
+                  <a:srgbClr val="1F4E79"/>
+                </a:solidFill>
+                <a:latin typeface="Meiryo"/>
+                <a:ea typeface="Meiryo"/>
+                <a:cs typeface="Meiryo"/>
+              </a:rPr>
+              <a:t>［マイワシ版・8枚目］どちらの時期も、観測をよく再現できた</a:t>
+            </a:r>
+          </a:p>
+        </p:txBody>
+      </p:sp>
+      <p:sp>
+        <p:nvSpPr>
+          <p:cNvPr id="3" name="TextBox 2"/>
+          <p:cNvSpPr txBox="1"/>
+          <p:nvPr/>
+        </p:nvSpPr>
+        <p:spPr>
+          <a:xfrm>
+            <a:off x="11048695" y="6291072"/>
+            <a:ext cx="640080" cy="274320"/>
+          </a:xfrm>
+          <a:prstGeom prst="rect">
+            <a:avLst/>
+          </a:prstGeom>
+          <a:noFill/>
+        </p:spPr>
+        <p:txBody>
+          <a:bodyPr wrap="none" lIns="0" rIns="0" tIns="0" bIns="0">
+            <a:spAutoFit/>
+          </a:bodyPr>
+          <a:lstStyle/>
+          <a:p>
+            <a:pPr algn="r"/>
+            <a:r>
+              <a:rPr sz="1100" b="0">
+                <a:solidFill>
+                  <a:srgbClr val="6E6E6E"/>
+                </a:solidFill>
+                <a:latin typeface="Meiryo"/>
+                <a:ea typeface="Meiryo"/>
+                <a:cs typeface="Meiryo"/>
+              </a:rPr>
+              <a:t>25</a:t>
+            </a:r>
+          </a:p>
+        </p:txBody>
+      </p:sp>
+      <p:pic>
+        <p:nvPicPr>
+          <p:cNvPr id="4" name="Picture 3" descr="05m_当てはまり_マイワシ.png"/>
+          <p:cNvPicPr>
+            <a:picLocks noChangeAspect="1"/>
+          </p:cNvPicPr>
+          <p:nvPr/>
+        </p:nvPicPr>
+        <p:blipFill>
+          <a:blip r:embed="rId2"/>
+          <a:stretch>
+            <a:fillRect/>
+          </a:stretch>
+        </p:blipFill>
+        <p:spPr>
+          <a:xfrm>
+            <a:off x="1069848" y="1207008"/>
+            <a:ext cx="10058400" cy="4160520"/>
+          </a:xfrm>
+          <a:prstGeom prst="rect">
+            <a:avLst/>
+          </a:prstGeom>
+        </p:spPr>
+      </p:pic>
+      <p:sp>
+        <p:nvSpPr>
+          <p:cNvPr id="5" name="figlabel"/>
+          <p:cNvSpPr txBox="1"/>
+          <p:nvPr/>
+        </p:nvSpPr>
+        <p:spPr>
+          <a:xfrm>
+            <a:off x="2711786" y="1585554"/>
+            <a:ext cx="655320" cy="216408"/>
+          </a:xfrm>
+          <a:prstGeom prst="rect">
+            <a:avLst/>
+          </a:prstGeom>
+          <a:noFill/>
+        </p:spPr>
+        <p:txBody>
+          <a:bodyPr wrap="none" anchor="ctr" lIns="0" rIns="0" tIns="0" bIns="0">
+            <a:spAutoFit/>
+          </a:bodyPr>
+          <a:lstStyle/>
+          <a:p>
+            <a:pPr algn="ctr">
+              <a:lnSpc>
+                <a:spcPct val="120000"/>
+              </a:lnSpc>
+              <a:spcAft>
+                <a:spcPts val="0"/>
+              </a:spcAft>
+            </a:pPr>
+            <a:r>
+              <a:rPr sz="1200" b="0">
+                <a:solidFill>
+                  <a:srgbClr val="222222"/>
+                </a:solidFill>
+                <a:latin typeface="Meiryo"/>
+                <a:ea typeface="Meiryo"/>
+                <a:cs typeface="Meiryo"/>
+              </a:rPr>
+              <a:t>マイワシ</a:t>
+            </a:r>
+          </a:p>
+        </p:txBody>
+      </p:sp>
+      <p:sp>
+        <p:nvSpPr>
+          <p:cNvPr id="6" name="figlabel"/>
+          <p:cNvSpPr txBox="1"/>
+          <p:nvPr/>
+        </p:nvSpPr>
+        <p:spPr>
+          <a:xfrm>
+            <a:off x="2217326" y="1855870"/>
+            <a:ext cx="359410" cy="175133"/>
+          </a:xfrm>
+          <a:prstGeom prst="rect">
+            <a:avLst/>
+          </a:prstGeom>
+          <a:noFill/>
+        </p:spPr>
+        <p:txBody>
+          <a:bodyPr wrap="none" anchor="ctr" lIns="0" rIns="0" tIns="0" bIns="0">
+            <a:spAutoFit/>
+          </a:bodyPr>
+          <a:lstStyle/>
+          <a:p>
+            <a:pPr algn="l">
+              <a:lnSpc>
+                <a:spcPct val="120000"/>
+              </a:lnSpc>
+              <a:spcAft>
+                <a:spcPts val="0"/>
+              </a:spcAft>
+            </a:pPr>
+            <a:r>
+              <a:rPr sz="950" b="0">
+                <a:solidFill>
+                  <a:srgbClr val="1F4E79"/>
+                </a:solidFill>
+                <a:latin typeface="Meiryo"/>
+                <a:ea typeface="Meiryo"/>
+                <a:cs typeface="Meiryo"/>
+              </a:rPr>
+              <a:t>0.106</a:t>
+            </a:r>
+          </a:p>
+        </p:txBody>
+      </p:sp>
+      <p:sp>
+        <p:nvSpPr>
+          <p:cNvPr id="7" name="figlabel"/>
+          <p:cNvSpPr txBox="1"/>
+          <p:nvPr/>
+        </p:nvSpPr>
+        <p:spPr>
+          <a:xfrm>
+            <a:off x="2820214" y="1855870"/>
+            <a:ext cx="359410" cy="175133"/>
+          </a:xfrm>
+          <a:prstGeom prst="rect">
+            <a:avLst/>
+          </a:prstGeom>
+          <a:noFill/>
+        </p:spPr>
+        <p:txBody>
+          <a:bodyPr wrap="none" anchor="ctr" lIns="0" rIns="0" tIns="0" bIns="0">
+            <a:spAutoFit/>
+          </a:bodyPr>
+          <a:lstStyle/>
+          <a:p>
+            <a:pPr algn="l">
+              <a:lnSpc>
+                <a:spcPct val="120000"/>
+              </a:lnSpc>
+              <a:spcAft>
+                <a:spcPts val="0"/>
+              </a:spcAft>
+            </a:pPr>
+            <a:r>
+              <a:rPr sz="950" b="0">
+                <a:solidFill>
+                  <a:srgbClr val="5E8FB5"/>
+                </a:solidFill>
+                <a:latin typeface="Meiryo"/>
+                <a:ea typeface="Meiryo"/>
+                <a:cs typeface="Meiryo"/>
+              </a:rPr>
+              <a:t>0.460</a:t>
+            </a:r>
+          </a:p>
+        </p:txBody>
+      </p:sp>
+      <p:sp>
+        <p:nvSpPr>
+          <p:cNvPr id="8" name="figlabel"/>
+          <p:cNvSpPr txBox="1"/>
+          <p:nvPr/>
+        </p:nvSpPr>
+        <p:spPr>
+          <a:xfrm>
+            <a:off x="3423103" y="1855870"/>
+            <a:ext cx="359410" cy="175133"/>
+          </a:xfrm>
+          <a:prstGeom prst="rect">
+            <a:avLst/>
+          </a:prstGeom>
+          <a:noFill/>
+        </p:spPr>
+        <p:txBody>
+          <a:bodyPr wrap="none" anchor="ctr" lIns="0" rIns="0" tIns="0" bIns="0">
+            <a:spAutoFit/>
+          </a:bodyPr>
+          <a:lstStyle/>
+          <a:p>
+            <a:pPr algn="l">
+              <a:lnSpc>
+                <a:spcPct val="120000"/>
+              </a:lnSpc>
+              <a:spcAft>
+                <a:spcPts val="0"/>
+              </a:spcAft>
+            </a:pPr>
+            <a:r>
+              <a:rPr sz="950" b="0">
+                <a:solidFill>
+                  <a:srgbClr val="7E8B96"/>
+                </a:solidFill>
+                <a:latin typeface="Meiryo"/>
+                <a:ea typeface="Meiryo"/>
+                <a:cs typeface="Meiryo"/>
+              </a:rPr>
+              <a:t>0.305</a:t>
+            </a:r>
+          </a:p>
+        </p:txBody>
+      </p:sp>
+      <p:sp>
+        <p:nvSpPr>
+          <p:cNvPr id="9" name="figlabel"/>
+          <p:cNvSpPr txBox="1"/>
+          <p:nvPr/>
+        </p:nvSpPr>
+        <p:spPr>
+          <a:xfrm>
+            <a:off x="4934400" y="1585554"/>
+            <a:ext cx="960120" cy="216408"/>
+          </a:xfrm>
+          <a:prstGeom prst="rect">
+            <a:avLst/>
+          </a:prstGeom>
+          <a:noFill/>
+        </p:spPr>
+        <p:txBody>
+          <a:bodyPr wrap="none" anchor="ctr" lIns="0" rIns="0" tIns="0" bIns="0">
+            <a:spAutoFit/>
+          </a:bodyPr>
+          <a:lstStyle/>
+          <a:p>
+            <a:pPr algn="ctr">
+              <a:lnSpc>
+                <a:spcPct val="120000"/>
+              </a:lnSpc>
+              <a:spcAft>
+                <a:spcPts val="0"/>
+              </a:spcAft>
+            </a:pPr>
+            <a:r>
+              <a:rPr sz="1200" b="0">
+                <a:solidFill>
+                  <a:srgbClr val="222222"/>
+                </a:solidFill>
+                <a:latin typeface="Meiryo"/>
+                <a:ea typeface="Meiryo"/>
+                <a:cs typeface="Meiryo"/>
+              </a:rPr>
+              <a:t>ウルメイワシ</a:t>
+            </a:r>
+          </a:p>
+        </p:txBody>
+      </p:sp>
+      <p:sp>
+        <p:nvSpPr>
+          <p:cNvPr id="10" name="figlabel"/>
+          <p:cNvSpPr txBox="1"/>
+          <p:nvPr/>
+        </p:nvSpPr>
+        <p:spPr>
+          <a:xfrm>
+            <a:off x="4592340" y="1855870"/>
+            <a:ext cx="359410" cy="175133"/>
+          </a:xfrm>
+          <a:prstGeom prst="rect">
+            <a:avLst/>
+          </a:prstGeom>
+          <a:noFill/>
+        </p:spPr>
+        <p:txBody>
+          <a:bodyPr wrap="none" anchor="ctr" lIns="0" rIns="0" tIns="0" bIns="0">
+            <a:spAutoFit/>
+          </a:bodyPr>
+          <a:lstStyle/>
+          <a:p>
+            <a:pPr algn="l">
+              <a:lnSpc>
+                <a:spcPct val="120000"/>
+              </a:lnSpc>
+              <a:spcAft>
+                <a:spcPts val="0"/>
+              </a:spcAft>
+            </a:pPr>
+            <a:r>
+              <a:rPr sz="950" b="0">
+                <a:solidFill>
+                  <a:srgbClr val="1F4E79"/>
+                </a:solidFill>
+                <a:latin typeface="Meiryo"/>
+                <a:ea typeface="Meiryo"/>
+                <a:cs typeface="Meiryo"/>
+              </a:rPr>
+              <a:t>0.286</a:t>
+            </a:r>
+          </a:p>
+        </p:txBody>
+      </p:sp>
+      <p:sp>
+        <p:nvSpPr>
+          <p:cNvPr id="11" name="figlabel"/>
+          <p:cNvSpPr txBox="1"/>
+          <p:nvPr/>
+        </p:nvSpPr>
+        <p:spPr>
+          <a:xfrm>
+            <a:off x="5195228" y="1855870"/>
+            <a:ext cx="359410" cy="175133"/>
+          </a:xfrm>
+          <a:prstGeom prst="rect">
+            <a:avLst/>
+          </a:prstGeom>
+          <a:noFill/>
+        </p:spPr>
+        <p:txBody>
+          <a:bodyPr wrap="none" anchor="ctr" lIns="0" rIns="0" tIns="0" bIns="0">
+            <a:spAutoFit/>
+          </a:bodyPr>
+          <a:lstStyle/>
+          <a:p>
+            <a:pPr algn="l">
+              <a:lnSpc>
+                <a:spcPct val="120000"/>
+              </a:lnSpc>
+              <a:spcAft>
+                <a:spcPts val="0"/>
+              </a:spcAft>
+            </a:pPr>
+            <a:r>
+              <a:rPr sz="950" b="0">
+                <a:solidFill>
+                  <a:srgbClr val="5E8FB5"/>
+                </a:solidFill>
+                <a:latin typeface="Meiryo"/>
+                <a:ea typeface="Meiryo"/>
+                <a:cs typeface="Meiryo"/>
+              </a:rPr>
+              <a:t>0.336</a:t>
+            </a:r>
+          </a:p>
+        </p:txBody>
+      </p:sp>
+      <p:sp>
+        <p:nvSpPr>
+          <p:cNvPr id="12" name="figlabel"/>
+          <p:cNvSpPr txBox="1"/>
+          <p:nvPr/>
+        </p:nvSpPr>
+        <p:spPr>
+          <a:xfrm>
+            <a:off x="5798117" y="1855870"/>
+            <a:ext cx="359410" cy="175133"/>
+          </a:xfrm>
+          <a:prstGeom prst="rect">
+            <a:avLst/>
+          </a:prstGeom>
+          <a:noFill/>
+        </p:spPr>
+        <p:txBody>
+          <a:bodyPr wrap="none" anchor="ctr" lIns="0" rIns="0" tIns="0" bIns="0">
+            <a:spAutoFit/>
+          </a:bodyPr>
+          <a:lstStyle/>
+          <a:p>
+            <a:pPr algn="l">
+              <a:lnSpc>
+                <a:spcPct val="120000"/>
+              </a:lnSpc>
+              <a:spcAft>
+                <a:spcPts val="0"/>
+              </a:spcAft>
+            </a:pPr>
+            <a:r>
+              <a:rPr sz="950" b="0">
+                <a:solidFill>
+                  <a:srgbClr val="7E8B96"/>
+                </a:solidFill>
+                <a:latin typeface="Meiryo"/>
+                <a:ea typeface="Meiryo"/>
+                <a:cs typeface="Meiryo"/>
+              </a:rPr>
+              <a:t>0.512</a:t>
+            </a:r>
+          </a:p>
+        </p:txBody>
+      </p:sp>
+      <p:sp>
+        <p:nvSpPr>
+          <p:cNvPr id="13" name="figlabel"/>
+          <p:cNvSpPr txBox="1"/>
+          <p:nvPr/>
+        </p:nvSpPr>
+        <p:spPr>
+          <a:xfrm>
+            <a:off x="7614215" y="1585554"/>
+            <a:ext cx="350520" cy="216408"/>
+          </a:xfrm>
+          <a:prstGeom prst="rect">
+            <a:avLst/>
+          </a:prstGeom>
+          <a:noFill/>
+        </p:spPr>
+        <p:txBody>
+          <a:bodyPr wrap="none" anchor="ctr" lIns="0" rIns="0" tIns="0" bIns="0">
+            <a:spAutoFit/>
+          </a:bodyPr>
+          <a:lstStyle/>
+          <a:p>
+            <a:pPr algn="ctr">
+              <a:lnSpc>
+                <a:spcPct val="120000"/>
+              </a:lnSpc>
+              <a:spcAft>
+                <a:spcPts val="0"/>
+              </a:spcAft>
+            </a:pPr>
+            <a:r>
+              <a:rPr sz="1200" b="0">
+                <a:solidFill>
+                  <a:srgbClr val="222222"/>
+                </a:solidFill>
+                <a:latin typeface="Meiryo"/>
+                <a:ea typeface="Meiryo"/>
+                <a:cs typeface="Meiryo"/>
+              </a:rPr>
+              <a:t>ブリ</a:t>
+            </a:r>
+          </a:p>
+        </p:txBody>
+      </p:sp>
+      <p:sp>
+        <p:nvSpPr>
+          <p:cNvPr id="14" name="figlabel"/>
+          <p:cNvSpPr txBox="1"/>
+          <p:nvPr/>
+        </p:nvSpPr>
+        <p:spPr>
+          <a:xfrm>
+            <a:off x="6967354" y="1855870"/>
+            <a:ext cx="359410" cy="175133"/>
+          </a:xfrm>
+          <a:prstGeom prst="rect">
+            <a:avLst/>
+          </a:prstGeom>
+          <a:noFill/>
+        </p:spPr>
+        <p:txBody>
+          <a:bodyPr wrap="none" anchor="ctr" lIns="0" rIns="0" tIns="0" bIns="0">
+            <a:spAutoFit/>
+          </a:bodyPr>
+          <a:lstStyle/>
+          <a:p>
+            <a:pPr algn="l">
+              <a:lnSpc>
+                <a:spcPct val="120000"/>
+              </a:lnSpc>
+              <a:spcAft>
+                <a:spcPts val="0"/>
+              </a:spcAft>
+            </a:pPr>
+            <a:r>
+              <a:rPr sz="950" b="0">
+                <a:solidFill>
+                  <a:srgbClr val="1F4E79"/>
+                </a:solidFill>
+                <a:latin typeface="Meiryo"/>
+                <a:ea typeface="Meiryo"/>
+                <a:cs typeface="Meiryo"/>
+              </a:rPr>
+              <a:t>0.099</a:t>
+            </a:r>
+          </a:p>
+        </p:txBody>
+      </p:sp>
+      <p:sp>
+        <p:nvSpPr>
+          <p:cNvPr id="15" name="figlabel"/>
+          <p:cNvSpPr txBox="1"/>
+          <p:nvPr/>
+        </p:nvSpPr>
+        <p:spPr>
+          <a:xfrm>
+            <a:off x="7570242" y="1855870"/>
+            <a:ext cx="359410" cy="175133"/>
+          </a:xfrm>
+          <a:prstGeom prst="rect">
+            <a:avLst/>
+          </a:prstGeom>
+          <a:noFill/>
+        </p:spPr>
+        <p:txBody>
+          <a:bodyPr wrap="none" anchor="ctr" lIns="0" rIns="0" tIns="0" bIns="0">
+            <a:spAutoFit/>
+          </a:bodyPr>
+          <a:lstStyle/>
+          <a:p>
+            <a:pPr algn="l">
+              <a:lnSpc>
+                <a:spcPct val="120000"/>
+              </a:lnSpc>
+              <a:spcAft>
+                <a:spcPts val="0"/>
+              </a:spcAft>
+            </a:pPr>
+            <a:r>
+              <a:rPr sz="950" b="0">
+                <a:solidFill>
+                  <a:srgbClr val="5E8FB5"/>
+                </a:solidFill>
+                <a:latin typeface="Meiryo"/>
+                <a:ea typeface="Meiryo"/>
+                <a:cs typeface="Meiryo"/>
+              </a:rPr>
+              <a:t>0.205</a:t>
+            </a:r>
+          </a:p>
+        </p:txBody>
+      </p:sp>
+      <p:sp>
+        <p:nvSpPr>
+          <p:cNvPr id="16" name="figlabel"/>
+          <p:cNvSpPr txBox="1"/>
+          <p:nvPr/>
+        </p:nvSpPr>
+        <p:spPr>
+          <a:xfrm>
+            <a:off x="8173131" y="1855870"/>
+            <a:ext cx="359410" cy="175133"/>
+          </a:xfrm>
+          <a:prstGeom prst="rect">
+            <a:avLst/>
+          </a:prstGeom>
+          <a:noFill/>
+        </p:spPr>
+        <p:txBody>
+          <a:bodyPr wrap="none" anchor="ctr" lIns="0" rIns="0" tIns="0" bIns="0">
+            <a:spAutoFit/>
+          </a:bodyPr>
+          <a:lstStyle/>
+          <a:p>
+            <a:pPr algn="l">
+              <a:lnSpc>
+                <a:spcPct val="120000"/>
+              </a:lnSpc>
+              <a:spcAft>
+                <a:spcPts val="0"/>
+              </a:spcAft>
+            </a:pPr>
+            <a:r>
+              <a:rPr sz="950" b="0">
+                <a:solidFill>
+                  <a:srgbClr val="7E8B96"/>
+                </a:solidFill>
+                <a:latin typeface="Meiryo"/>
+                <a:ea typeface="Meiryo"/>
+                <a:cs typeface="Meiryo"/>
+              </a:rPr>
+              <a:t>0.417</a:t>
+            </a:r>
+          </a:p>
+        </p:txBody>
+      </p:sp>
+      <p:sp>
+        <p:nvSpPr>
+          <p:cNvPr id="17" name="figlabel"/>
+          <p:cNvSpPr txBox="1"/>
+          <p:nvPr/>
+        </p:nvSpPr>
+        <p:spPr>
+          <a:xfrm>
+            <a:off x="9913029" y="1585554"/>
+            <a:ext cx="502920" cy="216408"/>
+          </a:xfrm>
+          <a:prstGeom prst="rect">
+            <a:avLst/>
+          </a:prstGeom>
+          <a:noFill/>
+        </p:spPr>
+        <p:txBody>
+          <a:bodyPr wrap="none" anchor="ctr" lIns="0" rIns="0" tIns="0" bIns="0">
+            <a:spAutoFit/>
+          </a:bodyPr>
+          <a:lstStyle/>
+          <a:p>
+            <a:pPr algn="ctr">
+              <a:lnSpc>
+                <a:spcPct val="120000"/>
+              </a:lnSpc>
+              <a:spcAft>
+                <a:spcPts val="0"/>
+              </a:spcAft>
+            </a:pPr>
+            <a:r>
+              <a:rPr sz="1200" b="0">
+                <a:solidFill>
+                  <a:srgbClr val="222222"/>
+                </a:solidFill>
+                <a:latin typeface="Meiryo"/>
+                <a:ea typeface="Meiryo"/>
+                <a:cs typeface="Meiryo"/>
+              </a:rPr>
+              <a:t>サワラ</a:t>
+            </a:r>
+          </a:p>
+        </p:txBody>
+      </p:sp>
+      <p:sp>
+        <p:nvSpPr>
+          <p:cNvPr id="18" name="figlabel"/>
+          <p:cNvSpPr txBox="1"/>
+          <p:nvPr/>
+        </p:nvSpPr>
+        <p:spPr>
+          <a:xfrm>
+            <a:off x="9342368" y="1855870"/>
+            <a:ext cx="359410" cy="175133"/>
+          </a:xfrm>
+          <a:prstGeom prst="rect">
+            <a:avLst/>
+          </a:prstGeom>
+          <a:noFill/>
+        </p:spPr>
+        <p:txBody>
+          <a:bodyPr wrap="none" anchor="ctr" lIns="0" rIns="0" tIns="0" bIns="0">
+            <a:spAutoFit/>
+          </a:bodyPr>
+          <a:lstStyle/>
+          <a:p>
+            <a:pPr algn="l">
+              <a:lnSpc>
+                <a:spcPct val="120000"/>
+              </a:lnSpc>
+              <a:spcAft>
+                <a:spcPts val="0"/>
+              </a:spcAft>
+            </a:pPr>
+            <a:r>
+              <a:rPr sz="950" b="0">
+                <a:solidFill>
+                  <a:srgbClr val="1F4E79"/>
+                </a:solidFill>
+                <a:latin typeface="Meiryo"/>
+                <a:ea typeface="Meiryo"/>
+                <a:cs typeface="Meiryo"/>
+              </a:rPr>
+              <a:t>0.090</a:t>
+            </a:r>
+          </a:p>
+        </p:txBody>
+      </p:sp>
+      <p:sp>
+        <p:nvSpPr>
+          <p:cNvPr id="19" name="figlabel"/>
+          <p:cNvSpPr txBox="1"/>
+          <p:nvPr/>
+        </p:nvSpPr>
+        <p:spPr>
+          <a:xfrm>
+            <a:off x="9945256" y="1855870"/>
+            <a:ext cx="359410" cy="175133"/>
+          </a:xfrm>
+          <a:prstGeom prst="rect">
+            <a:avLst/>
+          </a:prstGeom>
+          <a:noFill/>
+        </p:spPr>
+        <p:txBody>
+          <a:bodyPr wrap="none" anchor="ctr" lIns="0" rIns="0" tIns="0" bIns="0">
+            <a:spAutoFit/>
+          </a:bodyPr>
+          <a:lstStyle/>
+          <a:p>
+            <a:pPr algn="l">
+              <a:lnSpc>
+                <a:spcPct val="120000"/>
+              </a:lnSpc>
+              <a:spcAft>
+                <a:spcPts val="0"/>
+              </a:spcAft>
+            </a:pPr>
+            <a:r>
+              <a:rPr sz="950" b="0">
+                <a:solidFill>
+                  <a:srgbClr val="5E8FB5"/>
+                </a:solidFill>
+                <a:latin typeface="Meiryo"/>
+                <a:ea typeface="Meiryo"/>
+                <a:cs typeface="Meiryo"/>
+              </a:rPr>
+              <a:t>0.221</a:t>
+            </a:r>
+          </a:p>
+        </p:txBody>
+      </p:sp>
+      <p:sp>
+        <p:nvSpPr>
+          <p:cNvPr id="20" name="figlabel"/>
+          <p:cNvSpPr txBox="1"/>
+          <p:nvPr/>
+        </p:nvSpPr>
+        <p:spPr>
+          <a:xfrm>
+            <a:off x="10548145" y="1855870"/>
+            <a:ext cx="359410" cy="175133"/>
+          </a:xfrm>
+          <a:prstGeom prst="rect">
+            <a:avLst/>
+          </a:prstGeom>
+          <a:noFill/>
+        </p:spPr>
+        <p:txBody>
+          <a:bodyPr wrap="none" anchor="ctr" lIns="0" rIns="0" tIns="0" bIns="0">
+            <a:spAutoFit/>
+          </a:bodyPr>
+          <a:lstStyle/>
+          <a:p>
+            <a:pPr algn="l">
+              <a:lnSpc>
+                <a:spcPct val="120000"/>
+              </a:lnSpc>
+              <a:spcAft>
+                <a:spcPts val="0"/>
+              </a:spcAft>
+            </a:pPr>
+            <a:r>
+              <a:rPr sz="950" b="0">
+                <a:solidFill>
+                  <a:srgbClr val="7E8B96"/>
+                </a:solidFill>
+                <a:latin typeface="Meiryo"/>
+                <a:ea typeface="Meiryo"/>
+                <a:cs typeface="Meiryo"/>
+              </a:rPr>
+              <a:t>0.399</a:t>
+            </a:r>
+          </a:p>
+        </p:txBody>
+      </p:sp>
+      <p:sp>
+        <p:nvSpPr>
+          <p:cNvPr id="21" name="figlabel"/>
+          <p:cNvSpPr txBox="1"/>
+          <p:nvPr/>
+        </p:nvSpPr>
+        <p:spPr>
+          <a:xfrm>
+            <a:off x="2711786" y="3318875"/>
+            <a:ext cx="655320" cy="216408"/>
+          </a:xfrm>
+          <a:prstGeom prst="rect">
+            <a:avLst/>
+          </a:prstGeom>
+          <a:noFill/>
+        </p:spPr>
+        <p:txBody>
+          <a:bodyPr wrap="none" anchor="ctr" lIns="0" rIns="0" tIns="0" bIns="0">
+            <a:spAutoFit/>
+          </a:bodyPr>
+          <a:lstStyle/>
+          <a:p>
+            <a:pPr algn="ctr">
+              <a:lnSpc>
+                <a:spcPct val="120000"/>
+              </a:lnSpc>
+              <a:spcAft>
+                <a:spcPts val="0"/>
+              </a:spcAft>
+            </a:pPr>
+            <a:r>
+              <a:rPr sz="1200" b="0">
+                <a:solidFill>
+                  <a:srgbClr val="222222"/>
+                </a:solidFill>
+                <a:latin typeface="Meiryo"/>
+                <a:ea typeface="Meiryo"/>
+                <a:cs typeface="Meiryo"/>
+              </a:rPr>
+              <a:t>マイワシ</a:t>
+            </a:r>
+          </a:p>
+        </p:txBody>
+      </p:sp>
+      <p:sp>
+        <p:nvSpPr>
+          <p:cNvPr id="22" name="figlabel"/>
+          <p:cNvSpPr txBox="1"/>
+          <p:nvPr/>
+        </p:nvSpPr>
+        <p:spPr>
+          <a:xfrm>
+            <a:off x="2217326" y="3589191"/>
+            <a:ext cx="359410" cy="175133"/>
+          </a:xfrm>
+          <a:prstGeom prst="rect">
+            <a:avLst/>
+          </a:prstGeom>
+          <a:noFill/>
+        </p:spPr>
+        <p:txBody>
+          <a:bodyPr wrap="none" anchor="ctr" lIns="0" rIns="0" tIns="0" bIns="0">
+            <a:spAutoFit/>
+          </a:bodyPr>
+          <a:lstStyle/>
+          <a:p>
+            <a:pPr algn="l">
+              <a:lnSpc>
+                <a:spcPct val="120000"/>
+              </a:lnSpc>
+              <a:spcAft>
+                <a:spcPts val="0"/>
+              </a:spcAft>
+            </a:pPr>
+            <a:r>
+              <a:rPr sz="950" b="0">
+                <a:solidFill>
+                  <a:srgbClr val="1F4E79"/>
+                </a:solidFill>
+                <a:latin typeface="Meiryo"/>
+                <a:ea typeface="Meiryo"/>
+                <a:cs typeface="Meiryo"/>
+              </a:rPr>
+              <a:t>0.060</a:t>
+            </a:r>
+          </a:p>
+        </p:txBody>
+      </p:sp>
+      <p:sp>
+        <p:nvSpPr>
+          <p:cNvPr id="23" name="figlabel"/>
+          <p:cNvSpPr txBox="1"/>
+          <p:nvPr/>
+        </p:nvSpPr>
+        <p:spPr>
+          <a:xfrm>
+            <a:off x="2820214" y="3589191"/>
+            <a:ext cx="359410" cy="175133"/>
+          </a:xfrm>
+          <a:prstGeom prst="rect">
+            <a:avLst/>
+          </a:prstGeom>
+          <a:noFill/>
+        </p:spPr>
+        <p:txBody>
+          <a:bodyPr wrap="none" anchor="ctr" lIns="0" rIns="0" tIns="0" bIns="0">
+            <a:spAutoFit/>
+          </a:bodyPr>
+          <a:lstStyle/>
+          <a:p>
+            <a:pPr algn="l">
+              <a:lnSpc>
+                <a:spcPct val="120000"/>
+              </a:lnSpc>
+              <a:spcAft>
+                <a:spcPts val="0"/>
+              </a:spcAft>
+            </a:pPr>
+            <a:r>
+              <a:rPr sz="950" b="0">
+                <a:solidFill>
+                  <a:srgbClr val="5E8FB5"/>
+                </a:solidFill>
+                <a:latin typeface="Meiryo"/>
+                <a:ea typeface="Meiryo"/>
+                <a:cs typeface="Meiryo"/>
+              </a:rPr>
+              <a:t>0.143</a:t>
+            </a:r>
+          </a:p>
+        </p:txBody>
+      </p:sp>
+      <p:sp>
+        <p:nvSpPr>
+          <p:cNvPr id="24" name="figlabel"/>
+          <p:cNvSpPr txBox="1"/>
+          <p:nvPr/>
+        </p:nvSpPr>
+        <p:spPr>
+          <a:xfrm>
+            <a:off x="3423103" y="3589191"/>
+            <a:ext cx="359410" cy="175133"/>
+          </a:xfrm>
+          <a:prstGeom prst="rect">
+            <a:avLst/>
+          </a:prstGeom>
+          <a:noFill/>
+        </p:spPr>
+        <p:txBody>
+          <a:bodyPr wrap="none" anchor="ctr" lIns="0" rIns="0" tIns="0" bIns="0">
+            <a:spAutoFit/>
+          </a:bodyPr>
+          <a:lstStyle/>
+          <a:p>
+            <a:pPr algn="l">
+              <a:lnSpc>
+                <a:spcPct val="120000"/>
+              </a:lnSpc>
+              <a:spcAft>
+                <a:spcPts val="0"/>
+              </a:spcAft>
+            </a:pPr>
+            <a:r>
+              <a:rPr sz="950" b="0">
+                <a:solidFill>
+                  <a:srgbClr val="7E8B96"/>
+                </a:solidFill>
+                <a:latin typeface="Meiryo"/>
+                <a:ea typeface="Meiryo"/>
+                <a:cs typeface="Meiryo"/>
+              </a:rPr>
+              <a:t>0.171</a:t>
+            </a:r>
+          </a:p>
+        </p:txBody>
+      </p:sp>
+      <p:sp>
+        <p:nvSpPr>
+          <p:cNvPr id="25" name="figlabel"/>
+          <p:cNvSpPr txBox="1"/>
+          <p:nvPr/>
+        </p:nvSpPr>
+        <p:spPr>
+          <a:xfrm>
+            <a:off x="4934400" y="3318875"/>
+            <a:ext cx="960120" cy="216408"/>
+          </a:xfrm>
+          <a:prstGeom prst="rect">
+            <a:avLst/>
+          </a:prstGeom>
+          <a:noFill/>
+        </p:spPr>
+        <p:txBody>
+          <a:bodyPr wrap="none" anchor="ctr" lIns="0" rIns="0" tIns="0" bIns="0">
+            <a:spAutoFit/>
+          </a:bodyPr>
+          <a:lstStyle/>
+          <a:p>
+            <a:pPr algn="ctr">
+              <a:lnSpc>
+                <a:spcPct val="120000"/>
+              </a:lnSpc>
+              <a:spcAft>
+                <a:spcPts val="0"/>
+              </a:spcAft>
+            </a:pPr>
+            <a:r>
+              <a:rPr sz="1200" b="0">
+                <a:solidFill>
+                  <a:srgbClr val="222222"/>
+                </a:solidFill>
+                <a:latin typeface="Meiryo"/>
+                <a:ea typeface="Meiryo"/>
+                <a:cs typeface="Meiryo"/>
+              </a:rPr>
+              <a:t>ウルメイワシ</a:t>
+            </a:r>
+          </a:p>
+        </p:txBody>
+      </p:sp>
+      <p:sp>
+        <p:nvSpPr>
+          <p:cNvPr id="26" name="figlabel"/>
+          <p:cNvSpPr txBox="1"/>
+          <p:nvPr/>
+        </p:nvSpPr>
+        <p:spPr>
+          <a:xfrm>
+            <a:off x="4592340" y="3589191"/>
+            <a:ext cx="359410" cy="175133"/>
+          </a:xfrm>
+          <a:prstGeom prst="rect">
+            <a:avLst/>
+          </a:prstGeom>
+          <a:noFill/>
+        </p:spPr>
+        <p:txBody>
+          <a:bodyPr wrap="none" anchor="ctr" lIns="0" rIns="0" tIns="0" bIns="0">
+            <a:spAutoFit/>
+          </a:bodyPr>
+          <a:lstStyle/>
+          <a:p>
+            <a:pPr algn="l">
+              <a:lnSpc>
+                <a:spcPct val="120000"/>
+              </a:lnSpc>
+              <a:spcAft>
+                <a:spcPts val="0"/>
+              </a:spcAft>
+            </a:pPr>
+            <a:r>
+              <a:rPr sz="950" b="0">
+                <a:solidFill>
+                  <a:srgbClr val="1F4E79"/>
+                </a:solidFill>
+                <a:latin typeface="Meiryo"/>
+                <a:ea typeface="Meiryo"/>
+                <a:cs typeface="Meiryo"/>
+              </a:rPr>
+              <a:t>0.102</a:t>
+            </a:r>
+          </a:p>
+        </p:txBody>
+      </p:sp>
+      <p:sp>
+        <p:nvSpPr>
+          <p:cNvPr id="27" name="figlabel"/>
+          <p:cNvSpPr txBox="1"/>
+          <p:nvPr/>
+        </p:nvSpPr>
+        <p:spPr>
+          <a:xfrm>
+            <a:off x="5195228" y="3589191"/>
+            <a:ext cx="359410" cy="175133"/>
+          </a:xfrm>
+          <a:prstGeom prst="rect">
+            <a:avLst/>
+          </a:prstGeom>
+          <a:noFill/>
+        </p:spPr>
+        <p:txBody>
+          <a:bodyPr wrap="none" anchor="ctr" lIns="0" rIns="0" tIns="0" bIns="0">
+            <a:spAutoFit/>
+          </a:bodyPr>
+          <a:lstStyle/>
+          <a:p>
+            <a:pPr algn="l">
+              <a:lnSpc>
+                <a:spcPct val="120000"/>
+              </a:lnSpc>
+              <a:spcAft>
+                <a:spcPts val="0"/>
+              </a:spcAft>
+            </a:pPr>
+            <a:r>
+              <a:rPr sz="950" b="0">
+                <a:solidFill>
+                  <a:srgbClr val="5E8FB5"/>
+                </a:solidFill>
+                <a:latin typeface="Meiryo"/>
+                <a:ea typeface="Meiryo"/>
+                <a:cs typeface="Meiryo"/>
+              </a:rPr>
+              <a:t>0.116</a:t>
+            </a:r>
+          </a:p>
+        </p:txBody>
+      </p:sp>
+      <p:sp>
+        <p:nvSpPr>
+          <p:cNvPr id="28" name="figlabel"/>
+          <p:cNvSpPr txBox="1"/>
+          <p:nvPr/>
+        </p:nvSpPr>
+        <p:spPr>
+          <a:xfrm>
+            <a:off x="5798117" y="3589191"/>
+            <a:ext cx="359410" cy="175133"/>
+          </a:xfrm>
+          <a:prstGeom prst="rect">
+            <a:avLst/>
+          </a:prstGeom>
+          <a:noFill/>
+        </p:spPr>
+        <p:txBody>
+          <a:bodyPr wrap="none" anchor="ctr" lIns="0" rIns="0" tIns="0" bIns="0">
+            <a:spAutoFit/>
+          </a:bodyPr>
+          <a:lstStyle/>
+          <a:p>
+            <a:pPr algn="l">
+              <a:lnSpc>
+                <a:spcPct val="120000"/>
+              </a:lnSpc>
+              <a:spcAft>
+                <a:spcPts val="0"/>
+              </a:spcAft>
+            </a:pPr>
+            <a:r>
+              <a:rPr sz="950" b="0">
+                <a:solidFill>
+                  <a:srgbClr val="7E8B96"/>
+                </a:solidFill>
+                <a:latin typeface="Meiryo"/>
+                <a:ea typeface="Meiryo"/>
+                <a:cs typeface="Meiryo"/>
+              </a:rPr>
+              <a:t>0.099</a:t>
+            </a:r>
+          </a:p>
+        </p:txBody>
+      </p:sp>
+      <p:sp>
+        <p:nvSpPr>
+          <p:cNvPr id="29" name="figlabel"/>
+          <p:cNvSpPr txBox="1"/>
+          <p:nvPr/>
+        </p:nvSpPr>
+        <p:spPr>
+          <a:xfrm>
+            <a:off x="7614215" y="3318875"/>
+            <a:ext cx="350520" cy="216408"/>
+          </a:xfrm>
+          <a:prstGeom prst="rect">
+            <a:avLst/>
+          </a:prstGeom>
+          <a:noFill/>
+        </p:spPr>
+        <p:txBody>
+          <a:bodyPr wrap="none" anchor="ctr" lIns="0" rIns="0" tIns="0" bIns="0">
+            <a:spAutoFit/>
+          </a:bodyPr>
+          <a:lstStyle/>
+          <a:p>
+            <a:pPr algn="ctr">
+              <a:lnSpc>
+                <a:spcPct val="120000"/>
+              </a:lnSpc>
+              <a:spcAft>
+                <a:spcPts val="0"/>
+              </a:spcAft>
+            </a:pPr>
+            <a:r>
+              <a:rPr sz="1200" b="0">
+                <a:solidFill>
+                  <a:srgbClr val="222222"/>
+                </a:solidFill>
+                <a:latin typeface="Meiryo"/>
+                <a:ea typeface="Meiryo"/>
+                <a:cs typeface="Meiryo"/>
+              </a:rPr>
+              <a:t>ブリ</a:t>
+            </a:r>
+          </a:p>
+        </p:txBody>
+      </p:sp>
+      <p:sp>
+        <p:nvSpPr>
+          <p:cNvPr id="30" name="figlabel"/>
+          <p:cNvSpPr txBox="1"/>
+          <p:nvPr/>
+        </p:nvSpPr>
+        <p:spPr>
+          <a:xfrm>
+            <a:off x="6967354" y="3589191"/>
+            <a:ext cx="359410" cy="175133"/>
+          </a:xfrm>
+          <a:prstGeom prst="rect">
+            <a:avLst/>
+          </a:prstGeom>
+          <a:noFill/>
+        </p:spPr>
+        <p:txBody>
+          <a:bodyPr wrap="none" anchor="ctr" lIns="0" rIns="0" tIns="0" bIns="0">
+            <a:spAutoFit/>
+          </a:bodyPr>
+          <a:lstStyle/>
+          <a:p>
+            <a:pPr algn="l">
+              <a:lnSpc>
+                <a:spcPct val="120000"/>
+              </a:lnSpc>
+              <a:spcAft>
+                <a:spcPts val="0"/>
+              </a:spcAft>
+            </a:pPr>
+            <a:r>
+              <a:rPr sz="950" b="0">
+                <a:solidFill>
+                  <a:srgbClr val="1F4E79"/>
+                </a:solidFill>
+                <a:latin typeface="Meiryo"/>
+                <a:ea typeface="Meiryo"/>
+                <a:cs typeface="Meiryo"/>
+              </a:rPr>
+              <a:t>0.082</a:t>
+            </a:r>
+          </a:p>
+        </p:txBody>
+      </p:sp>
+      <p:sp>
+        <p:nvSpPr>
+          <p:cNvPr id="31" name="figlabel"/>
+          <p:cNvSpPr txBox="1"/>
+          <p:nvPr/>
+        </p:nvSpPr>
+        <p:spPr>
+          <a:xfrm>
+            <a:off x="7570242" y="3589191"/>
+            <a:ext cx="359410" cy="175133"/>
+          </a:xfrm>
+          <a:prstGeom prst="rect">
+            <a:avLst/>
+          </a:prstGeom>
+          <a:noFill/>
+        </p:spPr>
+        <p:txBody>
+          <a:bodyPr wrap="none" anchor="ctr" lIns="0" rIns="0" tIns="0" bIns="0">
+            <a:spAutoFit/>
+          </a:bodyPr>
+          <a:lstStyle/>
+          <a:p>
+            <a:pPr algn="l">
+              <a:lnSpc>
+                <a:spcPct val="120000"/>
+              </a:lnSpc>
+              <a:spcAft>
+                <a:spcPts val="0"/>
+              </a:spcAft>
+            </a:pPr>
+            <a:r>
+              <a:rPr sz="950" b="0">
+                <a:solidFill>
+                  <a:srgbClr val="5E8FB5"/>
+                </a:solidFill>
+                <a:latin typeface="Meiryo"/>
+                <a:ea typeface="Meiryo"/>
+                <a:cs typeface="Meiryo"/>
+              </a:rPr>
+              <a:t>0.117</a:t>
+            </a:r>
+          </a:p>
+        </p:txBody>
+      </p:sp>
+      <p:sp>
+        <p:nvSpPr>
+          <p:cNvPr id="32" name="figlabel"/>
+          <p:cNvSpPr txBox="1"/>
+          <p:nvPr/>
+        </p:nvSpPr>
+        <p:spPr>
+          <a:xfrm>
+            <a:off x="8173131" y="3589191"/>
+            <a:ext cx="359410" cy="175133"/>
+          </a:xfrm>
+          <a:prstGeom prst="rect">
+            <a:avLst/>
+          </a:prstGeom>
+          <a:noFill/>
+        </p:spPr>
+        <p:txBody>
+          <a:bodyPr wrap="none" anchor="ctr" lIns="0" rIns="0" tIns="0" bIns="0">
+            <a:spAutoFit/>
+          </a:bodyPr>
+          <a:lstStyle/>
+          <a:p>
+            <a:pPr algn="l">
+              <a:lnSpc>
+                <a:spcPct val="120000"/>
+              </a:lnSpc>
+              <a:spcAft>
+                <a:spcPts val="0"/>
+              </a:spcAft>
+            </a:pPr>
+            <a:r>
+              <a:rPr sz="950" b="0">
+                <a:solidFill>
+                  <a:srgbClr val="7E8B96"/>
+                </a:solidFill>
+                <a:latin typeface="Meiryo"/>
+                <a:ea typeface="Meiryo"/>
+                <a:cs typeface="Meiryo"/>
+              </a:rPr>
+              <a:t>0.130</a:t>
+            </a:r>
+          </a:p>
+        </p:txBody>
+      </p:sp>
+      <p:sp>
+        <p:nvSpPr>
+          <p:cNvPr id="33" name="figlabel"/>
+          <p:cNvSpPr txBox="1"/>
+          <p:nvPr/>
+        </p:nvSpPr>
+        <p:spPr>
+          <a:xfrm>
+            <a:off x="9913029" y="3318875"/>
+            <a:ext cx="502920" cy="216408"/>
+          </a:xfrm>
+          <a:prstGeom prst="rect">
+            <a:avLst/>
+          </a:prstGeom>
+          <a:noFill/>
+        </p:spPr>
+        <p:txBody>
+          <a:bodyPr wrap="none" anchor="ctr" lIns="0" rIns="0" tIns="0" bIns="0">
+            <a:spAutoFit/>
+          </a:bodyPr>
+          <a:lstStyle/>
+          <a:p>
+            <a:pPr algn="ctr">
+              <a:lnSpc>
+                <a:spcPct val="120000"/>
+              </a:lnSpc>
+              <a:spcAft>
+                <a:spcPts val="0"/>
+              </a:spcAft>
+            </a:pPr>
+            <a:r>
+              <a:rPr sz="1200" b="0">
+                <a:solidFill>
+                  <a:srgbClr val="222222"/>
+                </a:solidFill>
+                <a:latin typeface="Meiryo"/>
+                <a:ea typeface="Meiryo"/>
+                <a:cs typeface="Meiryo"/>
+              </a:rPr>
+              <a:t>サワラ</a:t>
+            </a:r>
+          </a:p>
+        </p:txBody>
+      </p:sp>
+      <p:sp>
+        <p:nvSpPr>
+          <p:cNvPr id="34" name="figlabel"/>
+          <p:cNvSpPr txBox="1"/>
+          <p:nvPr/>
+        </p:nvSpPr>
+        <p:spPr>
+          <a:xfrm>
+            <a:off x="9342368" y="3589191"/>
+            <a:ext cx="359410" cy="175133"/>
+          </a:xfrm>
+          <a:prstGeom prst="rect">
+            <a:avLst/>
+          </a:prstGeom>
+          <a:noFill/>
+        </p:spPr>
+        <p:txBody>
+          <a:bodyPr wrap="none" anchor="ctr" lIns="0" rIns="0" tIns="0" bIns="0">
+            <a:spAutoFit/>
+          </a:bodyPr>
+          <a:lstStyle/>
+          <a:p>
+            <a:pPr algn="l">
+              <a:lnSpc>
+                <a:spcPct val="120000"/>
+              </a:lnSpc>
+              <a:spcAft>
+                <a:spcPts val="0"/>
+              </a:spcAft>
+            </a:pPr>
+            <a:r>
+              <a:rPr sz="950" b="0">
+                <a:solidFill>
+                  <a:srgbClr val="1F4E79"/>
+                </a:solidFill>
+                <a:latin typeface="Meiryo"/>
+                <a:ea typeface="Meiryo"/>
+                <a:cs typeface="Meiryo"/>
+              </a:rPr>
+              <a:t>0.073</a:t>
+            </a:r>
+          </a:p>
+        </p:txBody>
+      </p:sp>
+      <p:sp>
+        <p:nvSpPr>
+          <p:cNvPr id="35" name="figlabel"/>
+          <p:cNvSpPr txBox="1"/>
+          <p:nvPr/>
+        </p:nvSpPr>
+        <p:spPr>
+          <a:xfrm>
+            <a:off x="9945256" y="3589191"/>
+            <a:ext cx="359410" cy="175133"/>
+          </a:xfrm>
+          <a:prstGeom prst="rect">
+            <a:avLst/>
+          </a:prstGeom>
+          <a:noFill/>
+        </p:spPr>
+        <p:txBody>
+          <a:bodyPr wrap="none" anchor="ctr" lIns="0" rIns="0" tIns="0" bIns="0">
+            <a:spAutoFit/>
+          </a:bodyPr>
+          <a:lstStyle/>
+          <a:p>
+            <a:pPr algn="l">
+              <a:lnSpc>
+                <a:spcPct val="120000"/>
+              </a:lnSpc>
+              <a:spcAft>
+                <a:spcPts val="0"/>
+              </a:spcAft>
+            </a:pPr>
+            <a:r>
+              <a:rPr sz="950" b="0">
+                <a:solidFill>
+                  <a:srgbClr val="5E8FB5"/>
+                </a:solidFill>
+                <a:latin typeface="Meiryo"/>
+                <a:ea typeface="Meiryo"/>
+                <a:cs typeface="Meiryo"/>
+              </a:rPr>
+              <a:t>0.083</a:t>
+            </a:r>
+          </a:p>
+        </p:txBody>
+      </p:sp>
+      <p:sp>
+        <p:nvSpPr>
+          <p:cNvPr id="36" name="figlabel"/>
+          <p:cNvSpPr txBox="1"/>
+          <p:nvPr/>
+        </p:nvSpPr>
+        <p:spPr>
+          <a:xfrm>
+            <a:off x="10548145" y="3589191"/>
+            <a:ext cx="359410" cy="175133"/>
+          </a:xfrm>
+          <a:prstGeom prst="rect">
+            <a:avLst/>
+          </a:prstGeom>
+          <a:noFill/>
+        </p:spPr>
+        <p:txBody>
+          <a:bodyPr wrap="none" anchor="ctr" lIns="0" rIns="0" tIns="0" bIns="0">
+            <a:spAutoFit/>
+          </a:bodyPr>
+          <a:lstStyle/>
+          <a:p>
+            <a:pPr algn="l">
+              <a:lnSpc>
+                <a:spcPct val="120000"/>
+              </a:lnSpc>
+              <a:spcAft>
+                <a:spcPts val="0"/>
+              </a:spcAft>
+            </a:pPr>
+            <a:r>
+              <a:rPr sz="950" b="0">
+                <a:solidFill>
+                  <a:srgbClr val="7E8B96"/>
+                </a:solidFill>
+                <a:latin typeface="Meiryo"/>
+                <a:ea typeface="Meiryo"/>
+                <a:cs typeface="Meiryo"/>
+              </a:rPr>
+              <a:t>0.087</a:t>
+            </a:r>
+          </a:p>
+        </p:txBody>
+      </p:sp>
+      <p:sp>
+        <p:nvSpPr>
+          <p:cNvPr id="37" name="figlabel"/>
+          <p:cNvSpPr txBox="1"/>
+          <p:nvPr/>
+        </p:nvSpPr>
+        <p:spPr>
+          <a:xfrm>
+            <a:off x="4399178" y="1244389"/>
+            <a:ext cx="629920" cy="208153"/>
+          </a:xfrm>
+          <a:prstGeom prst="rect">
+            <a:avLst/>
+          </a:prstGeom>
+          <a:noFill/>
+        </p:spPr>
+        <p:txBody>
+          <a:bodyPr wrap="none" anchor="ctr" lIns="0" rIns="0" tIns="0" bIns="0">
+            <a:spAutoFit/>
+          </a:bodyPr>
+          <a:lstStyle/>
+          <a:p>
+            <a:pPr algn="l">
+              <a:lnSpc>
+                <a:spcPct val="120000"/>
+              </a:lnSpc>
+              <a:spcAft>
+                <a:spcPts val="0"/>
+              </a:spcAft>
+            </a:pPr>
+            <a:r>
+              <a:rPr sz="1150" b="0">
+                <a:solidFill>
+                  <a:srgbClr val="222222"/>
+                </a:solidFill>
+                <a:latin typeface="Meiryo"/>
+                <a:ea typeface="Meiryo"/>
+                <a:cs typeface="Meiryo"/>
+              </a:rPr>
+              <a:t>実データ</a:t>
+            </a:r>
+          </a:p>
+        </p:txBody>
+      </p:sp>
+      <p:sp>
+        <p:nvSpPr>
+          <p:cNvPr id="38" name="figlabel"/>
+          <p:cNvSpPr txBox="1"/>
+          <p:nvPr/>
+        </p:nvSpPr>
+        <p:spPr>
+          <a:xfrm>
+            <a:off x="5787237" y="1244389"/>
+            <a:ext cx="927861" cy="208153"/>
+          </a:xfrm>
+          <a:prstGeom prst="rect">
+            <a:avLst/>
+          </a:prstGeom>
+          <a:noFill/>
+        </p:spPr>
+        <p:txBody>
+          <a:bodyPr wrap="none" anchor="ctr" lIns="0" rIns="0" tIns="0" bIns="0">
+            <a:spAutoFit/>
+          </a:bodyPr>
+          <a:lstStyle/>
+          <a:p>
+            <a:pPr algn="l">
+              <a:lnSpc>
+                <a:spcPct val="120000"/>
+              </a:lnSpc>
+              <a:spcAft>
+                <a:spcPts val="0"/>
+              </a:spcAft>
+            </a:pPr>
+            <a:r>
+              <a:rPr sz="1150" b="0">
+                <a:solidFill>
+                  <a:srgbClr val="1F4E79"/>
+                </a:solidFill>
+                <a:latin typeface="Meiryo"/>
+                <a:ea typeface="Meiryo"/>
+                <a:cs typeface="Meiryo"/>
+              </a:rPr>
+              <a:t>12個（自由）</a:t>
+            </a:r>
+          </a:p>
+        </p:txBody>
+      </p:sp>
+      <p:sp>
+        <p:nvSpPr>
+          <p:cNvPr id="39" name="figlabel"/>
+          <p:cNvSpPr txBox="1"/>
+          <p:nvPr/>
+        </p:nvSpPr>
+        <p:spPr>
+          <a:xfrm>
+            <a:off x="7477048" y="1244389"/>
+            <a:ext cx="343662" cy="208153"/>
+          </a:xfrm>
+          <a:prstGeom prst="rect">
+            <a:avLst/>
+          </a:prstGeom>
+          <a:noFill/>
+        </p:spPr>
+        <p:txBody>
+          <a:bodyPr wrap="none" anchor="ctr" lIns="0" rIns="0" tIns="0" bIns="0">
+            <a:spAutoFit/>
+          </a:bodyPr>
+          <a:lstStyle/>
+          <a:p>
+            <a:pPr algn="l">
+              <a:lnSpc>
+                <a:spcPct val="120000"/>
+              </a:lnSpc>
+              <a:spcAft>
+                <a:spcPts val="0"/>
+              </a:spcAft>
+            </a:pPr>
+            <a:r>
+              <a:rPr sz="1150" b="0">
+                <a:solidFill>
+                  <a:srgbClr val="5E8FB5"/>
+                </a:solidFill>
+                <a:latin typeface="Meiryo"/>
+                <a:ea typeface="Meiryo"/>
+                <a:cs typeface="Meiryo"/>
+              </a:rPr>
+              <a:t>10個</a:t>
+            </a:r>
+          </a:p>
+        </p:txBody>
+      </p:sp>
+      <p:sp>
+        <p:nvSpPr>
+          <p:cNvPr id="40" name="figlabel"/>
+          <p:cNvSpPr txBox="1"/>
+          <p:nvPr/>
+        </p:nvSpPr>
+        <p:spPr>
+          <a:xfrm>
+            <a:off x="8603589" y="1244389"/>
+            <a:ext cx="267716" cy="208153"/>
+          </a:xfrm>
+          <a:prstGeom prst="rect">
+            <a:avLst/>
+          </a:prstGeom>
+          <a:noFill/>
+        </p:spPr>
+        <p:txBody>
+          <a:bodyPr wrap="none" anchor="ctr" lIns="0" rIns="0" tIns="0" bIns="0">
+            <a:spAutoFit/>
+          </a:bodyPr>
+          <a:lstStyle/>
+          <a:p>
+            <a:pPr algn="l">
+              <a:lnSpc>
+                <a:spcPct val="120000"/>
+              </a:lnSpc>
+              <a:spcAft>
+                <a:spcPts val="0"/>
+              </a:spcAft>
+            </a:pPr>
+            <a:r>
+              <a:rPr sz="1150" b="0">
+                <a:solidFill>
+                  <a:srgbClr val="7E8B96"/>
+                </a:solidFill>
+                <a:latin typeface="Meiryo"/>
+                <a:ea typeface="Meiryo"/>
+                <a:cs typeface="Meiryo"/>
+              </a:rPr>
+              <a:t>8個</a:t>
+            </a:r>
+          </a:p>
+        </p:txBody>
+      </p:sp>
+      <p:sp>
+        <p:nvSpPr>
+          <p:cNvPr id="41" name="figlabel"/>
+          <p:cNvSpPr txBox="1"/>
+          <p:nvPr/>
+        </p:nvSpPr>
+        <p:spPr>
+          <a:xfrm>
+            <a:off x="1110081" y="1298539"/>
+            <a:ext cx="1652270" cy="208153"/>
+          </a:xfrm>
+          <a:prstGeom prst="rect">
+            <a:avLst/>
+          </a:prstGeom>
+          <a:noFill/>
+        </p:spPr>
+        <p:txBody>
+          <a:bodyPr wrap="none" anchor="ctr" lIns="0" rIns="0" tIns="0" bIns="0">
+            <a:spAutoFit/>
+          </a:bodyPr>
+          <a:lstStyle/>
+          <a:p>
+            <a:pPr algn="l">
+              <a:lnSpc>
+                <a:spcPct val="120000"/>
+              </a:lnSpc>
+              <a:spcAft>
+                <a:spcPts val="0"/>
+              </a:spcAft>
+            </a:pPr>
+            <a:r>
+              <a:rPr sz="1150" b="0">
+                <a:solidFill>
+                  <a:srgbClr val="6E6E6E"/>
+                </a:solidFill>
+                <a:latin typeface="Meiryo"/>
+                <a:ea typeface="Meiryo"/>
+                <a:cs typeface="Meiryo"/>
+              </a:rPr>
+              <a:t>縦軸：資源量（千トン）</a:t>
+            </a:r>
+          </a:p>
+        </p:txBody>
+      </p:sp>
+      <p:sp>
+        <p:nvSpPr>
+          <p:cNvPr id="42" name="figlabel"/>
+          <p:cNvSpPr txBox="1"/>
+          <p:nvPr/>
+        </p:nvSpPr>
+        <p:spPr>
+          <a:xfrm>
+            <a:off x="1130198" y="2331110"/>
+            <a:ext cx="502920" cy="414528"/>
+          </a:xfrm>
+          <a:prstGeom prst="rect">
+            <a:avLst/>
+          </a:prstGeom>
+          <a:noFill/>
+        </p:spPr>
+        <p:txBody>
+          <a:bodyPr wrap="none" anchor="ctr" lIns="0" rIns="0" tIns="0" bIns="0">
+            <a:spAutoFit/>
+          </a:bodyPr>
+          <a:lstStyle/>
+          <a:p>
+            <a:pPr algn="l">
+              <a:lnSpc>
+                <a:spcPct val="120000"/>
+              </a:lnSpc>
+              <a:spcAft>
+                <a:spcPts val="0"/>
+              </a:spcAft>
+            </a:pPr>
+            <a:r>
+              <a:rPr sz="1200" b="0">
+                <a:solidFill>
+                  <a:srgbClr val="6E6E6E"/>
+                </a:solidFill>
+                <a:latin typeface="Meiryo"/>
+                <a:ea typeface="Meiryo"/>
+                <a:cs typeface="Meiryo"/>
+              </a:rPr>
+              <a:t>大蛇行</a:t>
+            </a:r>
+          </a:p>
+          <a:p>
+            <a:pPr algn="l">
+              <a:lnSpc>
+                <a:spcPct val="120000"/>
+              </a:lnSpc>
+              <a:spcAft>
+                <a:spcPts val="0"/>
+              </a:spcAft>
+            </a:pPr>
+            <a:r>
+              <a:rPr sz="1200" b="0">
+                <a:solidFill>
+                  <a:srgbClr val="6E6E6E"/>
+                </a:solidFill>
+                <a:latin typeface="Meiryo"/>
+                <a:ea typeface="Meiryo"/>
+                <a:cs typeface="Meiryo"/>
+              </a:rPr>
+              <a:t>なし</a:t>
+            </a:r>
+          </a:p>
+        </p:txBody>
+      </p:sp>
+      <p:sp>
+        <p:nvSpPr>
+          <p:cNvPr id="43" name="figlabel"/>
+          <p:cNvSpPr txBox="1"/>
+          <p:nvPr/>
+        </p:nvSpPr>
+        <p:spPr>
+          <a:xfrm>
+            <a:off x="1130198" y="4260799"/>
+            <a:ext cx="502920" cy="216408"/>
+          </a:xfrm>
+          <a:prstGeom prst="rect">
+            <a:avLst/>
+          </a:prstGeom>
+          <a:noFill/>
+        </p:spPr>
+        <p:txBody>
+          <a:bodyPr wrap="none" anchor="ctr" lIns="0" rIns="0" tIns="0" bIns="0">
+            <a:spAutoFit/>
+          </a:bodyPr>
+          <a:lstStyle/>
+          <a:p>
+            <a:pPr algn="l">
+              <a:lnSpc>
+                <a:spcPct val="120000"/>
+              </a:lnSpc>
+              <a:spcAft>
+                <a:spcPts val="0"/>
+              </a:spcAft>
+            </a:pPr>
+            <a:r>
+              <a:rPr sz="1200" b="0">
+                <a:solidFill>
+                  <a:srgbClr val="C0561A"/>
+                </a:solidFill>
+                <a:latin typeface="Meiryo"/>
+                <a:ea typeface="Meiryo"/>
+                <a:cs typeface="Meiryo"/>
+              </a:rPr>
+              <a:t>大蛇行</a:t>
+            </a:r>
+          </a:p>
+        </p:txBody>
+      </p:sp>
+      <p:sp>
+        <p:nvSpPr>
+          <p:cNvPr id="44" name="figlabel"/>
+          <p:cNvSpPr txBox="1"/>
+          <p:nvPr/>
+        </p:nvSpPr>
+        <p:spPr>
+          <a:xfrm>
+            <a:off x="3000375" y="5146956"/>
+            <a:ext cx="6197346" cy="208153"/>
+          </a:xfrm>
+          <a:prstGeom prst="rect">
+            <a:avLst/>
+          </a:prstGeom>
+          <a:noFill/>
+        </p:spPr>
+        <p:txBody>
+          <a:bodyPr wrap="none" anchor="ctr" lIns="0" rIns="0" tIns="0" bIns="0">
+            <a:spAutoFit/>
+          </a:bodyPr>
+          <a:lstStyle/>
+          <a:p>
+            <a:pPr algn="ctr">
+              <a:lnSpc>
+                <a:spcPct val="120000"/>
+              </a:lnSpc>
+              <a:spcAft>
+                <a:spcPts val="0"/>
+              </a:spcAft>
+            </a:pPr>
+            <a:r>
+              <a:rPr sz="1150" b="0">
+                <a:solidFill>
+                  <a:srgbClr val="6E6E6E"/>
+                </a:solidFill>
+                <a:latin typeface="Meiryo"/>
+                <a:ea typeface="Meiryo"/>
+                <a:cs typeface="Meiryo"/>
+              </a:rPr>
+              <a:t>「ずれ」＝平均で割った誤差（小さいほど良い）。枠の中の数字は左から 12個・10個・8個。</a:t>
+            </a:r>
+          </a:p>
+        </p:txBody>
+      </p:sp>
+      <p:sp>
+        <p:nvSpPr>
+          <p:cNvPr id="45" name="TextBox 44"/>
+          <p:cNvSpPr txBox="1"/>
+          <p:nvPr/>
+        </p:nvSpPr>
+        <p:spPr>
+          <a:xfrm>
+            <a:off x="566928" y="5440680"/>
+            <a:ext cx="11057839" cy="274320"/>
+          </a:xfrm>
+          <a:prstGeom prst="rect">
+            <a:avLst/>
+          </a:prstGeom>
+          <a:noFill/>
+        </p:spPr>
+        <p:txBody>
+          <a:bodyPr wrap="square" anchor="t" lIns="0" rIns="0" tIns="0" bIns="0">
+            <a:spAutoFit/>
+          </a:bodyPr>
+          <a:lstStyle/>
+          <a:p>
+            <a:pPr algn="l">
+              <a:lnSpc>
+                <a:spcPct val="132000"/>
+              </a:lnSpc>
+              <a:spcAft>
+                <a:spcPts val="600"/>
+              </a:spcAft>
+            </a:pPr>
+            <a:r>
+              <a:rPr sz="1400" b="0">
+                <a:solidFill>
+                  <a:srgbClr val="6E6E6E"/>
+                </a:solidFill>
+                <a:latin typeface="Meiryo"/>
+                <a:ea typeface="Meiryo"/>
+                <a:cs typeface="Meiryo"/>
+              </a:rPr>
+              <a:t>全体の平均（大蛇行なし／大蛇行）：　12個 0.145／0.079　　10個 0.306／0.115　　8個 0.408／0.122</a:t>
+            </a:r>
+          </a:p>
+        </p:txBody>
+      </p:sp>
+      <p:sp>
+        <p:nvSpPr>
+          <p:cNvPr id="46" name="Rectangle 45"/>
+          <p:cNvSpPr/>
+          <p:nvPr/>
+        </p:nvSpPr>
+        <p:spPr>
+          <a:xfrm>
+            <a:off x="566928" y="5779008"/>
+            <a:ext cx="10326319" cy="512064"/>
+          </a:xfrm>
+          <a:prstGeom prst="rect">
+            <a:avLst/>
+          </a:prstGeom>
+          <a:solidFill>
+            <a:srgbClr val="FBF1E8"/>
+          </a:solidFill>
+          <a:ln w="15875">
+            <a:solidFill>
+              <a:srgbClr val="C0561A"/>
+            </a:solidFill>
+          </a:ln>
+          <a:effectLst/>
+        </p:spPr>
+        <p:style>
+          <a:lnRef idx="1">
+            <a:schemeClr val="accent1"/>
+          </a:lnRef>
+          <a:fillRef idx="3">
+            <a:schemeClr val="accent1"/>
+          </a:fillRef>
+          <a:effectRef idx="2">
+            <a:schemeClr val="accent1"/>
+          </a:effectRef>
+          <a:fontRef idx="minor">
+            <a:schemeClr val="lt1"/>
+          </a:fontRef>
+        </p:style>
+        <p:txBody>
+          <a:bodyPr rtlCol="0" anchor="ctr" wrap="square"/>
+          <a:lstStyle/>
+          <a:p>
+            <a:pPr algn="ctr"/>
+          </a:p>
+        </p:txBody>
+      </p:sp>
+      <p:sp>
+        <p:nvSpPr>
+          <p:cNvPr id="47" name="TextBox 46"/>
+          <p:cNvSpPr txBox="1"/>
+          <p:nvPr/>
+        </p:nvSpPr>
+        <p:spPr>
+          <a:xfrm>
+            <a:off x="768096" y="5888736"/>
+            <a:ext cx="9923983" cy="329184"/>
+          </a:xfrm>
+          <a:prstGeom prst="rect">
+            <a:avLst/>
+          </a:prstGeom>
+          <a:noFill/>
+        </p:spPr>
+        <p:txBody>
+          <a:bodyPr wrap="square" anchor="t" lIns="0" rIns="0" tIns="0" bIns="0">
+            <a:spAutoFit/>
+          </a:bodyPr>
+          <a:lstStyle/>
+          <a:p>
+            <a:pPr algn="l">
+              <a:lnSpc>
+                <a:spcPct val="132000"/>
+              </a:lnSpc>
+              <a:spcAft>
+                <a:spcPts val="600"/>
+              </a:spcAft>
+            </a:pPr>
+            <a:r>
+              <a:rPr sz="1700" b="1">
+                <a:solidFill>
+                  <a:srgbClr val="C0561A"/>
+                </a:solidFill>
+                <a:latin typeface="Meiryo"/>
+                <a:ea typeface="Meiryo"/>
+                <a:cs typeface="Meiryo"/>
+              </a:rPr>
+              <a:t>餌の魚をマイワシにしても、固定を増やすほど当てはまりが悪くなる順序は変わらない。</a:t>
+            </a:r>
+          </a:p>
+        </p:txBody>
+      </p:sp>
+    </p:spTree>
+  </p:cSld>
+  <p:clrMapOvr>
+    <a:masterClrMapping/>
+  </p:clrMapOvr>
+</p:sld>
+</file>
+
+<file path=ppt/slides/slide26.xml><?xml version="1.0" encoding="utf-8"?>
+<p:sld xmlns:a="http://schemas.openxmlformats.org/drawingml/2006/main" xmlns:p="http://schemas.openxmlformats.org/presentationml/2006/main" xmlns:r="http://schemas.openxmlformats.org/officeDocument/2006/relationships" xmlns:a14="http://schemas.microsoft.com/office/drawing/2010/main" xmlns:mc="http://schemas.openxmlformats.org/markup-compatibility/2006" mc:Ignorable="a14">
+  <p:cSld>
+    <p:spTree>
+      <p:nvGrpSpPr>
+        <p:cNvPr id="1" name=""/>
+        <p:cNvGrpSpPr/>
+        <p:nvPr/>
+      </p:nvGrpSpPr>
+      <p:grpSpPr/>
+      <p:sp>
+        <p:nvSpPr>
+          <p:cNvPr id="2" name="TextBox 1"/>
+          <p:cNvSpPr txBox="1"/>
+          <p:nvPr/>
+        </p:nvSpPr>
+        <p:spPr>
+          <a:xfrm>
+            <a:off x="566928" y="329184"/>
+            <a:ext cx="11057839" cy="822960"/>
+          </a:xfrm>
+          <a:prstGeom prst="rect">
+            <a:avLst/>
+          </a:prstGeom>
+          <a:noFill/>
+        </p:spPr>
+        <p:txBody>
+          <a:bodyPr wrap="square" anchor="t" lIns="0" rIns="0" tIns="0" bIns="0">
+            <a:spAutoFit/>
+          </a:bodyPr>
+          <a:lstStyle/>
+          <a:p>
+            <a:pPr algn="l">
+              <a:lnSpc>
+                <a:spcPct val="115000"/>
+              </a:lnSpc>
+              <a:spcAft>
+                <a:spcPts val="600"/>
+              </a:spcAft>
+            </a:pPr>
+            <a:r>
+              <a:rPr sz="2600" b="1">
+                <a:solidFill>
+                  <a:srgbClr val="1F4E79"/>
+                </a:solidFill>
+                <a:latin typeface="Meiryo"/>
+                <a:ea typeface="Meiryo"/>
+                <a:cs typeface="Meiryo"/>
+              </a:rPr>
+              <a:t>［マイワシ版・9枚目］借りられるのは「増える速さ」まで</a:t>
+            </a:r>
+          </a:p>
+        </p:txBody>
+      </p:sp>
+      <p:sp>
+        <p:nvSpPr>
+          <p:cNvPr id="3" name="TextBox 2"/>
+          <p:cNvSpPr txBox="1"/>
+          <p:nvPr/>
+        </p:nvSpPr>
+        <p:spPr>
+          <a:xfrm>
+            <a:off x="11048695" y="6291072"/>
+            <a:ext cx="640080" cy="274320"/>
+          </a:xfrm>
+          <a:prstGeom prst="rect">
+            <a:avLst/>
+          </a:prstGeom>
+          <a:noFill/>
+        </p:spPr>
+        <p:txBody>
+          <a:bodyPr wrap="none" lIns="0" rIns="0" tIns="0" bIns="0">
+            <a:spAutoFit/>
+          </a:bodyPr>
+          <a:lstStyle/>
+          <a:p>
+            <a:pPr algn="r"/>
+            <a:r>
+              <a:rPr sz="1100" b="0">
+                <a:solidFill>
+                  <a:srgbClr val="6E6E6E"/>
+                </a:solidFill>
+                <a:latin typeface="Meiryo"/>
+                <a:ea typeface="Meiryo"/>
+                <a:cs typeface="Meiryo"/>
+              </a:rPr>
+              <a:t>26</a:t>
+            </a:r>
+          </a:p>
+        </p:txBody>
+      </p:sp>
+      <p:sp>
+        <p:nvSpPr>
+          <p:cNvPr id="4" name="TextBox 3"/>
+          <p:cNvSpPr txBox="1"/>
+          <p:nvPr/>
+        </p:nvSpPr>
+        <p:spPr>
+          <a:xfrm>
+            <a:off x="566928" y="1170432"/>
+            <a:ext cx="11057839" cy="457200"/>
+          </a:xfrm>
+          <a:prstGeom prst="rect">
+            <a:avLst/>
+          </a:prstGeom>
+          <a:noFill/>
+        </p:spPr>
+        <p:txBody>
+          <a:bodyPr wrap="square" anchor="t" lIns="0" rIns="0" tIns="0" bIns="0">
+            <a:spAutoFit/>
+          </a:bodyPr>
+          <a:lstStyle/>
+          <a:p>
+            <a:pPr algn="l">
+              <a:lnSpc>
+                <a:spcPct val="132000"/>
+              </a:lnSpc>
+              <a:spcAft>
+                <a:spcPts val="600"/>
+              </a:spcAft>
+            </a:pPr>
+            <a:r>
+              <a:rPr sz="1700" b="0">
+                <a:solidFill>
+                  <a:srgbClr val="222222"/>
+                </a:solidFill>
+                <a:latin typeface="Meiryo"/>
+                <a:ea typeface="Meiryo"/>
+                <a:cs typeface="Meiryo"/>
+              </a:rPr>
+              <a:t>「和を固定すると、かけ算を保つために食べられる強さが歪む」ことは、もともとマイワシ版で見つけた現象。</a:t>
+            </a:r>
+          </a:p>
+        </p:txBody>
+      </p:sp>
+      <p:sp>
+        <p:nvSpPr>
+          <p:cNvPr id="5" name="Rectangle 4"/>
+          <p:cNvSpPr/>
+          <p:nvPr/>
+        </p:nvSpPr>
+        <p:spPr>
+          <a:xfrm>
+            <a:off x="566928" y="1737360"/>
+            <a:ext cx="5212080" cy="1755648"/>
+          </a:xfrm>
+          <a:prstGeom prst="rect">
+            <a:avLst/>
+          </a:prstGeom>
+          <a:solidFill>
+            <a:srgbClr val="F2F5F9"/>
+          </a:solidFill>
+          <a:ln w="15875">
+            <a:solidFill>
+              <a:srgbClr val="1F4E79"/>
+            </a:solidFill>
+          </a:ln>
+          <a:effectLst/>
+        </p:spPr>
+        <p:style>
+          <a:lnRef idx="1">
+            <a:schemeClr val="accent1"/>
+          </a:lnRef>
+          <a:fillRef idx="3">
+            <a:schemeClr val="accent1"/>
+          </a:fillRef>
+          <a:effectRef idx="2">
+            <a:schemeClr val="accent1"/>
+          </a:effectRef>
+          <a:fontRef idx="minor">
+            <a:schemeClr val="lt1"/>
+          </a:fontRef>
+        </p:style>
+        <p:txBody>
+          <a:bodyPr rtlCol="0" anchor="ctr" wrap="square"/>
+          <a:lstStyle/>
+          <a:p>
+            <a:pPr algn="ctr"/>
+          </a:p>
+        </p:txBody>
+      </p:sp>
+      <p:sp>
+        <p:nvSpPr>
+          <p:cNvPr id="6" name="TextBox 5"/>
+          <p:cNvSpPr txBox="1"/>
+          <p:nvPr/>
+        </p:nvSpPr>
+        <p:spPr>
+          <a:xfrm>
+            <a:off x="786384" y="1874519"/>
+            <a:ext cx="4773168" cy="310896"/>
+          </a:xfrm>
+          <a:prstGeom prst="rect">
+            <a:avLst/>
+          </a:prstGeom>
+          <a:noFill/>
+        </p:spPr>
+        <p:txBody>
+          <a:bodyPr wrap="square" anchor="t" lIns="0" rIns="0" tIns="0" bIns="0">
+            <a:spAutoFit/>
+          </a:bodyPr>
+          <a:lstStyle/>
+          <a:p>
+            <a:pPr algn="l">
+              <a:lnSpc>
+                <a:spcPct val="132000"/>
+              </a:lnSpc>
+              <a:spcAft>
+                <a:spcPts val="600"/>
+              </a:spcAft>
+            </a:pPr>
+            <a:r>
+              <a:rPr sz="1600" b="1">
+                <a:solidFill>
+                  <a:srgbClr val="1F4E79"/>
+                </a:solidFill>
+                <a:latin typeface="Meiryo"/>
+                <a:ea typeface="Meiryo"/>
+                <a:cs typeface="Meiryo"/>
+              </a:rPr>
+              <a:t>1種ずつの解析が与えるもの</a:t>
+            </a:r>
+          </a:p>
+        </p:txBody>
+      </p:sp>
+      <p:sp>
+        <p:nvSpPr>
+          <p:cNvPr id="7" name="TextBox 6"/>
+          <p:cNvSpPr txBox="1"/>
+          <p:nvPr/>
+        </p:nvSpPr>
+        <p:spPr>
+          <a:xfrm>
+            <a:off x="786384" y="2249424"/>
+            <a:ext cx="4773168" cy="475488"/>
+          </a:xfrm>
+          <a:prstGeom prst="rect">
+            <a:avLst/>
+          </a:prstGeom>
+          <a:noFill/>
+        </p:spPr>
+        <p:txBody>
+          <a:bodyPr wrap="square" lIns="0" rIns="0" tIns="0" bIns="0">
+            <a:spAutoFit/>
+          </a:bodyPr>
+          <a:lstStyle/>
+          <a:p>
+            <a:pPr marL="0" indent="0">
+              <a:spcAft>
+                <a:spcPts val="700"/>
+              </a:spcAft>
+            </a:pPr>
+            <a14:m xmlns:a14="http://schemas.microsoft.com/office/drawing/2010/main">
+              <m:oMathPara xmlns:m="http://schemas.openxmlformats.org/officeDocument/2006/math">
+                <m:oMathParaPr>
+                  <m:jc m:val="left"/>
+                </m:oMathParaPr>
+                <m:oMath>
+                  <m:sSub>
+                    <m:sSubPr>
+                      <m:ctrlPr>
+                        <a:rPr lang="en-US" sz="1800" b="0" i="1" dirty="0">
+                          <a:solidFill>
+                            <a:srgbClr val="1F4E79"/>
+                          </a:solidFill>
+                          <a:latin typeface="Cambria Math" panose="02040503050406030204" pitchFamily="18" charset="0"/>
+                        </a:rPr>
+                      </m:ctrlPr>
+                    </m:sSubPr>
+                    <m:e>
+                      <m:r>
+                        <a:rPr lang="en-US" sz="1800" b="0" i="1" dirty="0">
+                          <a:solidFill>
+                            <a:srgbClr val="1F4E79"/>
+                          </a:solidFill>
+                          <a:latin typeface="Cambria Math" panose="02040503050406030204" pitchFamily="18" charset="0"/>
+                        </a:rPr>
+                        <m:t xml:space="preserve">c</m:t>
+                      </m:r>
+                    </m:e>
+                    <m:sub>
+                      <m:r>
+                        <a:rPr lang="en-US" sz="1800" b="0" i="0" dirty="0">
+                          <a:solidFill>
+                            <a:srgbClr val="1F4E79"/>
+                          </a:solidFill>
+                          <a:latin typeface="Cambria Math" panose="02040503050406030204" pitchFamily="18" charset="0"/>
+                        </a:rPr>
+                        <m:t xml:space="preserve">1</m:t>
+                      </m:r>
+                    </m:sub>
+                  </m:sSub>
+                  <m:r>
+                    <a:rPr lang="en-US" sz="1800" b="0" i="0" dirty="0">
+                      <a:solidFill>
+                        <a:srgbClr val="1F4E79"/>
+                      </a:solidFill>
+                      <a:latin typeface="Cambria Math" panose="02040503050406030204" pitchFamily="18" charset="0"/>
+                    </a:rPr>
+                    <m:t xml:space="preserve"> + </m:t>
+                  </m:r>
+                  <m:sSub>
+                    <m:sSubPr>
+                      <m:ctrlPr>
+                        <a:rPr lang="en-US" sz="1800" b="0" i="1" dirty="0">
+                          <a:solidFill>
+                            <a:srgbClr val="1F4E79"/>
+                          </a:solidFill>
+                          <a:latin typeface="Cambria Math" panose="02040503050406030204" pitchFamily="18" charset="0"/>
+                        </a:rPr>
+                      </m:ctrlPr>
+                    </m:sSubPr>
+                    <m:e>
+                      <m:r>
+                        <a:rPr lang="en-US" sz="1800" b="0" i="1" dirty="0">
+                          <a:solidFill>
+                            <a:srgbClr val="1F4E79"/>
+                          </a:solidFill>
+                          <a:latin typeface="Cambria Math" panose="02040503050406030204" pitchFamily="18" charset="0"/>
+                        </a:rPr>
+                        <m:t xml:space="preserve">d</m:t>
+                      </m:r>
+                    </m:e>
+                    <m:sub>
+                      <m:r>
+                        <a:rPr lang="en-US" sz="1800" b="0" i="0" dirty="0">
+                          <a:solidFill>
+                            <a:srgbClr val="1F4E79"/>
+                          </a:solidFill>
+                          <a:latin typeface="Cambria Math" panose="02040503050406030204" pitchFamily="18" charset="0"/>
+                        </a:rPr>
+                        <m:t xml:space="preserve">1</m:t>
+                      </m:r>
+                    </m:sub>
+                  </m:sSub>
+                </m:oMath>
+              </m:oMathPara>
+            </a14:m>
+            <a:endParaRPr lang="en-US" sz="1800" dirty="0"/>
+          </a:p>
+        </p:txBody>
+      </p:sp>
+      <p:sp>
+        <p:nvSpPr>
+          <p:cNvPr id="8" name="TextBox 7"/>
+          <p:cNvSpPr txBox="1"/>
+          <p:nvPr/>
+        </p:nvSpPr>
+        <p:spPr>
+          <a:xfrm>
+            <a:off x="786384" y="2798064"/>
+            <a:ext cx="4773168" cy="640080"/>
+          </a:xfrm>
+          <a:prstGeom prst="rect">
+            <a:avLst/>
+          </a:prstGeom>
+          <a:noFill/>
+        </p:spPr>
+        <p:txBody>
+          <a:bodyPr wrap="square" anchor="t" lIns="0" rIns="0" tIns="0" bIns="0">
+            <a:spAutoFit/>
+          </a:bodyPr>
+          <a:lstStyle/>
+          <a:p>
+            <a:pPr algn="l">
+              <a:lnSpc>
+                <a:spcPct val="132000"/>
+              </a:lnSpc>
+              <a:spcAft>
+                <a:spcPts val="600"/>
+              </a:spcAft>
+            </a:pPr>
+            <a:r>
+              <a:rPr sz="1450" b="0">
+                <a:solidFill>
+                  <a:srgbClr val="222222"/>
+                </a:solidFill>
+                <a:latin typeface="Meiryo"/>
+                <a:ea typeface="Meiryo"/>
+                <a:cs typeface="Meiryo"/>
+              </a:rPr>
+              <a:t>食べた分が体になる割合の和。ブリなら、2つの餌からの分をまとめた1つの数しか出てこない。</a:t>
+            </a:r>
+          </a:p>
+        </p:txBody>
+      </p:sp>
+      <p:sp>
+        <p:nvSpPr>
+          <p:cNvPr id="9" name="Rectangle 8"/>
+          <p:cNvSpPr/>
+          <p:nvPr/>
+        </p:nvSpPr>
+        <p:spPr>
+          <a:xfrm>
+            <a:off x="6391656" y="1737360"/>
+            <a:ext cx="5230368" cy="1755648"/>
+          </a:xfrm>
+          <a:prstGeom prst="rect">
+            <a:avLst/>
+          </a:prstGeom>
+          <a:solidFill>
+            <a:srgbClr val="FBF1E8"/>
+          </a:solidFill>
+          <a:ln w="15875">
+            <a:solidFill>
+              <a:srgbClr val="C0561A"/>
+            </a:solidFill>
+          </a:ln>
+          <a:effectLst/>
+        </p:spPr>
+        <p:style>
+          <a:lnRef idx="1">
+            <a:schemeClr val="accent1"/>
+          </a:lnRef>
+          <a:fillRef idx="3">
+            <a:schemeClr val="accent1"/>
+          </a:fillRef>
+          <a:effectRef idx="2">
+            <a:schemeClr val="accent1"/>
+          </a:effectRef>
+          <a:fontRef idx="minor">
+            <a:schemeClr val="lt1"/>
+          </a:fontRef>
+        </p:style>
+        <p:txBody>
+          <a:bodyPr rtlCol="0" anchor="ctr" wrap="square"/>
+          <a:lstStyle/>
+          <a:p>
+            <a:pPr algn="ctr"/>
+          </a:p>
+        </p:txBody>
+      </p:sp>
+      <p:sp>
+        <p:nvSpPr>
+          <p:cNvPr id="10" name="TextBox 9"/>
+          <p:cNvSpPr txBox="1"/>
+          <p:nvPr/>
+        </p:nvSpPr>
+        <p:spPr>
+          <a:xfrm>
+            <a:off x="6611112" y="1874519"/>
+            <a:ext cx="4791456" cy="310896"/>
+          </a:xfrm>
+          <a:prstGeom prst="rect">
+            <a:avLst/>
+          </a:prstGeom>
+          <a:noFill/>
+        </p:spPr>
+        <p:txBody>
+          <a:bodyPr wrap="square" anchor="t" lIns="0" rIns="0" tIns="0" bIns="0">
+            <a:spAutoFit/>
+          </a:bodyPr>
+          <a:lstStyle/>
+          <a:p>
+            <a:pPr algn="l">
+              <a:lnSpc>
+                <a:spcPct val="132000"/>
+              </a:lnSpc>
+              <a:spcAft>
+                <a:spcPts val="600"/>
+              </a:spcAft>
+            </a:pPr>
+            <a:r>
+              <a:rPr sz="1600" b="1">
+                <a:solidFill>
+                  <a:srgbClr val="C0561A"/>
+                </a:solidFill>
+                <a:latin typeface="Meiryo"/>
+                <a:ea typeface="Meiryo"/>
+                <a:cs typeface="Meiryo"/>
+              </a:rPr>
+              <a:t>資源量のデータが決めているもの</a:t>
+            </a:r>
+          </a:p>
+        </p:txBody>
+      </p:sp>
+      <p:sp>
+        <p:nvSpPr>
+          <p:cNvPr id="11" name="TextBox 10"/>
+          <p:cNvSpPr txBox="1"/>
+          <p:nvPr/>
+        </p:nvSpPr>
+        <p:spPr>
+          <a:xfrm>
+            <a:off x="6611112" y="2249424"/>
+            <a:ext cx="4791456" cy="475488"/>
+          </a:xfrm>
+          <a:prstGeom prst="rect">
+            <a:avLst/>
+          </a:prstGeom>
+          <a:noFill/>
+        </p:spPr>
+        <p:txBody>
+          <a:bodyPr wrap="square" lIns="0" rIns="0" tIns="0" bIns="0">
+            <a:spAutoFit/>
+          </a:bodyPr>
+          <a:lstStyle/>
+          <a:p>
+            <a:pPr marL="0" indent="0">
+              <a:spcAft>
+                <a:spcPts val="700"/>
+              </a:spcAft>
+            </a:pPr>
+            <a14:m xmlns:a14="http://schemas.microsoft.com/office/drawing/2010/main">
+              <m:oMathPara xmlns:m="http://schemas.openxmlformats.org/officeDocument/2006/math">
+                <m:oMathParaPr>
+                  <m:jc m:val="left"/>
+                </m:oMathParaPr>
+                <m:oMath>
+                  <m:sSub>
+                    <m:sSubPr>
+                      <m:ctrlPr>
+                        <a:rPr lang="en-US" sz="1800" b="0" i="1" dirty="0">
+                          <a:solidFill>
+                            <a:srgbClr val="C0561A"/>
+                          </a:solidFill>
+                          <a:latin typeface="Cambria Math" panose="02040503050406030204" pitchFamily="18" charset="0"/>
+                        </a:rPr>
+                      </m:ctrlPr>
+                    </m:sSubPr>
+                    <m:e>
+                      <m:r>
+                        <a:rPr lang="en-US" sz="1800" b="0" i="1" dirty="0">
+                          <a:solidFill>
+                            <a:srgbClr val="C0561A"/>
+                          </a:solidFill>
+                          <a:latin typeface="Cambria Math" panose="02040503050406030204" pitchFamily="18" charset="0"/>
+                        </a:rPr>
+                        <m:t xml:space="preserve">c</m:t>
+                      </m:r>
+                    </m:e>
+                    <m:sub>
+                      <m:r>
+                        <a:rPr lang="en-US" sz="1800" b="0" i="0" dirty="0">
+                          <a:solidFill>
+                            <a:srgbClr val="C0561A"/>
+                          </a:solidFill>
+                          <a:latin typeface="Cambria Math" panose="02040503050406030204" pitchFamily="18" charset="0"/>
+                        </a:rPr>
+                        <m:t xml:space="preserve">1</m:t>
+                      </m:r>
+                    </m:sub>
+                  </m:sSub>
+                  <m:sSub>
+                    <m:sSubPr>
+                      <m:ctrlPr>
+                        <a:rPr lang="en-US" sz="1800" b="0" i="1" dirty="0">
+                          <a:solidFill>
+                            <a:srgbClr val="C0561A"/>
+                          </a:solidFill>
+                          <a:latin typeface="Cambria Math" panose="02040503050406030204" pitchFamily="18" charset="0"/>
+                        </a:rPr>
+                      </m:ctrlPr>
+                    </m:sSubPr>
+                    <m:e>
+                      <m:r>
+                        <a:rPr lang="en-US" sz="1800" b="0" i="1" dirty="0">
+                          <a:solidFill>
+                            <a:srgbClr val="C0561A"/>
+                          </a:solidFill>
+                          <a:latin typeface="Cambria Math" panose="02040503050406030204" pitchFamily="18" charset="0"/>
+                        </a:rPr>
+                        <m:t xml:space="preserve">λ</m:t>
+                      </m:r>
+                    </m:e>
+                    <m:sub>
+                      <m:r>
+                        <a:rPr lang="en-US" sz="1800" b="0" i="0" dirty="0">
+                          <a:solidFill>
+                            <a:srgbClr val="C0561A"/>
+                          </a:solidFill>
+                          <a:latin typeface="Cambria Math" panose="02040503050406030204" pitchFamily="18" charset="0"/>
+                        </a:rPr>
+                        <m:t xml:space="preserve">11</m:t>
+                      </m:r>
+                    </m:sub>
+                  </m:sSub>
+                  <m:r>
+                    <a:rPr lang="en-US" sz="1800" b="0" i="0" dirty="0">
+                      <a:solidFill>
+                        <a:srgbClr val="C0561A"/>
+                      </a:solidFill>
+                      <a:latin typeface="Cambria Math" panose="02040503050406030204" pitchFamily="18" charset="0"/>
+                    </a:rPr>
+                    <m:t xml:space="preserve">，</m:t>
+                  </m:r>
+                  <m:sSub>
+                    <m:sSubPr>
+                      <m:ctrlPr>
+                        <a:rPr lang="en-US" sz="1800" b="0" i="1" dirty="0">
+                          <a:solidFill>
+                            <a:srgbClr val="C0561A"/>
+                          </a:solidFill>
+                          <a:latin typeface="Cambria Math" panose="02040503050406030204" pitchFamily="18" charset="0"/>
+                        </a:rPr>
+                      </m:ctrlPr>
+                    </m:sSubPr>
+                    <m:e>
+                      <m:r>
+                        <a:rPr lang="en-US" sz="1800" b="0" i="1" dirty="0">
+                          <a:solidFill>
+                            <a:srgbClr val="C0561A"/>
+                          </a:solidFill>
+                          <a:latin typeface="Cambria Math" panose="02040503050406030204" pitchFamily="18" charset="0"/>
+                        </a:rPr>
+                        <m:t xml:space="preserve">d</m:t>
+                      </m:r>
+                    </m:e>
+                    <m:sub>
+                      <m:r>
+                        <a:rPr lang="en-US" sz="1800" b="0" i="0" dirty="0">
+                          <a:solidFill>
+                            <a:srgbClr val="C0561A"/>
+                          </a:solidFill>
+                          <a:latin typeface="Cambria Math" panose="02040503050406030204" pitchFamily="18" charset="0"/>
+                        </a:rPr>
+                        <m:t xml:space="preserve">1</m:t>
+                      </m:r>
+                    </m:sub>
+                  </m:sSub>
+                  <m:sSub>
+                    <m:sSubPr>
+                      <m:ctrlPr>
+                        <a:rPr lang="en-US" sz="1800" b="0" i="1" dirty="0">
+                          <a:solidFill>
+                            <a:srgbClr val="C0561A"/>
+                          </a:solidFill>
+                          <a:latin typeface="Cambria Math" panose="02040503050406030204" pitchFamily="18" charset="0"/>
+                        </a:rPr>
+                      </m:ctrlPr>
+                    </m:sSubPr>
+                    <m:e>
+                      <m:r>
+                        <a:rPr lang="en-US" sz="1800" b="0" i="1" dirty="0">
+                          <a:solidFill>
+                            <a:srgbClr val="C0561A"/>
+                          </a:solidFill>
+                          <a:latin typeface="Cambria Math" panose="02040503050406030204" pitchFamily="18" charset="0"/>
+                        </a:rPr>
+                        <m:t xml:space="preserve">λ</m:t>
+                      </m:r>
+                    </m:e>
+                    <m:sub>
+                      <m:r>
+                        <a:rPr lang="en-US" sz="1800" b="0" i="0" dirty="0">
+                          <a:solidFill>
+                            <a:srgbClr val="C0561A"/>
+                          </a:solidFill>
+                          <a:latin typeface="Cambria Math" panose="02040503050406030204" pitchFamily="18" charset="0"/>
+                        </a:rPr>
+                        <m:t xml:space="preserve">21</m:t>
+                      </m:r>
+                    </m:sub>
+                  </m:sSub>
+                </m:oMath>
+              </m:oMathPara>
+            </a14:m>
+            <a:endParaRPr lang="en-US" sz="1800" dirty="0"/>
+          </a:p>
+        </p:txBody>
+      </p:sp>
+      <p:sp>
+        <p:nvSpPr>
+          <p:cNvPr id="12" name="TextBox 11"/>
+          <p:cNvSpPr txBox="1"/>
+          <p:nvPr/>
+        </p:nvSpPr>
+        <p:spPr>
+          <a:xfrm>
+            <a:off x="6611112" y="2798064"/>
+            <a:ext cx="4791456" cy="640080"/>
+          </a:xfrm>
+          <a:prstGeom prst="rect">
+            <a:avLst/>
+          </a:prstGeom>
+          <a:noFill/>
+        </p:spPr>
+        <p:txBody>
+          <a:bodyPr wrap="square" anchor="t" lIns="0" rIns="0" tIns="0" bIns="0">
+            <a:spAutoFit/>
+          </a:bodyPr>
+          <a:lstStyle/>
+          <a:p>
+            <a:pPr algn="l">
+              <a:lnSpc>
+                <a:spcPct val="132000"/>
+              </a:lnSpc>
+              <a:spcAft>
+                <a:spcPts val="600"/>
+              </a:spcAft>
+            </a:pPr>
+            <a:r>
+              <a:rPr sz="1450" b="0">
+                <a:solidFill>
+                  <a:srgbClr val="222222"/>
+                </a:solidFill>
+                <a:latin typeface="Meiryo"/>
+                <a:ea typeface="Meiryo"/>
+                <a:cs typeface="Meiryo"/>
+              </a:rPr>
+              <a:t>その割合と「食べられる強さ」のかけ算。経路ごとに別々の値で、和とは対応しない。</a:t>
+            </a:r>
+          </a:p>
+        </p:txBody>
+      </p:sp>
+      <p:cxnSp>
+        <p:nvCxnSpPr>
+          <p:cNvPr id="13" name="Connector 12"/>
+          <p:cNvCxnSpPr/>
+          <p:nvPr/>
+        </p:nvCxnSpPr>
+        <p:spPr>
+          <a:xfrm>
+            <a:off x="5815584" y="2615184"/>
+            <a:ext cx="539496" cy="0"/>
+          </a:xfrm>
+          <a:prstGeom prst="line">
+            <a:avLst/>
+          </a:prstGeom>
+          <a:ln w="25400">
+            <a:solidFill>
+              <a:srgbClr val="6E6E6E"/>
+            </a:solidFill>
+            <a:tailEnd type="triangle" w="med" len="med"/>
+          </a:ln>
+        </p:spPr>
+        <p:style>
+          <a:lnRef idx="2">
+            <a:schemeClr val="accent1"/>
+          </a:lnRef>
+          <a:fillRef idx="0">
+            <a:schemeClr val="accent1"/>
+          </a:fillRef>
+          <a:effectRef idx="1">
+            <a:schemeClr val="accent1"/>
+          </a:effectRef>
+          <a:fontRef idx="minor">
+            <a:schemeClr val="tx1"/>
+          </a:fontRef>
+        </p:style>
+      </p:cxnSp>
+      <p:sp>
+        <p:nvSpPr>
+          <p:cNvPr id="14" name="Rectangle 13"/>
+          <p:cNvSpPr/>
+          <p:nvPr/>
+        </p:nvSpPr>
+        <p:spPr>
+          <a:xfrm>
+            <a:off x="566928" y="3675887"/>
+            <a:ext cx="11057839" cy="1133856"/>
+          </a:xfrm>
+          <a:prstGeom prst="rect">
+            <a:avLst/>
+          </a:prstGeom>
+          <a:solidFill>
+            <a:srgbClr val="EDEDED"/>
+          </a:solidFill>
+          <a:ln>
+            <a:noFill/>
+          </a:ln>
+          <a:effectLst/>
+        </p:spPr>
+        <p:style>
+          <a:lnRef idx="1">
+            <a:schemeClr val="accent1"/>
+          </a:lnRef>
+          <a:fillRef idx="3">
+            <a:schemeClr val="accent1"/>
+          </a:fillRef>
+          <a:effectRef idx="2">
+            <a:schemeClr val="accent1"/>
+          </a:effectRef>
+          <a:fontRef idx="minor">
+            <a:schemeClr val="lt1"/>
+          </a:fontRef>
+        </p:style>
+        <p:txBody>
+          <a:bodyPr rtlCol="0" anchor="ctr" wrap="square"/>
+          <a:lstStyle/>
+          <a:p>
+            <a:pPr algn="ctr"/>
+          </a:p>
+        </p:txBody>
+      </p:sp>
+      <p:sp>
+        <p:nvSpPr>
+          <p:cNvPr id="15" name="TextBox 14"/>
+          <p:cNvSpPr txBox="1"/>
+          <p:nvPr/>
+        </p:nvSpPr>
+        <p:spPr>
+          <a:xfrm>
+            <a:off x="786384" y="3822191"/>
+            <a:ext cx="10618927" cy="914400"/>
+          </a:xfrm>
+          <a:prstGeom prst="rect">
+            <a:avLst/>
+          </a:prstGeom>
+          <a:noFill/>
+        </p:spPr>
+        <p:txBody>
+          <a:bodyPr wrap="square" anchor="t" lIns="0" rIns="0" tIns="0" bIns="0">
+            <a:spAutoFit/>
+          </a:bodyPr>
+          <a:lstStyle/>
+          <a:p>
+            <a:pPr algn="l">
+              <a:lnSpc>
+                <a:spcPct val="132000"/>
+              </a:lnSpc>
+              <a:spcAft>
+                <a:spcPts val="700"/>
+              </a:spcAft>
+            </a:pPr>
+            <a:r>
+              <a:rPr sz="1550" b="0">
+                <a:solidFill>
+                  <a:srgbClr val="222222"/>
+                </a:solidFill>
+                <a:latin typeface="Meiryo"/>
+                <a:ea typeface="Meiryo"/>
+                <a:cs typeface="Meiryo"/>
+              </a:rPr>
+              <a:t>マイワシ版で和を固定すると、ウルメ→ブリ の λ が 0.224 → 0.945 まで大きくなる（大蛇行なし、12個の自由推定 → 8個の固定）。</a:t>
+            </a:r>
+          </a:p>
+          <a:p>
+            <a:pPr algn="l">
+              <a:lnSpc>
+                <a:spcPct val="132000"/>
+              </a:lnSpc>
+              <a:spcAft>
+                <a:spcPts val="700"/>
+              </a:spcAft>
+            </a:pPr>
+            <a:r>
+              <a:rPr sz="1550" b="0">
+                <a:solidFill>
+                  <a:srgbClr val="222222"/>
+                </a:solidFill>
+                <a:latin typeface="Meiryo"/>
+                <a:ea typeface="Meiryo"/>
+                <a:cs typeface="Meiryo"/>
+              </a:rPr>
+              <a:t>マアジ版でも同じことが起きる（0.070 → 0.869）。歪む量は種構成で変わるが、向きは同じ。</a:t>
+            </a:r>
+          </a:p>
+        </p:txBody>
+      </p:sp>
+      <p:sp>
+        <p:nvSpPr>
+          <p:cNvPr id="16" name="Rectangle 15"/>
+          <p:cNvSpPr/>
+          <p:nvPr/>
+        </p:nvSpPr>
+        <p:spPr>
+          <a:xfrm>
+            <a:off x="566928" y="4956048"/>
+            <a:ext cx="11057839" cy="566928"/>
+          </a:xfrm>
+          <a:prstGeom prst="rect">
+            <a:avLst/>
+          </a:prstGeom>
+          <a:solidFill>
+            <a:srgbClr val="FBF1E8"/>
+          </a:solidFill>
+          <a:ln w="15875">
+            <a:solidFill>
+              <a:srgbClr val="C0561A"/>
+            </a:solidFill>
+          </a:ln>
+          <a:effectLst/>
+        </p:spPr>
+        <p:style>
+          <a:lnRef idx="1">
+            <a:schemeClr val="accent1"/>
+          </a:lnRef>
+          <a:fillRef idx="3">
+            <a:schemeClr val="accent1"/>
+          </a:fillRef>
+          <a:effectRef idx="2">
+            <a:schemeClr val="accent1"/>
+          </a:effectRef>
+          <a:fontRef idx="minor">
+            <a:schemeClr val="lt1"/>
+          </a:fontRef>
+        </p:style>
+        <p:txBody>
+          <a:bodyPr rtlCol="0" anchor="ctr" wrap="square"/>
+          <a:lstStyle/>
+          <a:p>
+            <a:pPr algn="ctr"/>
+          </a:p>
+        </p:txBody>
+      </p:sp>
+      <p:sp>
+        <p:nvSpPr>
+          <p:cNvPr id="17" name="TextBox 16"/>
+          <p:cNvSpPr txBox="1"/>
+          <p:nvPr/>
+        </p:nvSpPr>
+        <p:spPr>
+          <a:xfrm>
+            <a:off x="768096" y="5084064"/>
+            <a:ext cx="10655503" cy="365760"/>
+          </a:xfrm>
+          <a:prstGeom prst="rect">
+            <a:avLst/>
+          </a:prstGeom>
+          <a:noFill/>
+        </p:spPr>
+        <p:txBody>
+          <a:bodyPr wrap="square" anchor="t" lIns="0" rIns="0" tIns="0" bIns="0">
+            <a:spAutoFit/>
+          </a:bodyPr>
+          <a:lstStyle/>
+          <a:p>
+            <a:pPr algn="l">
+              <a:lnSpc>
+                <a:spcPct val="132000"/>
+              </a:lnSpc>
+              <a:spcAft>
+                <a:spcPts val="600"/>
+              </a:spcAft>
+            </a:pPr>
+            <a:r>
+              <a:rPr sz="1700" b="1">
+                <a:solidFill>
+                  <a:srgbClr val="C0561A"/>
+                </a:solidFill>
+                <a:latin typeface="Meiryo"/>
+                <a:ea typeface="Meiryo"/>
+                <a:cs typeface="Meiryo"/>
+              </a:rPr>
+              <a:t>借りられるのは「増える速さ」まで、という結論は種構成に左右されない。</a:t>
+            </a:r>
+          </a:p>
+        </p:txBody>
+      </p:sp>
+      <p:sp>
+        <p:nvSpPr>
+          <p:cNvPr id="18" name="TextBox 17"/>
+          <p:cNvSpPr txBox="1"/>
+          <p:nvPr/>
+        </p:nvSpPr>
+        <p:spPr>
+          <a:xfrm>
+            <a:off x="566928" y="5715000"/>
+            <a:ext cx="10326319" cy="566928"/>
+          </a:xfrm>
+          <a:prstGeom prst="rect">
+            <a:avLst/>
+          </a:prstGeom>
+          <a:noFill/>
+        </p:spPr>
+        <p:txBody>
+          <a:bodyPr wrap="square" anchor="t" lIns="0" rIns="0" tIns="0" bIns="0">
+            <a:spAutoFit/>
+          </a:bodyPr>
+          <a:lstStyle/>
+          <a:p>
+            <a:pPr algn="l">
+              <a:lnSpc>
+                <a:spcPct val="132000"/>
+              </a:lnSpc>
+              <a:spcAft>
+                <a:spcPts val="600"/>
+              </a:spcAft>
+            </a:pPr>
+            <a:r>
+              <a:rPr sz="1400" b="0">
+                <a:solidFill>
+                  <a:srgbClr val="6E6E6E"/>
+                </a:solidFill>
+                <a:latin typeface="Meiryo"/>
+                <a:ea typeface="Meiryo"/>
+                <a:cs typeface="Meiryo"/>
+              </a:rPr>
+              <a:t>λ は平均を1にそろえた空間での値（9枚目と同じ定義）。9枚目に載せた 0.224 という値は、もともとこのマイワシ版で測ったもの。</a:t>
+            </a:r>
+          </a:p>
+        </p:txBody>
+      </p:sp>
+    </p:spTree>
+  </p:cSld>
+  <p:clrMapOvr>
+    <a:masterClrMapping/>
+  </p:clrMapOvr>
+</p:sld>
+</file>
+
+<file path=ppt/slides/slide27.xml><?xml version="1.0" encoding="utf-8"?>
+<p:sld xmlns:a="http://schemas.openxmlformats.org/drawingml/2006/main" xmlns:p="http://schemas.openxmlformats.org/presentationml/2006/main" xmlns:r="http://schemas.openxmlformats.org/officeDocument/2006/relationships">
+  <p:cSld>
+    <p:spTree>
+      <p:nvGrpSpPr>
+        <p:cNvPr id="1" name=""/>
+        <p:cNvGrpSpPr/>
+        <p:nvPr/>
+      </p:nvGrpSpPr>
+      <p:grpSpPr/>
+      <p:sp>
+        <p:nvSpPr>
+          <p:cNvPr id="2" name="TextBox 1"/>
+          <p:cNvSpPr txBox="1"/>
+          <p:nvPr/>
+        </p:nvSpPr>
+        <p:spPr>
+          <a:xfrm>
+            <a:off x="566928" y="329184"/>
+            <a:ext cx="11057839" cy="822960"/>
+          </a:xfrm>
+          <a:prstGeom prst="rect">
+            <a:avLst/>
+          </a:prstGeom>
+          <a:noFill/>
+        </p:spPr>
+        <p:txBody>
+          <a:bodyPr wrap="square" anchor="t" lIns="0" rIns="0" tIns="0" bIns="0">
+            <a:spAutoFit/>
+          </a:bodyPr>
+          <a:lstStyle/>
+          <a:p>
+            <a:pPr algn="l">
+              <a:lnSpc>
+                <a:spcPct val="115000"/>
+              </a:lnSpc>
+              <a:spcAft>
+                <a:spcPts val="600"/>
+              </a:spcAft>
+            </a:pPr>
+            <a:r>
+              <a:rPr sz="2600" b="1">
+                <a:solidFill>
+                  <a:srgbClr val="1F4E79"/>
+                </a:solidFill>
+                <a:latin typeface="Meiryo"/>
+                <a:ea typeface="Meiryo"/>
+                <a:cs typeface="Meiryo"/>
+              </a:rPr>
+              <a:t>［マイワシ版・10枚目］同じ記号 r でも、中身が違う</a:t>
+            </a:r>
+          </a:p>
+        </p:txBody>
+      </p:sp>
+      <p:sp>
+        <p:nvSpPr>
+          <p:cNvPr id="3" name="TextBox 2"/>
+          <p:cNvSpPr txBox="1"/>
+          <p:nvPr/>
+        </p:nvSpPr>
+        <p:spPr>
+          <a:xfrm>
+            <a:off x="11048695" y="6291072"/>
+            <a:ext cx="640080" cy="274320"/>
+          </a:xfrm>
+          <a:prstGeom prst="rect">
+            <a:avLst/>
+          </a:prstGeom>
+          <a:noFill/>
+        </p:spPr>
+        <p:txBody>
+          <a:bodyPr wrap="none" lIns="0" rIns="0" tIns="0" bIns="0">
+            <a:spAutoFit/>
+          </a:bodyPr>
+          <a:lstStyle/>
+          <a:p>
+            <a:pPr algn="r"/>
+            <a:r>
+              <a:rPr sz="1100" b="0">
+                <a:solidFill>
+                  <a:srgbClr val="6E6E6E"/>
+                </a:solidFill>
+                <a:latin typeface="Meiryo"/>
+                <a:ea typeface="Meiryo"/>
+                <a:cs typeface="Meiryo"/>
+              </a:rPr>
+              <a:t>27</a:t>
+            </a:r>
+          </a:p>
+        </p:txBody>
+      </p:sp>
+      <p:pic>
+        <p:nvPicPr>
+          <p:cNvPr id="4" name="Picture 3" descr="07m_増える速さと漁獲率_マイワシ.png"/>
+          <p:cNvPicPr>
+            <a:picLocks noChangeAspect="1"/>
+          </p:cNvPicPr>
+          <p:nvPr/>
+        </p:nvPicPr>
+        <p:blipFill>
+          <a:blip r:embed="rId2"/>
+          <a:stretch>
+            <a:fillRect/>
+          </a:stretch>
+        </p:blipFill>
+        <p:spPr>
+          <a:xfrm>
+            <a:off x="566928" y="1325880"/>
+            <a:ext cx="6172200" cy="2880360"/>
+          </a:xfrm>
+          <a:prstGeom prst="rect">
+            <a:avLst/>
+          </a:prstGeom>
+        </p:spPr>
+      </p:pic>
+      <p:sp>
+        <p:nvSpPr>
+          <p:cNvPr id="5" name="figlabel"/>
+          <p:cNvSpPr txBox="1"/>
+          <p:nvPr/>
+        </p:nvSpPr>
+        <p:spPr>
+          <a:xfrm>
+            <a:off x="3604884" y="1509453"/>
+            <a:ext cx="2515362" cy="191642"/>
+          </a:xfrm>
+          <a:prstGeom prst="rect">
+            <a:avLst/>
+          </a:prstGeom>
+          <a:noFill/>
+        </p:spPr>
+        <p:txBody>
+          <a:bodyPr wrap="none" anchor="ctr" lIns="0" rIns="0" tIns="0" bIns="0">
+            <a:spAutoFit/>
+          </a:bodyPr>
+          <a:lstStyle/>
+          <a:p>
+            <a:pPr algn="l">
+              <a:lnSpc>
+                <a:spcPct val="120000"/>
+              </a:lnSpc>
+              <a:spcAft>
+                <a:spcPts val="0"/>
+              </a:spcAft>
+            </a:pPr>
+            <a:r>
+              <a:rPr sz="1050" b="0">
+                <a:solidFill>
+                  <a:srgbClr val="222222"/>
+                </a:solidFill>
+                <a:latin typeface="Meiryo"/>
+                <a:ea typeface="Meiryo"/>
+                <a:cs typeface="Meiryo"/>
+              </a:rPr>
+              <a:t>1種ずつの解析から借りた「増える速さ」</a:t>
+            </a:r>
+          </a:p>
+        </p:txBody>
+      </p:sp>
+      <p:sp>
+        <p:nvSpPr>
+          <p:cNvPr id="6" name="figlabel"/>
+          <p:cNvSpPr txBox="1"/>
+          <p:nvPr/>
+        </p:nvSpPr>
+        <p:spPr>
+          <a:xfrm>
+            <a:off x="3604884" y="1739882"/>
+            <a:ext cx="2467356" cy="191642"/>
+          </a:xfrm>
+          <a:prstGeom prst="rect">
+            <a:avLst/>
+          </a:prstGeom>
+          <a:noFill/>
+        </p:spPr>
+        <p:txBody>
+          <a:bodyPr wrap="none" anchor="ctr" lIns="0" rIns="0" tIns="0" bIns="0">
+            <a:spAutoFit/>
+          </a:bodyPr>
+          <a:lstStyle/>
+          <a:p>
+            <a:pPr algn="l">
+              <a:lnSpc>
+                <a:spcPct val="120000"/>
+              </a:lnSpc>
+              <a:spcAft>
+                <a:spcPts val="0"/>
+              </a:spcAft>
+            </a:pPr>
+            <a:r>
+              <a:rPr sz="1050" b="0">
+                <a:solidFill>
+                  <a:srgbClr val="222222"/>
+                </a:solidFill>
+                <a:latin typeface="Meiryo"/>
+                <a:ea typeface="Meiryo"/>
+                <a:cs typeface="Meiryo"/>
+              </a:rPr>
+              <a:t>実際にとっている割合（1994〜2024年）</a:t>
+            </a:r>
+          </a:p>
+        </p:txBody>
+      </p:sp>
+      <p:sp>
+        <p:nvSpPr>
+          <p:cNvPr id="7" name="figlabel"/>
+          <p:cNvSpPr txBox="1"/>
+          <p:nvPr/>
+        </p:nvSpPr>
+        <p:spPr>
+          <a:xfrm>
+            <a:off x="2232533" y="3886520"/>
+            <a:ext cx="680720" cy="224663"/>
+          </a:xfrm>
+          <a:prstGeom prst="rect">
+            <a:avLst/>
+          </a:prstGeom>
+          <a:noFill/>
+        </p:spPr>
+        <p:txBody>
+          <a:bodyPr wrap="none" anchor="ctr" lIns="0" rIns="0" tIns="0" bIns="0">
+            <a:spAutoFit/>
+          </a:bodyPr>
+          <a:lstStyle/>
+          <a:p>
+            <a:pPr algn="ctr">
+              <a:lnSpc>
+                <a:spcPct val="120000"/>
+              </a:lnSpc>
+              <a:spcAft>
+                <a:spcPts val="0"/>
+              </a:spcAft>
+            </a:pPr>
+            <a:r>
+              <a:rPr sz="1250" b="0">
+                <a:solidFill>
+                  <a:srgbClr val="222222"/>
+                </a:solidFill>
+                <a:latin typeface="Meiryo"/>
+                <a:ea typeface="Meiryo"/>
+                <a:cs typeface="Meiryo"/>
+              </a:rPr>
+              <a:t>マイワシ</a:t>
+            </a:r>
+          </a:p>
+        </p:txBody>
+      </p:sp>
+      <p:sp>
+        <p:nvSpPr>
+          <p:cNvPr id="8" name="figlabel"/>
+          <p:cNvSpPr txBox="1"/>
+          <p:nvPr/>
+        </p:nvSpPr>
+        <p:spPr>
+          <a:xfrm>
+            <a:off x="4789551" y="3886520"/>
+            <a:ext cx="998220" cy="224663"/>
+          </a:xfrm>
+          <a:prstGeom prst="rect">
+            <a:avLst/>
+          </a:prstGeom>
+          <a:noFill/>
+        </p:spPr>
+        <p:txBody>
+          <a:bodyPr wrap="none" anchor="ctr" lIns="0" rIns="0" tIns="0" bIns="0">
+            <a:spAutoFit/>
+          </a:bodyPr>
+          <a:lstStyle/>
+          <a:p>
+            <a:pPr algn="ctr">
+              <a:lnSpc>
+                <a:spcPct val="120000"/>
+              </a:lnSpc>
+              <a:spcAft>
+                <a:spcPts val="0"/>
+              </a:spcAft>
+            </a:pPr>
+            <a:r>
+              <a:rPr sz="1250" b="0">
+                <a:solidFill>
+                  <a:srgbClr val="222222"/>
+                </a:solidFill>
+                <a:latin typeface="Meiryo"/>
+                <a:ea typeface="Meiryo"/>
+                <a:cs typeface="Meiryo"/>
+              </a:rPr>
+              <a:t>ウルメイワシ</a:t>
+            </a:r>
+          </a:p>
+        </p:txBody>
+      </p:sp>
+      <p:sp>
+        <p:nvSpPr>
+          <p:cNvPr id="9" name="figlabel"/>
+          <p:cNvSpPr txBox="1"/>
+          <p:nvPr/>
+        </p:nvSpPr>
+        <p:spPr>
+          <a:xfrm>
+            <a:off x="1711833" y="1658371"/>
+            <a:ext cx="1722120" cy="216408"/>
+          </a:xfrm>
+          <a:prstGeom prst="rect">
+            <a:avLst/>
+          </a:prstGeom>
+          <a:noFill/>
+        </p:spPr>
+        <p:txBody>
+          <a:bodyPr wrap="none" anchor="ctr" lIns="0" rIns="0" tIns="0" bIns="0">
+            <a:spAutoFit/>
+          </a:bodyPr>
+          <a:lstStyle/>
+          <a:p>
+            <a:pPr algn="ctr">
+              <a:lnSpc>
+                <a:spcPct val="120000"/>
+              </a:lnSpc>
+              <a:spcAft>
+                <a:spcPts val="0"/>
+              </a:spcAft>
+            </a:pPr>
+            <a:r>
+              <a:rPr sz="1200" b="0">
+                <a:solidFill>
+                  <a:srgbClr val="1F4E79"/>
+                </a:solidFill>
+                <a:latin typeface="Meiryo"/>
+                <a:ea typeface="Meiryo"/>
+                <a:cs typeface="Meiryo"/>
+              </a:rPr>
+              <a:t>マイワシでは逆転しない</a:t>
+            </a:r>
+          </a:p>
+        </p:txBody>
+      </p:sp>
+      <p:sp>
+        <p:nvSpPr>
+          <p:cNvPr id="10" name="figlabel"/>
+          <p:cNvSpPr txBox="1"/>
+          <p:nvPr/>
+        </p:nvSpPr>
+        <p:spPr>
+          <a:xfrm>
+            <a:off x="640994" y="1369085"/>
+            <a:ext cx="1582165" cy="208153"/>
+          </a:xfrm>
+          <a:prstGeom prst="rect">
+            <a:avLst/>
+          </a:prstGeom>
+          <a:noFill/>
+        </p:spPr>
+        <p:txBody>
+          <a:bodyPr wrap="none" anchor="ctr" lIns="0" rIns="0" tIns="0" bIns="0">
+            <a:spAutoFit/>
+          </a:bodyPr>
+          <a:lstStyle/>
+          <a:p>
+            <a:pPr algn="l">
+              <a:lnSpc>
+                <a:spcPct val="120000"/>
+              </a:lnSpc>
+              <a:spcAft>
+                <a:spcPts val="0"/>
+              </a:spcAft>
+            </a:pPr>
+            <a:r>
+              <a:rPr sz="1150" b="0">
+                <a:solidFill>
+                  <a:srgbClr val="6E6E6E"/>
+                </a:solidFill>
+                <a:latin typeface="Meiryo"/>
+                <a:ea typeface="Meiryo"/>
+                <a:cs typeface="Meiryo"/>
+              </a:rPr>
+              <a:t>縦軸：1年あたりの割合</a:t>
+            </a:r>
+          </a:p>
+        </p:txBody>
+      </p:sp>
+      <p:sp>
+        <p:nvSpPr>
+          <p:cNvPr id="11" name="TextBox 10"/>
+          <p:cNvSpPr txBox="1"/>
+          <p:nvPr/>
+        </p:nvSpPr>
+        <p:spPr>
+          <a:xfrm>
+            <a:off x="7059168" y="1298448"/>
+            <a:ext cx="4553712" cy="3840480"/>
+          </a:xfrm>
+          <a:prstGeom prst="rect">
+            <a:avLst/>
+          </a:prstGeom>
+          <a:noFill/>
+        </p:spPr>
+        <p:txBody>
+          <a:bodyPr wrap="square" anchor="t" lIns="0" rIns="0" tIns="0" bIns="0">
+            <a:spAutoFit/>
+          </a:bodyPr>
+          <a:lstStyle/>
+          <a:p>
+            <a:pPr algn="l">
+              <a:lnSpc>
+                <a:spcPct val="132000"/>
+              </a:lnSpc>
+              <a:spcAft>
+                <a:spcPts val="900"/>
+              </a:spcAft>
+            </a:pPr>
+            <a:r>
+              <a:rPr sz="1700" b="1">
+                <a:solidFill>
+                  <a:srgbClr val="1F4E79"/>
+                </a:solidFill>
+                <a:latin typeface="Meiryo"/>
+                <a:ea typeface="Meiryo"/>
+                <a:cs typeface="Meiryo"/>
+              </a:rPr>
+              <a:t>マイワシでは逆転しない</a:t>
+            </a:r>
+          </a:p>
+          <a:p>
+            <a:pPr algn="l">
+              <a:lnSpc>
+                <a:spcPct val="132000"/>
+              </a:lnSpc>
+              <a:spcAft>
+                <a:spcPts val="900"/>
+              </a:spcAft>
+            </a:pPr>
+            <a:r>
+              <a:rPr sz="1550" b="0">
+                <a:solidFill>
+                  <a:srgbClr val="222222"/>
+                </a:solidFill>
+                <a:latin typeface="Meiryo"/>
+                <a:ea typeface="Meiryo"/>
+                <a:cs typeface="Meiryo"/>
+              </a:rPr>
+              <a:t>借りた r 0.940 は、実際にとっている割合 0.300 より大きい。マアジで起きた「食べられる前から毎年減る」という崩れ方はしない。</a:t>
+            </a:r>
+          </a:p>
+          <a:p>
+            <a:pPr algn="l">
+              <a:lnSpc>
+                <a:spcPct val="132000"/>
+              </a:lnSpc>
+              <a:spcAft>
+                <a:spcPts val="900"/>
+              </a:spcAft>
+            </a:pPr>
+            <a:r>
+              <a:rPr sz="1700" b="1">
+                <a:solidFill>
+                  <a:srgbClr val="C0561A"/>
+                </a:solidFill>
+                <a:latin typeface="Meiryo"/>
+                <a:ea typeface="Meiryo"/>
+                <a:cs typeface="Meiryo"/>
+              </a:rPr>
+              <a:t>それでも、借りた値は合っていない</a:t>
+            </a:r>
+          </a:p>
+          <a:p>
+            <a:pPr algn="l">
+              <a:lnSpc>
+                <a:spcPct val="132000"/>
+              </a:lnSpc>
+              <a:spcAft>
+                <a:spcPts val="900"/>
+              </a:spcAft>
+            </a:pPr>
+            <a:r>
+              <a:rPr sz="1550" b="0">
+                <a:solidFill>
+                  <a:srgbClr val="222222"/>
+                </a:solidFill>
+                <a:latin typeface="Meiryo"/>
+                <a:ea typeface="Meiryo"/>
+                <a:cs typeface="Meiryo"/>
+              </a:rPr>
+              <a:t>多種の式が自分で選ぶ増える速さは 0.624（大蛇行なし）・3.00（大蛇行）で、借りた 0.940 とは時期ごとに食い違う。</a:t>
+            </a:r>
+          </a:p>
+          <a:p>
+            <a:pPr algn="l">
+              <a:lnSpc>
+                <a:spcPct val="132000"/>
+              </a:lnSpc>
+              <a:spcAft>
+                <a:spcPts val="900"/>
+              </a:spcAft>
+            </a:pPr>
+            <a:r>
+              <a:rPr sz="1550" b="0">
+                <a:solidFill>
+                  <a:srgbClr val="222222"/>
+                </a:solidFill>
+                <a:latin typeface="Meiryo"/>
+                <a:ea typeface="Meiryo"/>
+                <a:cs typeface="Meiryo"/>
+              </a:rPr>
+              <a:t>しかもその 0.940 は、1種ずつの解析が通常の条件では解けず、資源が高水準という例外の設定でしか出てこない値。</a:t>
+            </a:r>
+          </a:p>
+        </p:txBody>
+      </p:sp>
+      <p:sp>
+        <p:nvSpPr>
+          <p:cNvPr id="12" name="Rectangle 11"/>
+          <p:cNvSpPr/>
+          <p:nvPr/>
+        </p:nvSpPr>
+        <p:spPr>
+          <a:xfrm>
+            <a:off x="566928" y="5257800"/>
+            <a:ext cx="11057839" cy="566928"/>
+          </a:xfrm>
+          <a:prstGeom prst="rect">
+            <a:avLst/>
+          </a:prstGeom>
+          <a:solidFill>
+            <a:srgbClr val="FBF1E8"/>
+          </a:solidFill>
+          <a:ln w="15875">
+            <a:solidFill>
+              <a:srgbClr val="C0561A"/>
+            </a:solidFill>
+          </a:ln>
+          <a:effectLst/>
+        </p:spPr>
+        <p:style>
+          <a:lnRef idx="1">
+            <a:schemeClr val="accent1"/>
+          </a:lnRef>
+          <a:fillRef idx="3">
+            <a:schemeClr val="accent1"/>
+          </a:fillRef>
+          <a:effectRef idx="2">
+            <a:schemeClr val="accent1"/>
+          </a:effectRef>
+          <a:fontRef idx="minor">
+            <a:schemeClr val="lt1"/>
+          </a:fontRef>
+        </p:style>
+        <p:txBody>
+          <a:bodyPr rtlCol="0" anchor="ctr" wrap="square"/>
+          <a:lstStyle/>
+          <a:p>
+            <a:pPr algn="ctr"/>
+          </a:p>
+        </p:txBody>
+      </p:sp>
+      <p:sp>
+        <p:nvSpPr>
+          <p:cNvPr id="13" name="TextBox 12"/>
+          <p:cNvSpPr txBox="1"/>
+          <p:nvPr/>
+        </p:nvSpPr>
+        <p:spPr>
+          <a:xfrm>
+            <a:off x="768096" y="5385816"/>
+            <a:ext cx="10655503" cy="365760"/>
+          </a:xfrm>
+          <a:prstGeom prst="rect">
+            <a:avLst/>
+          </a:prstGeom>
+          <a:noFill/>
+        </p:spPr>
+        <p:txBody>
+          <a:bodyPr wrap="square" anchor="t" lIns="0" rIns="0" tIns="0" bIns="0">
+            <a:spAutoFit/>
+          </a:bodyPr>
+          <a:lstStyle/>
+          <a:p>
+            <a:pPr algn="l">
+              <a:lnSpc>
+                <a:spcPct val="132000"/>
+              </a:lnSpc>
+              <a:spcAft>
+                <a:spcPts val="600"/>
+              </a:spcAft>
+            </a:pPr>
+            <a:r>
+              <a:rPr sz="1700" b="1">
+                <a:solidFill>
+                  <a:srgbClr val="C0561A"/>
+                </a:solidFill>
+                <a:latin typeface="Meiryo"/>
+                <a:ea typeface="Meiryo"/>
+                <a:cs typeface="Meiryo"/>
+              </a:rPr>
+              <a:t>崩れ方は種で違うが、原因は同じ。1種ずつの解析の r は、そのままでは多種の式に入らない。</a:t>
+            </a:r>
+          </a:p>
+        </p:txBody>
+      </p:sp>
+      <p:sp>
+        <p:nvSpPr>
+          <p:cNvPr id="14" name="TextBox 13"/>
+          <p:cNvSpPr txBox="1"/>
+          <p:nvPr/>
+        </p:nvSpPr>
+        <p:spPr>
+          <a:xfrm>
+            <a:off x="566928" y="5989320"/>
+            <a:ext cx="10326319" cy="566928"/>
+          </a:xfrm>
+          <a:prstGeom prst="rect">
+            <a:avLst/>
+          </a:prstGeom>
+          <a:noFill/>
+        </p:spPr>
+        <p:txBody>
+          <a:bodyPr wrap="square" anchor="t" lIns="0" rIns="0" tIns="0" bIns="0">
+            <a:spAutoFit/>
+          </a:bodyPr>
+          <a:lstStyle/>
+          <a:p>
+            <a:pPr algn="l">
+              <a:lnSpc>
+                <a:spcPct val="132000"/>
+              </a:lnSpc>
+              <a:spcAft>
+                <a:spcPts val="600"/>
+              </a:spcAft>
+            </a:pPr>
+            <a:r>
+              <a:rPr sz="1400" b="0">
+                <a:solidFill>
+                  <a:srgbClr val="6E6E6E"/>
+                </a:solidFill>
+                <a:latin typeface="Meiryo"/>
+                <a:ea typeface="Meiryo"/>
+                <a:cs typeface="Meiryo"/>
+              </a:rPr>
+              <a:t>マアジは 借りた 0.228 ＜ とっている割合 0.431 で逆転が起きた（10枚目）。マイワシは逆転しない代わりに、借りる値そのものが例外の設定に頼っている。</a:t>
+            </a:r>
+          </a:p>
+        </p:txBody>
+      </p:sp>
+    </p:spTree>
+  </p:cSld>
+  <p:clrMapOvr>
+    <a:masterClrMapping/>
+  </p:clrMapOvr>
+</p:sld>
+</file>
+
+<file path=ppt/slides/slide28.xml><?xml version="1.0" encoding="utf-8"?>
+<p:sld xmlns:a="http://schemas.openxmlformats.org/drawingml/2006/main" xmlns:p="http://schemas.openxmlformats.org/presentationml/2006/main" xmlns:r="http://schemas.openxmlformats.org/officeDocument/2006/relationships">
+  <p:cSld>
+    <p:spTree>
+      <p:nvGrpSpPr>
+        <p:cNvPr id="1" name=""/>
+        <p:cNvGrpSpPr/>
+        <p:nvPr/>
+      </p:nvGrpSpPr>
+      <p:grpSpPr/>
+      <p:sp>
+        <p:nvSpPr>
+          <p:cNvPr id="2" name="TextBox 1"/>
+          <p:cNvSpPr txBox="1"/>
+          <p:nvPr/>
+        </p:nvSpPr>
+        <p:spPr>
+          <a:xfrm>
+            <a:off x="566928" y="329184"/>
+            <a:ext cx="11057839" cy="822960"/>
+          </a:xfrm>
+          <a:prstGeom prst="rect">
+            <a:avLst/>
+          </a:prstGeom>
+          <a:noFill/>
+        </p:spPr>
+        <p:txBody>
+          <a:bodyPr wrap="square" anchor="t" lIns="0" rIns="0" tIns="0" bIns="0">
+            <a:spAutoFit/>
+          </a:bodyPr>
+          <a:lstStyle/>
+          <a:p>
+            <a:pPr algn="l">
+              <a:lnSpc>
+                <a:spcPct val="115000"/>
+              </a:lnSpc>
+              <a:spcAft>
+                <a:spcPts val="600"/>
+              </a:spcAft>
+            </a:pPr>
+            <a:r>
+              <a:rPr sz="2600" b="1">
+                <a:solidFill>
+                  <a:srgbClr val="1F4E79"/>
+                </a:solidFill>
+                <a:latin typeface="Meiryo"/>
+                <a:ea typeface="Meiryo"/>
+                <a:cs typeface="Meiryo"/>
+              </a:rPr>
+              <a:t>［マイワシ版・13枚目］制約つきの最適でも、端に張り付く</a:t>
+            </a:r>
+          </a:p>
+        </p:txBody>
+      </p:sp>
+      <p:sp>
+        <p:nvSpPr>
+          <p:cNvPr id="3" name="TextBox 2"/>
+          <p:cNvSpPr txBox="1"/>
+          <p:nvPr/>
+        </p:nvSpPr>
+        <p:spPr>
+          <a:xfrm>
+            <a:off x="11048695" y="6291072"/>
+            <a:ext cx="640080" cy="274320"/>
+          </a:xfrm>
+          <a:prstGeom prst="rect">
+            <a:avLst/>
+          </a:prstGeom>
+          <a:noFill/>
+        </p:spPr>
+        <p:txBody>
+          <a:bodyPr wrap="none" lIns="0" rIns="0" tIns="0" bIns="0">
+            <a:spAutoFit/>
+          </a:bodyPr>
+          <a:lstStyle/>
+          <a:p>
+            <a:pPr algn="r"/>
+            <a:r>
+              <a:rPr sz="1100" b="0">
+                <a:solidFill>
+                  <a:srgbClr val="6E6E6E"/>
+                </a:solidFill>
+                <a:latin typeface="Meiryo"/>
+                <a:ea typeface="Meiryo"/>
+                <a:cs typeface="Meiryo"/>
+              </a:rPr>
+              <a:t>28</a:t>
+            </a:r>
+          </a:p>
+        </p:txBody>
+      </p:sp>
+      <p:pic>
+        <p:nvPicPr>
+          <p:cNvPr id="4" name="Picture 3" descr="09m_端に張り付く_マイワシ.png"/>
+          <p:cNvPicPr>
+            <a:picLocks noChangeAspect="1"/>
+          </p:cNvPicPr>
+          <p:nvPr/>
+        </p:nvPicPr>
+        <p:blipFill>
+          <a:blip r:embed="rId2"/>
+          <a:stretch>
+            <a:fillRect/>
+          </a:stretch>
+        </p:blipFill>
+        <p:spPr>
+          <a:xfrm>
+            <a:off x="566928" y="1325880"/>
+            <a:ext cx="6309360" cy="3017520"/>
+          </a:xfrm>
+          <a:prstGeom prst="rect">
+            <a:avLst/>
+          </a:prstGeom>
+        </p:spPr>
+      </p:pic>
+      <p:sp>
+        <p:nvSpPr>
+          <p:cNvPr id="5" name="figlabel"/>
+          <p:cNvSpPr txBox="1"/>
+          <p:nvPr/>
+        </p:nvSpPr>
+        <p:spPr>
+          <a:xfrm>
+            <a:off x="1755926" y="1494490"/>
+            <a:ext cx="744220" cy="199898"/>
+          </a:xfrm>
+          <a:prstGeom prst="rect">
+            <a:avLst/>
+          </a:prstGeom>
+          <a:noFill/>
+        </p:spPr>
+        <p:txBody>
+          <a:bodyPr wrap="none" anchor="ctr" lIns="0" rIns="0" tIns="0" bIns="0">
+            <a:spAutoFit/>
+          </a:bodyPr>
+          <a:lstStyle/>
+          <a:p>
+            <a:pPr algn="l">
+              <a:lnSpc>
+                <a:spcPct val="120000"/>
+              </a:lnSpc>
+              <a:spcAft>
+                <a:spcPts val="0"/>
+              </a:spcAft>
+            </a:pPr>
+            <a:r>
+              <a:rPr sz="1100" b="0">
+                <a:solidFill>
+                  <a:srgbClr val="222222"/>
+                </a:solidFill>
+                <a:latin typeface="Meiryo"/>
+                <a:ea typeface="Meiryo"/>
+                <a:cs typeface="Meiryo"/>
+              </a:rPr>
+              <a:t>大蛇行なし</a:t>
+            </a:r>
+          </a:p>
+        </p:txBody>
+      </p:sp>
+      <p:sp>
+        <p:nvSpPr>
+          <p:cNvPr id="6" name="figlabel"/>
+          <p:cNvSpPr txBox="1"/>
+          <p:nvPr/>
+        </p:nvSpPr>
+        <p:spPr>
+          <a:xfrm>
+            <a:off x="1755926" y="1716579"/>
+            <a:ext cx="464820" cy="199898"/>
+          </a:xfrm>
+          <a:prstGeom prst="rect">
+            <a:avLst/>
+          </a:prstGeom>
+          <a:noFill/>
+        </p:spPr>
+        <p:txBody>
+          <a:bodyPr wrap="none" anchor="ctr" lIns="0" rIns="0" tIns="0" bIns="0">
+            <a:spAutoFit/>
+          </a:bodyPr>
+          <a:lstStyle/>
+          <a:p>
+            <a:pPr algn="l">
+              <a:lnSpc>
+                <a:spcPct val="120000"/>
+              </a:lnSpc>
+              <a:spcAft>
+                <a:spcPts val="0"/>
+              </a:spcAft>
+            </a:pPr>
+            <a:r>
+              <a:rPr sz="1100" b="0">
+                <a:solidFill>
+                  <a:srgbClr val="222222"/>
+                </a:solidFill>
+                <a:latin typeface="Meiryo"/>
+                <a:ea typeface="Meiryo"/>
+                <a:cs typeface="Meiryo"/>
+              </a:rPr>
+              <a:t>大蛇行</a:t>
+            </a:r>
+          </a:p>
+        </p:txBody>
+      </p:sp>
+      <p:sp>
+        <p:nvSpPr>
+          <p:cNvPr id="7" name="figlabel"/>
+          <p:cNvSpPr txBox="1"/>
+          <p:nvPr/>
+        </p:nvSpPr>
+        <p:spPr>
+          <a:xfrm>
+            <a:off x="2955972" y="1936255"/>
+            <a:ext cx="688340" cy="199898"/>
+          </a:xfrm>
+          <a:prstGeom prst="rect">
+            <a:avLst/>
+          </a:prstGeom>
+          <a:noFill/>
+        </p:spPr>
+        <p:txBody>
+          <a:bodyPr wrap="none" anchor="ctr" lIns="0" rIns="0" tIns="0" bIns="0">
+            <a:spAutoFit/>
+          </a:bodyPr>
+          <a:lstStyle/>
+          <a:p>
+            <a:pPr algn="ctr">
+              <a:lnSpc>
+                <a:spcPct val="120000"/>
+              </a:lnSpc>
+              <a:spcAft>
+                <a:spcPts val="0"/>
+              </a:spcAft>
+            </a:pPr>
+            <a:r>
+              <a:rPr sz="1100" b="0">
+                <a:solidFill>
+                  <a:srgbClr val="6E6E6E"/>
+                </a:solidFill>
+                <a:latin typeface="Meiryo"/>
+                <a:ea typeface="Meiryo"/>
+                <a:cs typeface="Meiryo"/>
+              </a:rPr>
+              <a:t>上限 0.95</a:t>
+            </a:r>
+          </a:p>
+        </p:txBody>
+      </p:sp>
+      <p:sp>
+        <p:nvSpPr>
+          <p:cNvPr id="8" name="figlabel"/>
+          <p:cNvSpPr txBox="1"/>
+          <p:nvPr/>
+        </p:nvSpPr>
+        <p:spPr>
+          <a:xfrm>
+            <a:off x="1640847" y="4008455"/>
+            <a:ext cx="655320" cy="216408"/>
+          </a:xfrm>
+          <a:prstGeom prst="rect">
+            <a:avLst/>
+          </a:prstGeom>
+          <a:noFill/>
+        </p:spPr>
+        <p:txBody>
+          <a:bodyPr wrap="none" anchor="ctr" lIns="0" rIns="0" tIns="0" bIns="0">
+            <a:spAutoFit/>
+          </a:bodyPr>
+          <a:lstStyle/>
+          <a:p>
+            <a:pPr algn="ctr">
+              <a:lnSpc>
+                <a:spcPct val="120000"/>
+              </a:lnSpc>
+              <a:spcAft>
+                <a:spcPts val="0"/>
+              </a:spcAft>
+            </a:pPr>
+            <a:r>
+              <a:rPr sz="1200" b="0">
+                <a:solidFill>
+                  <a:srgbClr val="222222"/>
+                </a:solidFill>
+                <a:latin typeface="Meiryo"/>
+                <a:ea typeface="Meiryo"/>
+                <a:cs typeface="Meiryo"/>
+              </a:rPr>
+              <a:t>マイワシ</a:t>
+            </a:r>
+          </a:p>
+        </p:txBody>
+      </p:sp>
+      <p:sp>
+        <p:nvSpPr>
+          <p:cNvPr id="9" name="figlabel"/>
+          <p:cNvSpPr txBox="1"/>
+          <p:nvPr/>
+        </p:nvSpPr>
+        <p:spPr>
+          <a:xfrm>
+            <a:off x="2825430" y="4008455"/>
+            <a:ext cx="960120" cy="216408"/>
+          </a:xfrm>
+          <a:prstGeom prst="rect">
+            <a:avLst/>
+          </a:prstGeom>
+          <a:noFill/>
+        </p:spPr>
+        <p:txBody>
+          <a:bodyPr wrap="none" anchor="ctr" lIns="0" rIns="0" tIns="0" bIns="0">
+            <a:spAutoFit/>
+          </a:bodyPr>
+          <a:lstStyle/>
+          <a:p>
+            <a:pPr algn="ctr">
+              <a:lnSpc>
+                <a:spcPct val="120000"/>
+              </a:lnSpc>
+              <a:spcAft>
+                <a:spcPts val="0"/>
+              </a:spcAft>
+            </a:pPr>
+            <a:r>
+              <a:rPr sz="1200" b="0">
+                <a:solidFill>
+                  <a:srgbClr val="222222"/>
+                </a:solidFill>
+                <a:latin typeface="Meiryo"/>
+                <a:ea typeface="Meiryo"/>
+                <a:cs typeface="Meiryo"/>
+              </a:rPr>
+              <a:t>ウルメイワシ</a:t>
+            </a:r>
+          </a:p>
+        </p:txBody>
+      </p:sp>
+      <p:sp>
+        <p:nvSpPr>
+          <p:cNvPr id="10" name="figlabel"/>
+          <p:cNvSpPr txBox="1"/>
+          <p:nvPr/>
+        </p:nvSpPr>
+        <p:spPr>
+          <a:xfrm>
+            <a:off x="4467214" y="4008455"/>
+            <a:ext cx="350520" cy="216408"/>
+          </a:xfrm>
+          <a:prstGeom prst="rect">
+            <a:avLst/>
+          </a:prstGeom>
+          <a:noFill/>
+        </p:spPr>
+        <p:txBody>
+          <a:bodyPr wrap="none" anchor="ctr" lIns="0" rIns="0" tIns="0" bIns="0">
+            <a:spAutoFit/>
+          </a:bodyPr>
+          <a:lstStyle/>
+          <a:p>
+            <a:pPr algn="ctr">
+              <a:lnSpc>
+                <a:spcPct val="120000"/>
+              </a:lnSpc>
+              <a:spcAft>
+                <a:spcPts val="0"/>
+              </a:spcAft>
+            </a:pPr>
+            <a:r>
+              <a:rPr sz="1200" b="0">
+                <a:solidFill>
+                  <a:srgbClr val="222222"/>
+                </a:solidFill>
+                <a:latin typeface="Meiryo"/>
+                <a:ea typeface="Meiryo"/>
+                <a:cs typeface="Meiryo"/>
+              </a:rPr>
+              <a:t>ブリ</a:t>
+            </a:r>
+          </a:p>
+        </p:txBody>
+      </p:sp>
+      <p:sp>
+        <p:nvSpPr>
+          <p:cNvPr id="11" name="figlabel"/>
+          <p:cNvSpPr txBox="1"/>
+          <p:nvPr/>
+        </p:nvSpPr>
+        <p:spPr>
+          <a:xfrm>
+            <a:off x="5727997" y="4008455"/>
+            <a:ext cx="502920" cy="216408"/>
+          </a:xfrm>
+          <a:prstGeom prst="rect">
+            <a:avLst/>
+          </a:prstGeom>
+          <a:noFill/>
+        </p:spPr>
+        <p:txBody>
+          <a:bodyPr wrap="none" anchor="ctr" lIns="0" rIns="0" tIns="0" bIns="0">
+            <a:spAutoFit/>
+          </a:bodyPr>
+          <a:lstStyle/>
+          <a:p>
+            <a:pPr algn="ctr">
+              <a:lnSpc>
+                <a:spcPct val="120000"/>
+              </a:lnSpc>
+              <a:spcAft>
+                <a:spcPts val="0"/>
+              </a:spcAft>
+            </a:pPr>
+            <a:r>
+              <a:rPr sz="1200" b="0">
+                <a:solidFill>
+                  <a:srgbClr val="222222"/>
+                </a:solidFill>
+                <a:latin typeface="Meiryo"/>
+                <a:ea typeface="Meiryo"/>
+                <a:cs typeface="Meiryo"/>
+              </a:rPr>
+              <a:t>サワラ</a:t>
+            </a:r>
+          </a:p>
+        </p:txBody>
+      </p:sp>
+      <p:sp>
+        <p:nvSpPr>
+          <p:cNvPr id="12" name="TextBox 11"/>
+          <p:cNvSpPr txBox="1"/>
+          <p:nvPr/>
+        </p:nvSpPr>
+        <p:spPr>
+          <a:xfrm>
+            <a:off x="7059168" y="1298448"/>
+            <a:ext cx="4553712" cy="3886200"/>
+          </a:xfrm>
+          <a:prstGeom prst="rect">
+            <a:avLst/>
+          </a:prstGeom>
+          <a:noFill/>
+        </p:spPr>
+        <p:txBody>
+          <a:bodyPr wrap="square" anchor="t" lIns="0" rIns="0" tIns="0" bIns="0">
+            <a:spAutoFit/>
+          </a:bodyPr>
+          <a:lstStyle/>
+          <a:p>
+            <a:pPr algn="l">
+              <a:lnSpc>
+                <a:spcPct val="132000"/>
+              </a:lnSpc>
+              <a:spcAft>
+                <a:spcPts val="800"/>
+              </a:spcAft>
+            </a:pPr>
+            <a:r>
+              <a:rPr sz="1700" b="1">
+                <a:solidFill>
+                  <a:srgbClr val="C0561A"/>
+                </a:solidFill>
+                <a:latin typeface="Meiryo"/>
+                <a:ea typeface="Meiryo"/>
+                <a:cs typeface="Meiryo"/>
+              </a:rPr>
+              <a:t>端に張り付く種が残る</a:t>
+            </a:r>
+          </a:p>
+          <a:p>
+            <a:pPr algn="l">
+              <a:lnSpc>
+                <a:spcPct val="132000"/>
+              </a:lnSpc>
+              <a:spcAft>
+                <a:spcPts val="800"/>
+              </a:spcAft>
+            </a:pPr>
+            <a:r>
+              <a:rPr sz="1500" b="0">
+                <a:solidFill>
+                  <a:srgbClr val="222222"/>
+                </a:solidFill>
+                <a:latin typeface="Meiryo"/>
+                <a:ea typeface="Meiryo"/>
+                <a:cs typeface="Meiryo"/>
+              </a:rPr>
+              <a:t>大蛇行なしではサワラが上限 0.95、大蛇行ではマイワシが上限 0.95。資源が減りすぎない条件をつけたうえでの最適が、これ。</a:t>
+            </a:r>
+          </a:p>
+          <a:p>
+            <a:pPr algn="l">
+              <a:lnSpc>
+                <a:spcPct val="132000"/>
+              </a:lnSpc>
+              <a:spcAft>
+                <a:spcPts val="800"/>
+              </a:spcAft>
+            </a:pPr>
+            <a:r>
+              <a:rPr sz="1700" b="1">
+                <a:solidFill>
+                  <a:srgbClr val="1F4E79"/>
+                </a:solidFill>
+                <a:latin typeface="Meiryo"/>
+                <a:ea typeface="Meiryo"/>
+                <a:cs typeface="Meiryo"/>
+              </a:rPr>
+              <a:t>制約つきでとれる量</a:t>
+            </a:r>
+          </a:p>
+          <a:p>
+            <a:pPr algn="l">
+              <a:lnSpc>
+                <a:spcPct val="132000"/>
+              </a:lnSpc>
+              <a:spcAft>
+                <a:spcPts val="800"/>
+              </a:spcAft>
+            </a:pPr>
+            <a:r>
+              <a:rPr sz="1500" b="0">
+                <a:solidFill>
+                  <a:srgbClr val="222222"/>
+                </a:solidFill>
+                <a:latin typeface="Meiryo"/>
+                <a:ea typeface="Meiryo"/>
+                <a:cs typeface="Meiryo"/>
+              </a:rPr>
+              <a:t>大蛇行なし 695.9 ／ 大蛇行 10986.3 千トン/年。大蛇行が1桁以上大きいのは、マイワシの資源量が桁違いで、その上限まで取る解が選ばれるため。</a:t>
+            </a:r>
+          </a:p>
+          <a:p>
+            <a:pPr algn="l">
+              <a:lnSpc>
+                <a:spcPct val="132000"/>
+              </a:lnSpc>
+              <a:spcAft>
+                <a:spcPts val="800"/>
+              </a:spcAft>
+            </a:pPr>
+            <a:r>
+              <a:rPr sz="1700" b="1">
+                <a:solidFill>
+                  <a:srgbClr val="1F4E79"/>
+                </a:solidFill>
+                <a:latin typeface="Meiryo"/>
+                <a:ea typeface="Meiryo"/>
+                <a:cs typeface="Meiryo"/>
+              </a:rPr>
+              <a:t>制約なしの上限感度も同じ</a:t>
+            </a:r>
+          </a:p>
+          <a:p>
+            <a:pPr algn="l">
+              <a:lnSpc>
+                <a:spcPct val="132000"/>
+              </a:lnSpc>
+              <a:spcAft>
+                <a:spcPts val="800"/>
+              </a:spcAft>
+            </a:pPr>
+            <a:r>
+              <a:rPr sz="1500" b="0">
+                <a:solidFill>
+                  <a:srgbClr val="222222"/>
+                </a:solidFill>
+                <a:latin typeface="Meiryo"/>
+                <a:ea typeface="Meiryo"/>
+                <a:cs typeface="Meiryo"/>
+              </a:rPr>
+              <a:t>探索の上限を 0.25 → 1.25 と上げると、大蛇行なしは 366 → 908、大蛇行は 1266 → 35573 千トンと上がり続ける。</a:t>
+            </a:r>
+          </a:p>
+        </p:txBody>
+      </p:sp>
+      <p:sp>
+        <p:nvSpPr>
+          <p:cNvPr id="13" name="Rectangle 12"/>
+          <p:cNvSpPr/>
+          <p:nvPr/>
+        </p:nvSpPr>
+        <p:spPr>
+          <a:xfrm>
+            <a:off x="566928" y="5257800"/>
+            <a:ext cx="11057839" cy="566928"/>
+          </a:xfrm>
+          <a:prstGeom prst="rect">
+            <a:avLst/>
+          </a:prstGeom>
+          <a:solidFill>
+            <a:srgbClr val="FBF1E8"/>
+          </a:solidFill>
+          <a:ln w="15875">
+            <a:solidFill>
+              <a:srgbClr val="C0561A"/>
+            </a:solidFill>
+          </a:ln>
+          <a:effectLst/>
+        </p:spPr>
+        <p:style>
+          <a:lnRef idx="1">
+            <a:schemeClr val="accent1"/>
+          </a:lnRef>
+          <a:fillRef idx="3">
+            <a:schemeClr val="accent1"/>
+          </a:fillRef>
+          <a:effectRef idx="2">
+            <a:schemeClr val="accent1"/>
+          </a:effectRef>
+          <a:fontRef idx="minor">
+            <a:schemeClr val="lt1"/>
+          </a:fontRef>
+        </p:style>
+        <p:txBody>
+          <a:bodyPr rtlCol="0" anchor="ctr" wrap="square"/>
+          <a:lstStyle/>
+          <a:p>
+            <a:pPr algn="ctr"/>
+          </a:p>
+        </p:txBody>
+      </p:sp>
+      <p:sp>
+        <p:nvSpPr>
+          <p:cNvPr id="14" name="TextBox 13"/>
+          <p:cNvSpPr txBox="1"/>
+          <p:nvPr/>
+        </p:nvSpPr>
+        <p:spPr>
+          <a:xfrm>
+            <a:off x="768096" y="5385816"/>
+            <a:ext cx="10655503" cy="365760"/>
+          </a:xfrm>
+          <a:prstGeom prst="rect">
+            <a:avLst/>
+          </a:prstGeom>
+          <a:noFill/>
+        </p:spPr>
+        <p:txBody>
+          <a:bodyPr wrap="square" anchor="t" lIns="0" rIns="0" tIns="0" bIns="0">
+            <a:spAutoFit/>
+          </a:bodyPr>
+          <a:lstStyle/>
+          <a:p>
+            <a:pPr algn="l">
+              <a:lnSpc>
+                <a:spcPct val="132000"/>
+              </a:lnSpc>
+              <a:spcAft>
+                <a:spcPts val="600"/>
+              </a:spcAft>
+            </a:pPr>
+            <a:r>
+              <a:rPr sz="1700" b="1">
+                <a:solidFill>
+                  <a:srgbClr val="C0561A"/>
+                </a:solidFill>
+                <a:latin typeface="Meiryo"/>
+                <a:ea typeface="Meiryo"/>
+                <a:cs typeface="Meiryo"/>
+              </a:rPr>
+              <a:t>餌の魚を替えても、最大は範囲の内側になく、探索の上限が答えを決めている。</a:t>
+            </a:r>
+          </a:p>
+        </p:txBody>
+      </p:sp>
+      <p:sp>
+        <p:nvSpPr>
+          <p:cNvPr id="15" name="TextBox 14"/>
+          <p:cNvSpPr txBox="1"/>
+          <p:nvPr/>
+        </p:nvSpPr>
+        <p:spPr>
+          <a:xfrm>
+            <a:off x="566928" y="5989320"/>
+            <a:ext cx="10326319" cy="566928"/>
+          </a:xfrm>
+          <a:prstGeom prst="rect">
+            <a:avLst/>
+          </a:prstGeom>
+          <a:noFill/>
+        </p:spPr>
+        <p:txBody>
+          <a:bodyPr wrap="square" anchor="t" lIns="0" rIns="0" tIns="0" bIns="0">
+            <a:spAutoFit/>
+          </a:bodyPr>
+          <a:lstStyle/>
+          <a:p>
+            <a:pPr algn="l">
+              <a:lnSpc>
+                <a:spcPct val="132000"/>
+              </a:lnSpc>
+              <a:spcAft>
+                <a:spcPts val="600"/>
+              </a:spcAft>
+            </a:pPr>
+            <a:r>
+              <a:rPr sz="1400" b="0">
+                <a:solidFill>
+                  <a:srgbClr val="6E6E6E"/>
+                </a:solidFill>
+                <a:latin typeface="Meiryo"/>
+                <a:ea typeface="Meiryo"/>
+                <a:cs typeface="Meiryo"/>
+              </a:rPr>
+              <a:t>縦軸は最適とされた漁獲率（制約つき）。刻み0.05の格子・持続可能制約つき（最終年の資源量が初年の9割以上）、12個の自由推定。マアジ版の同じ図は13枚目（制約MSY 527.7／254.9 千トン/年）。</a:t>
+            </a:r>
+          </a:p>
+        </p:txBody>
+      </p:sp>
+    </p:spTree>
+  </p:cSld>
+  <p:clrMapOvr>
+    <a:masterClrMapping/>
+  </p:clrMapOvr>
+</p:sld>
+</file>
+
+<file path=ppt/slides/slide29.xml><?xml version="1.0" encoding="utf-8"?>
+<p:sld xmlns:a="http://schemas.openxmlformats.org/drawingml/2006/main" xmlns:p="http://schemas.openxmlformats.org/presentationml/2006/main" xmlns:r="http://schemas.openxmlformats.org/officeDocument/2006/relationships">
+  <p:cSld>
+    <p:spTree>
+      <p:nvGrpSpPr>
+        <p:cNvPr id="1" name=""/>
+        <p:cNvGrpSpPr/>
+        <p:nvPr/>
+      </p:nvGrpSpPr>
+      <p:grpSpPr/>
+      <p:sp>
+        <p:nvSpPr>
+          <p:cNvPr id="2" name="TextBox 1"/>
+          <p:cNvSpPr txBox="1"/>
+          <p:nvPr/>
+        </p:nvSpPr>
+        <p:spPr>
+          <a:xfrm>
+            <a:off x="566928" y="329184"/>
+            <a:ext cx="11057839" cy="822960"/>
+          </a:xfrm>
+          <a:prstGeom prst="rect">
+            <a:avLst/>
+          </a:prstGeom>
+          <a:noFill/>
+        </p:spPr>
+        <p:txBody>
+          <a:bodyPr wrap="square" anchor="t" lIns="0" rIns="0" tIns="0" bIns="0">
+            <a:spAutoFit/>
+          </a:bodyPr>
+          <a:lstStyle/>
+          <a:p>
+            <a:pPr algn="l">
+              <a:lnSpc>
+                <a:spcPct val="115000"/>
+              </a:lnSpc>
+              <a:spcAft>
+                <a:spcPts val="600"/>
+              </a:spcAft>
+            </a:pPr>
+            <a:r>
+              <a:rPr sz="2600" b="1">
+                <a:solidFill>
+                  <a:srgbClr val="1F4E79"/>
+                </a:solidFill>
+                <a:latin typeface="Meiryo"/>
+                <a:ea typeface="Meiryo"/>
+                <a:cs typeface="Meiryo"/>
+              </a:rPr>
+              <a:t>［マイワシ版・参考］3つの版で推定された係数</a:t>
+            </a:r>
+          </a:p>
+        </p:txBody>
+      </p:sp>
+      <p:sp>
+        <p:nvSpPr>
+          <p:cNvPr id="3" name="TextBox 2"/>
+          <p:cNvSpPr txBox="1"/>
+          <p:nvPr/>
+        </p:nvSpPr>
+        <p:spPr>
+          <a:xfrm>
+            <a:off x="11048695" y="6291072"/>
+            <a:ext cx="640080" cy="274320"/>
+          </a:xfrm>
+          <a:prstGeom prst="rect">
+            <a:avLst/>
+          </a:prstGeom>
+          <a:noFill/>
+        </p:spPr>
+        <p:txBody>
+          <a:bodyPr wrap="none" lIns="0" rIns="0" tIns="0" bIns="0">
+            <a:spAutoFit/>
+          </a:bodyPr>
+          <a:lstStyle/>
+          <a:p>
+            <a:pPr algn="r"/>
+            <a:r>
+              <a:rPr sz="1100" b="0">
+                <a:solidFill>
+                  <a:srgbClr val="6E6E6E"/>
+                </a:solidFill>
+                <a:latin typeface="Meiryo"/>
+                <a:ea typeface="Meiryo"/>
+                <a:cs typeface="Meiryo"/>
+              </a:rPr>
+              <a:t>29</a:t>
+            </a:r>
+          </a:p>
+        </p:txBody>
+      </p:sp>
+      <p:sp>
+        <p:nvSpPr>
+          <p:cNvPr id="4" name="TextBox 3"/>
+          <p:cNvSpPr txBox="1"/>
+          <p:nvPr/>
+        </p:nvSpPr>
+        <p:spPr>
+          <a:xfrm>
+            <a:off x="566928" y="1170432"/>
+            <a:ext cx="11057839" cy="475488"/>
+          </a:xfrm>
+          <a:prstGeom prst="rect">
+            <a:avLst/>
+          </a:prstGeom>
+          <a:noFill/>
+        </p:spPr>
+        <p:txBody>
+          <a:bodyPr wrap="square" anchor="t" lIns="0" rIns="0" tIns="0" bIns="0">
+            <a:spAutoFit/>
+          </a:bodyPr>
+          <a:lstStyle/>
+          <a:p>
+            <a:pPr algn="l">
+              <a:lnSpc>
+                <a:spcPct val="132000"/>
+              </a:lnSpc>
+              <a:spcAft>
+                <a:spcPts val="200"/>
+              </a:spcAft>
+            </a:pPr>
+            <a:r>
+              <a:rPr sz="1200" b="0">
+                <a:solidFill>
+                  <a:srgbClr val="6E6E6E"/>
+                </a:solidFill>
+                <a:latin typeface="Meiryo"/>
+                <a:ea typeface="Meiryo"/>
+                <a:cs typeface="Meiryo"/>
+              </a:rPr>
+              <a:t>値は平均を1にそろえた空間のもの（9枚目の λ と同じ定義）。10個＝餌2種の「増える速さ」を固定、8個＝さらに「変換の割合の和」も固定。</a:t>
+            </a:r>
+          </a:p>
+          <a:p>
+            <a:pPr algn="l">
+              <a:lnSpc>
+                <a:spcPct val="132000"/>
+              </a:lnSpc>
+              <a:spcAft>
+                <a:spcPts val="200"/>
+              </a:spcAft>
+            </a:pPr>
+            <a:r>
+              <a:rPr sz="1200" b="0">
+                <a:solidFill>
+                  <a:srgbClr val="6E6E6E"/>
+                </a:solidFill>
+                <a:latin typeface="Meiryo"/>
+                <a:ea typeface="Meiryo"/>
+                <a:cs typeface="Meiryo"/>
+              </a:rPr>
+              <a:t>灰色＝借りて固定した値（8個は元の単位で c₁+d₁=0.395、c₂+d₂=0.26 も固定）。橙＝しわ寄せで極端になった値。≈0 は 0.001 未満。</a:t>
+            </a:r>
+          </a:p>
+        </p:txBody>
+      </p:sp>
+      <p:sp>
+        <p:nvSpPr>
+          <p:cNvPr id="5" name="TextBox 4"/>
+          <p:cNvSpPr txBox="1"/>
+          <p:nvPr/>
+        </p:nvSpPr>
+        <p:spPr>
+          <a:xfrm>
+            <a:off x="3721608" y="1645920"/>
+            <a:ext cx="3950208" cy="256032"/>
+          </a:xfrm>
+          <a:prstGeom prst="rect">
+            <a:avLst/>
+          </a:prstGeom>
+          <a:noFill/>
+        </p:spPr>
+        <p:txBody>
+          <a:bodyPr wrap="square" anchor="t" lIns="0" rIns="0" tIns="0" bIns="0">
+            <a:spAutoFit/>
+          </a:bodyPr>
+          <a:lstStyle/>
+          <a:p>
+            <a:pPr algn="ctr">
+              <a:lnSpc>
+                <a:spcPct val="132000"/>
+              </a:lnSpc>
+              <a:spcAft>
+                <a:spcPts val="600"/>
+              </a:spcAft>
+            </a:pPr>
+            <a:r>
+              <a:rPr sz="1400" b="1">
+                <a:solidFill>
+                  <a:srgbClr val="1F4E79"/>
+                </a:solidFill>
+                <a:latin typeface="Meiryo"/>
+                <a:ea typeface="Meiryo"/>
+                <a:cs typeface="Meiryo"/>
+              </a:rPr>
+              <a:t>大蛇行なし（2006〜2016年）</a:t>
+            </a:r>
+          </a:p>
+        </p:txBody>
+      </p:sp>
+      <p:sp>
+        <p:nvSpPr>
+          <p:cNvPr id="6" name="TextBox 5"/>
+          <p:cNvSpPr txBox="1"/>
+          <p:nvPr/>
+        </p:nvSpPr>
+        <p:spPr>
+          <a:xfrm>
+            <a:off x="7671816" y="1645920"/>
+            <a:ext cx="3950208" cy="256032"/>
+          </a:xfrm>
+          <a:prstGeom prst="rect">
+            <a:avLst/>
+          </a:prstGeom>
+          <a:noFill/>
+        </p:spPr>
+        <p:txBody>
+          <a:bodyPr wrap="square" anchor="t" lIns="0" rIns="0" tIns="0" bIns="0">
+            <a:spAutoFit/>
+          </a:bodyPr>
+          <a:lstStyle/>
+          <a:p>
+            <a:pPr algn="ctr">
+              <a:lnSpc>
+                <a:spcPct val="132000"/>
+              </a:lnSpc>
+              <a:spcAft>
+                <a:spcPts val="600"/>
+              </a:spcAft>
+            </a:pPr>
+            <a:r>
+              <a:rPr sz="1400" b="1">
+                <a:solidFill>
+                  <a:srgbClr val="C0561A"/>
+                </a:solidFill>
+                <a:latin typeface="Meiryo"/>
+                <a:ea typeface="Meiryo"/>
+                <a:cs typeface="Meiryo"/>
+              </a:rPr>
+              <a:t>大蛇行（2017〜2024年）</a:t>
+            </a:r>
+          </a:p>
+        </p:txBody>
+      </p:sp>
+      <p:graphicFrame>
+        <p:nvGraphicFramePr>
+          <p:cNvPr id="7" name="Table 6"/>
+          <p:cNvGraphicFramePr>
+            <a:graphicFrameLocks noGrp="1"/>
+          </p:cNvGraphicFramePr>
+          <p:nvPr/>
+        </p:nvGraphicFramePr>
+        <p:xfrm>
+          <a:off x="566928" y="1920240"/>
+          <a:ext cx="11055096" cy="3895344"/>
+        </p:xfrm>
+        <a:graphic>
+          <a:graphicData uri="http://schemas.openxmlformats.org/drawingml/2006/table">
+            <a:tbl>
+              <a:tblPr firstRow="1">
+                <a:tableStyleId>{5C22544A-7EE6-4342-B048-85BDC9FD1C3A}</a:tableStyleId>
+              </a:tblPr>
+              <a:tblGrid>
+                <a:gridCol w="3154680"/>
+                <a:gridCol w="1316736"/>
+                <a:gridCol w="1316736"/>
+                <a:gridCol w="1316736"/>
+                <a:gridCol w="1316736"/>
+                <a:gridCol w="1316736"/>
+                <a:gridCol w="1316736"/>
+              </a:tblGrid>
+              <a:tr h="329184">
+                <a:tc>
+                  <a:txBody>
+                    <a:bodyPr/>
+                    <a:lstStyle/>
+                    <a:p>
+                      <a:pPr algn="l"/>
+                      <a:r>
+                        <a:rPr sz="1200" b="1">
+                          <a:solidFill>
+                            <a:srgbClr val="FFFFFF"/>
+                          </a:solidFill>
+                          <a:latin typeface="Meiryo"/>
+                          <a:ea typeface="Meiryo"/>
+                          <a:cs typeface="Meiryo"/>
+                        </a:rPr>
+                        <a:t>係数</a:t>
+                      </a:r>
+                    </a:p>
+                  </a:txBody>
+                  <a:tcPr marL="91440" marR="73152" marT="27432" marB="27432" anchor="ctr">
+                    <a:solidFill>
+                      <a:srgbClr val="1F4E79"/>
+                    </a:solidFill>
+                  </a:tcPr>
+                </a:tc>
+                <a:tc>
+                  <a:txBody>
+                    <a:bodyPr/>
+                    <a:lstStyle/>
+                    <a:p>
+                      <a:pPr algn="l"/>
+                      <a:r>
+                        <a:rPr sz="1200" b="1">
+                          <a:solidFill>
+                            <a:srgbClr val="FFFFFF"/>
+                          </a:solidFill>
+                          <a:latin typeface="Meiryo"/>
+                          <a:ea typeface="Meiryo"/>
+                          <a:cs typeface="Meiryo"/>
+                        </a:rPr>
+                        <a:t>12個（自由）</a:t>
+                      </a:r>
+                    </a:p>
+                  </a:txBody>
+                  <a:tcPr marL="91440" marR="73152" marT="27432" marB="27432" anchor="ctr">
+                    <a:solidFill>
+                      <a:srgbClr val="1F4E79"/>
+                    </a:solidFill>
+                  </a:tcPr>
+                </a:tc>
+                <a:tc>
+                  <a:txBody>
+                    <a:bodyPr/>
+                    <a:lstStyle/>
+                    <a:p>
+                      <a:pPr algn="l"/>
+                      <a:r>
+                        <a:rPr sz="1200" b="1">
+                          <a:solidFill>
+                            <a:srgbClr val="FFFFFF"/>
+                          </a:solidFill>
+                          <a:latin typeface="Meiryo"/>
+                          <a:ea typeface="Meiryo"/>
+                          <a:cs typeface="Meiryo"/>
+                        </a:rPr>
+                        <a:t>10個</a:t>
+                      </a:r>
+                    </a:p>
+                  </a:txBody>
+                  <a:tcPr marL="91440" marR="73152" marT="27432" marB="27432" anchor="ctr">
+                    <a:solidFill>
+                      <a:srgbClr val="1F4E79"/>
+                    </a:solidFill>
+                  </a:tcPr>
+                </a:tc>
+                <a:tc>
+                  <a:txBody>
+                    <a:bodyPr/>
+                    <a:lstStyle/>
+                    <a:p>
+                      <a:pPr algn="l"/>
+                      <a:r>
+                        <a:rPr sz="1200" b="1">
+                          <a:solidFill>
+                            <a:srgbClr val="FFFFFF"/>
+                          </a:solidFill>
+                          <a:latin typeface="Meiryo"/>
+                          <a:ea typeface="Meiryo"/>
+                          <a:cs typeface="Meiryo"/>
+                        </a:rPr>
+                        <a:t>8個</a:t>
+                      </a:r>
+                    </a:p>
+                  </a:txBody>
+                  <a:tcPr marL="91440" marR="73152" marT="27432" marB="27432" anchor="ctr">
+                    <a:solidFill>
+                      <a:srgbClr val="1F4E79"/>
+                    </a:solidFill>
+                  </a:tcPr>
+                </a:tc>
+                <a:tc>
+                  <a:txBody>
+                    <a:bodyPr/>
+                    <a:lstStyle/>
+                    <a:p>
+                      <a:pPr algn="l"/>
+                      <a:r>
+                        <a:rPr sz="1200" b="1">
+                          <a:solidFill>
+                            <a:srgbClr val="FFFFFF"/>
+                          </a:solidFill>
+                          <a:latin typeface="Meiryo"/>
+                          <a:ea typeface="Meiryo"/>
+                          <a:cs typeface="Meiryo"/>
+                        </a:rPr>
+                        <a:t>12個（自由）</a:t>
+                      </a:r>
+                    </a:p>
+                  </a:txBody>
+                  <a:tcPr marL="91440" marR="73152" marT="27432" marB="27432" anchor="ctr">
+                    <a:solidFill>
+                      <a:srgbClr val="1F4E79"/>
+                    </a:solidFill>
+                  </a:tcPr>
+                </a:tc>
+                <a:tc>
+                  <a:txBody>
+                    <a:bodyPr/>
+                    <a:lstStyle/>
+                    <a:p>
+                      <a:pPr algn="l"/>
+                      <a:r>
+                        <a:rPr sz="1200" b="1">
+                          <a:solidFill>
+                            <a:srgbClr val="FFFFFF"/>
+                          </a:solidFill>
+                          <a:latin typeface="Meiryo"/>
+                          <a:ea typeface="Meiryo"/>
+                          <a:cs typeface="Meiryo"/>
+                        </a:rPr>
+                        <a:t>10個</a:t>
+                      </a:r>
+                    </a:p>
+                  </a:txBody>
+                  <a:tcPr marL="91440" marR="73152" marT="27432" marB="27432" anchor="ctr">
+                    <a:solidFill>
+                      <a:srgbClr val="1F4E79"/>
+                    </a:solidFill>
+                  </a:tcPr>
+                </a:tc>
+                <a:tc>
+                  <a:txBody>
+                    <a:bodyPr/>
+                    <a:lstStyle/>
+                    <a:p>
+                      <a:pPr algn="l"/>
+                      <a:r>
+                        <a:rPr sz="1200" b="1">
+                          <a:solidFill>
+                            <a:srgbClr val="FFFFFF"/>
+                          </a:solidFill>
+                          <a:latin typeface="Meiryo"/>
+                          <a:ea typeface="Meiryo"/>
+                          <a:cs typeface="Meiryo"/>
+                        </a:rPr>
+                        <a:t>8個</a:t>
+                      </a:r>
+                    </a:p>
+                  </a:txBody>
+                  <a:tcPr marL="91440" marR="73152" marT="27432" marB="27432" anchor="ctr">
+                    <a:solidFill>
+                      <a:srgbClr val="1F4E79"/>
+                    </a:solidFill>
+                  </a:tcPr>
+                </a:tc>
+              </a:tr>
+              <a:tr h="274320">
+                <a:tc>
+                  <a:txBody>
+                    <a:bodyPr/>
+                    <a:lstStyle/>
+                    <a:p>
+                      <a:pPr algn="l"/>
+                      <a:r>
+                        <a:rPr sz="1200" b="0">
+                          <a:solidFill>
+                            <a:srgbClr val="222222"/>
+                          </a:solidFill>
+                          <a:latin typeface="Meiryo"/>
+                          <a:ea typeface="Meiryo"/>
+                          <a:cs typeface="Meiryo"/>
+                        </a:rPr>
+                        <a:t>r_x1　マイワシが増える速さ</a:t>
+                      </a:r>
+                    </a:p>
+                  </a:txBody>
+                  <a:tcPr marL="91440" marR="73152" marT="27432" marB="27432" anchor="ctr">
+                    <a:solidFill>
+                      <a:srgbClr val="FFFFFF"/>
+                    </a:solidFill>
+                  </a:tcPr>
+                </a:tc>
+                <a:tc>
+                  <a:txBody>
+                    <a:bodyPr/>
+                    <a:lstStyle/>
+                    <a:p>
+                      <a:pPr algn="l"/>
+                      <a:r>
+                        <a:rPr sz="1200" b="0">
+                          <a:solidFill>
+                            <a:srgbClr val="222222"/>
+                          </a:solidFill>
+                          <a:latin typeface="Meiryo"/>
+                          <a:ea typeface="Meiryo"/>
+                          <a:cs typeface="Meiryo"/>
+                        </a:rPr>
+                        <a:t>0.624</a:t>
+                      </a:r>
+                    </a:p>
+                  </a:txBody>
+                  <a:tcPr marL="91440" marR="73152" marT="27432" marB="27432" anchor="ctr">
+                    <a:solidFill>
+                      <a:srgbClr val="FFFFFF"/>
+                    </a:solidFill>
+                  </a:tcPr>
+                </a:tc>
+                <a:tc>
+                  <a:txBody>
+                    <a:bodyPr/>
+                    <a:lstStyle/>
+                    <a:p>
+                      <a:pPr algn="l"/>
+                      <a:r>
+                        <a:rPr sz="1200" b="0">
+                          <a:solidFill>
+                            <a:srgbClr val="6E6E6E"/>
+                          </a:solidFill>
+                          <a:latin typeface="Meiryo"/>
+                          <a:ea typeface="Meiryo"/>
+                          <a:cs typeface="Meiryo"/>
+                        </a:rPr>
+                        <a:t>0.940</a:t>
+                      </a:r>
+                    </a:p>
+                  </a:txBody>
+                  <a:tcPr marL="91440" marR="73152" marT="27432" marB="27432" anchor="ctr">
+                    <a:solidFill>
+                      <a:srgbClr val="FFFFFF"/>
+                    </a:solidFill>
+                  </a:tcPr>
+                </a:tc>
+                <a:tc>
+                  <a:txBody>
+                    <a:bodyPr/>
+                    <a:lstStyle/>
+                    <a:p>
+                      <a:pPr algn="l"/>
+                      <a:r>
+                        <a:rPr sz="1200" b="0">
+                          <a:solidFill>
+                            <a:srgbClr val="6E6E6E"/>
+                          </a:solidFill>
+                          <a:latin typeface="Meiryo"/>
+                          <a:ea typeface="Meiryo"/>
+                          <a:cs typeface="Meiryo"/>
+                        </a:rPr>
+                        <a:t>0.940</a:t>
+                      </a:r>
+                    </a:p>
+                  </a:txBody>
+                  <a:tcPr marL="91440" marR="73152" marT="27432" marB="27432" anchor="ctr">
+                    <a:solidFill>
+                      <a:srgbClr val="FFFFFF"/>
+                    </a:solidFill>
+                  </a:tcPr>
+                </a:tc>
+                <a:tc>
+                  <a:txBody>
+                    <a:bodyPr/>
+                    <a:lstStyle/>
+                    <a:p>
+                      <a:pPr algn="l"/>
+                      <a:r>
+                        <a:rPr sz="1200" b="0">
+                          <a:solidFill>
+                            <a:srgbClr val="222222"/>
+                          </a:solidFill>
+                          <a:latin typeface="Meiryo"/>
+                          <a:ea typeface="Meiryo"/>
+                          <a:cs typeface="Meiryo"/>
+                        </a:rPr>
+                        <a:t>3.004</a:t>
+                      </a:r>
+                    </a:p>
+                  </a:txBody>
+                  <a:tcPr marL="91440" marR="73152" marT="27432" marB="27432" anchor="ctr">
+                    <a:solidFill>
+                      <a:srgbClr val="FFFFFF"/>
+                    </a:solidFill>
+                  </a:tcPr>
+                </a:tc>
+                <a:tc>
+                  <a:txBody>
+                    <a:bodyPr/>
+                    <a:lstStyle/>
+                    <a:p>
+                      <a:pPr algn="l"/>
+                      <a:r>
+                        <a:rPr sz="1200" b="0">
+                          <a:solidFill>
+                            <a:srgbClr val="6E6E6E"/>
+                          </a:solidFill>
+                          <a:latin typeface="Meiryo"/>
+                          <a:ea typeface="Meiryo"/>
+                          <a:cs typeface="Meiryo"/>
+                        </a:rPr>
+                        <a:t>0.940</a:t>
+                      </a:r>
+                    </a:p>
+                  </a:txBody>
+                  <a:tcPr marL="91440" marR="73152" marT="27432" marB="27432" anchor="ctr">
+                    <a:solidFill>
+                      <a:srgbClr val="FFFFFF"/>
+                    </a:solidFill>
+                  </a:tcPr>
+                </a:tc>
+                <a:tc>
+                  <a:txBody>
+                    <a:bodyPr/>
+                    <a:lstStyle/>
+                    <a:p>
+                      <a:pPr algn="l"/>
+                      <a:r>
+                        <a:rPr sz="1200" b="0">
+                          <a:solidFill>
+                            <a:srgbClr val="6E6E6E"/>
+                          </a:solidFill>
+                          <a:latin typeface="Meiryo"/>
+                          <a:ea typeface="Meiryo"/>
+                          <a:cs typeface="Meiryo"/>
+                        </a:rPr>
+                        <a:t>0.940</a:t>
+                      </a:r>
+                    </a:p>
+                  </a:txBody>
+                  <a:tcPr marL="91440" marR="73152" marT="27432" marB="27432" anchor="ctr">
+                    <a:solidFill>
+                      <a:srgbClr val="FFFFFF"/>
+                    </a:solidFill>
+                  </a:tcPr>
+                </a:tc>
+              </a:tr>
+              <a:tr h="274320">
+                <a:tc>
+                  <a:txBody>
+                    <a:bodyPr/>
+                    <a:lstStyle/>
+                    <a:p>
+                      <a:pPr algn="l"/>
+                      <a:r>
+                        <a:rPr sz="1200" b="0">
+                          <a:solidFill>
+                            <a:srgbClr val="222222"/>
+                          </a:solidFill>
+                          <a:latin typeface="Meiryo"/>
+                          <a:ea typeface="Meiryo"/>
+                          <a:cs typeface="Meiryo"/>
+                        </a:rPr>
+                        <a:t>r_x2　ウルメが増える速さ</a:t>
+                      </a:r>
+                    </a:p>
+                  </a:txBody>
+                  <a:tcPr marL="91440" marR="73152" marT="27432" marB="27432" anchor="ctr">
+                    <a:solidFill>
+                      <a:srgbClr val="F2F5F9"/>
+                    </a:solidFill>
+                  </a:tcPr>
+                </a:tc>
+                <a:tc>
+                  <a:txBody>
+                    <a:bodyPr/>
+                    <a:lstStyle/>
+                    <a:p>
+                      <a:pPr algn="l"/>
+                      <a:r>
+                        <a:rPr sz="1200" b="0">
+                          <a:solidFill>
+                            <a:srgbClr val="222222"/>
+                          </a:solidFill>
+                          <a:latin typeface="Meiryo"/>
+                          <a:ea typeface="Meiryo"/>
+                          <a:cs typeface="Meiryo"/>
+                        </a:rPr>
+                        <a:t>0.472</a:t>
+                      </a:r>
+                    </a:p>
+                  </a:txBody>
+                  <a:tcPr marL="91440" marR="73152" marT="27432" marB="27432" anchor="ctr">
+                    <a:solidFill>
+                      <a:srgbClr val="F2F5F9"/>
+                    </a:solidFill>
+                  </a:tcPr>
+                </a:tc>
+                <a:tc>
+                  <a:txBody>
+                    <a:bodyPr/>
+                    <a:lstStyle/>
+                    <a:p>
+                      <a:pPr algn="l"/>
+                      <a:r>
+                        <a:rPr sz="1200" b="0">
+                          <a:solidFill>
+                            <a:srgbClr val="6E6E6E"/>
+                          </a:solidFill>
+                          <a:latin typeface="Meiryo"/>
+                          <a:ea typeface="Meiryo"/>
+                          <a:cs typeface="Meiryo"/>
+                        </a:rPr>
+                        <a:t>0.739</a:t>
+                      </a:r>
+                    </a:p>
+                  </a:txBody>
+                  <a:tcPr marL="91440" marR="73152" marT="27432" marB="27432" anchor="ctr">
+                    <a:solidFill>
+                      <a:srgbClr val="F2F5F9"/>
+                    </a:solidFill>
+                  </a:tcPr>
+                </a:tc>
+                <a:tc>
+                  <a:txBody>
+                    <a:bodyPr/>
+                    <a:lstStyle/>
+                    <a:p>
+                      <a:pPr algn="l"/>
+                      <a:r>
+                        <a:rPr sz="1200" b="0">
+                          <a:solidFill>
+                            <a:srgbClr val="6E6E6E"/>
+                          </a:solidFill>
+                          <a:latin typeface="Meiryo"/>
+                          <a:ea typeface="Meiryo"/>
+                          <a:cs typeface="Meiryo"/>
+                        </a:rPr>
+                        <a:t>0.739</a:t>
+                      </a:r>
+                    </a:p>
+                  </a:txBody>
+                  <a:tcPr marL="91440" marR="73152" marT="27432" marB="27432" anchor="ctr">
+                    <a:solidFill>
+                      <a:srgbClr val="F2F5F9"/>
+                    </a:solidFill>
+                  </a:tcPr>
+                </a:tc>
+                <a:tc>
+                  <a:txBody>
+                    <a:bodyPr/>
+                    <a:lstStyle/>
+                    <a:p>
+                      <a:pPr algn="l"/>
+                      <a:r>
+                        <a:rPr sz="1200" b="0">
+                          <a:solidFill>
+                            <a:srgbClr val="222222"/>
+                          </a:solidFill>
+                          <a:latin typeface="Meiryo"/>
+                          <a:ea typeface="Meiryo"/>
+                          <a:cs typeface="Meiryo"/>
+                        </a:rPr>
+                        <a:t>0.651</a:t>
+                      </a:r>
+                    </a:p>
+                  </a:txBody>
+                  <a:tcPr marL="91440" marR="73152" marT="27432" marB="27432" anchor="ctr">
+                    <a:solidFill>
+                      <a:srgbClr val="F2F5F9"/>
+                    </a:solidFill>
+                  </a:tcPr>
+                </a:tc>
+                <a:tc>
+                  <a:txBody>
+                    <a:bodyPr/>
+                    <a:lstStyle/>
+                    <a:p>
+                      <a:pPr algn="l"/>
+                      <a:r>
+                        <a:rPr sz="1200" b="0">
+                          <a:solidFill>
+                            <a:srgbClr val="6E6E6E"/>
+                          </a:solidFill>
+                          <a:latin typeface="Meiryo"/>
+                          <a:ea typeface="Meiryo"/>
+                          <a:cs typeface="Meiryo"/>
+                        </a:rPr>
+                        <a:t>0.739</a:t>
+                      </a:r>
+                    </a:p>
+                  </a:txBody>
+                  <a:tcPr marL="91440" marR="73152" marT="27432" marB="27432" anchor="ctr">
+                    <a:solidFill>
+                      <a:srgbClr val="F2F5F9"/>
+                    </a:solidFill>
+                  </a:tcPr>
+                </a:tc>
+                <a:tc>
+                  <a:txBody>
+                    <a:bodyPr/>
+                    <a:lstStyle/>
+                    <a:p>
+                      <a:pPr algn="l"/>
+                      <a:r>
+                        <a:rPr sz="1200" b="0">
+                          <a:solidFill>
+                            <a:srgbClr val="6E6E6E"/>
+                          </a:solidFill>
+                          <a:latin typeface="Meiryo"/>
+                          <a:ea typeface="Meiryo"/>
+                          <a:cs typeface="Meiryo"/>
+                        </a:rPr>
+                        <a:t>0.739</a:t>
+                      </a:r>
+                    </a:p>
+                  </a:txBody>
+                  <a:tcPr marL="91440" marR="73152" marT="27432" marB="27432" anchor="ctr">
+                    <a:solidFill>
+                      <a:srgbClr val="F2F5F9"/>
+                    </a:solidFill>
+                  </a:tcPr>
+                </a:tc>
+              </a:tr>
+              <a:tr h="274320">
+                <a:tc>
+                  <a:txBody>
+                    <a:bodyPr/>
+                    <a:lstStyle/>
+                    <a:p>
+                      <a:pPr algn="l"/>
+                      <a:r>
+                        <a:rPr sz="1200" b="0">
+                          <a:solidFill>
+                            <a:srgbClr val="222222"/>
+                          </a:solidFill>
+                          <a:latin typeface="Meiryo"/>
+                          <a:ea typeface="Meiryo"/>
+                          <a:cs typeface="Meiryo"/>
+                        </a:rPr>
+                        <a:t>r_y1　ブリが自然に減る速さ</a:t>
+                      </a:r>
+                    </a:p>
+                  </a:txBody>
+                  <a:tcPr marL="91440" marR="73152" marT="27432" marB="27432" anchor="ctr">
+                    <a:solidFill>
+                      <a:srgbClr val="FFFFFF"/>
+                    </a:solidFill>
+                  </a:tcPr>
+                </a:tc>
+                <a:tc>
+                  <a:txBody>
+                    <a:bodyPr/>
+                    <a:lstStyle/>
+                    <a:p>
+                      <a:pPr algn="l"/>
+                      <a:r>
+                        <a:rPr sz="1200" b="0">
+                          <a:solidFill>
+                            <a:srgbClr val="222222"/>
+                          </a:solidFill>
+                          <a:latin typeface="Meiryo"/>
+                          <a:ea typeface="Meiryo"/>
+                          <a:cs typeface="Meiryo"/>
+                        </a:rPr>
+                        <a:t>0.032</a:t>
+                      </a:r>
+                    </a:p>
+                  </a:txBody>
+                  <a:tcPr marL="91440" marR="73152" marT="27432" marB="27432" anchor="ctr">
+                    <a:solidFill>
+                      <a:srgbClr val="FFFFFF"/>
+                    </a:solidFill>
+                  </a:tcPr>
+                </a:tc>
+                <a:tc>
+                  <a:txBody>
+                    <a:bodyPr/>
+                    <a:lstStyle/>
+                    <a:p>
+                      <a:pPr algn="l"/>
+                      <a:r>
+                        <a:rPr sz="1200" b="0">
+                          <a:solidFill>
+                            <a:srgbClr val="222222"/>
+                          </a:solidFill>
+                          <a:latin typeface="Meiryo"/>
+                          <a:ea typeface="Meiryo"/>
+                          <a:cs typeface="Meiryo"/>
+                        </a:rPr>
+                        <a:t>0.030</a:t>
+                      </a:r>
+                    </a:p>
+                  </a:txBody>
+                  <a:tcPr marL="91440" marR="73152" marT="27432" marB="27432" anchor="ctr">
+                    <a:solidFill>
+                      <a:srgbClr val="FFFFFF"/>
+                    </a:solidFill>
+                  </a:tcPr>
+                </a:tc>
+                <a:tc>
+                  <a:txBody>
+                    <a:bodyPr/>
+                    <a:lstStyle/>
+                    <a:p>
+                      <a:pPr algn="l"/>
+                      <a:r>
+                        <a:rPr sz="1200" b="0">
+                          <a:solidFill>
+                            <a:srgbClr val="222222"/>
+                          </a:solidFill>
+                          <a:latin typeface="Meiryo"/>
+                          <a:ea typeface="Meiryo"/>
+                          <a:cs typeface="Meiryo"/>
+                        </a:rPr>
+                        <a:t>0.012</a:t>
+                      </a:r>
+                    </a:p>
+                  </a:txBody>
+                  <a:tcPr marL="91440" marR="73152" marT="27432" marB="27432" anchor="ctr">
+                    <a:solidFill>
+                      <a:srgbClr val="FFFFFF"/>
+                    </a:solidFill>
+                  </a:tcPr>
+                </a:tc>
+                <a:tc>
+                  <a:txBody>
+                    <a:bodyPr/>
+                    <a:lstStyle/>
+                    <a:p>
+                      <a:pPr algn="l"/>
+                      <a:r>
+                        <a:rPr sz="1200" b="0">
+                          <a:solidFill>
+                            <a:srgbClr val="222222"/>
+                          </a:solidFill>
+                          <a:latin typeface="Meiryo"/>
+                          <a:ea typeface="Meiryo"/>
+                          <a:cs typeface="Meiryo"/>
+                        </a:rPr>
+                        <a:t>0.094</a:t>
+                      </a:r>
+                    </a:p>
+                  </a:txBody>
+                  <a:tcPr marL="91440" marR="73152" marT="27432" marB="27432" anchor="ctr">
+                    <a:solidFill>
+                      <a:srgbClr val="FFFFFF"/>
+                    </a:solidFill>
+                  </a:tcPr>
+                </a:tc>
+                <a:tc>
+                  <a:txBody>
+                    <a:bodyPr/>
+                    <a:lstStyle/>
+                    <a:p>
+                      <a:pPr algn="l"/>
+                      <a:r>
+                        <a:rPr sz="1200" b="0">
+                          <a:solidFill>
+                            <a:srgbClr val="222222"/>
+                          </a:solidFill>
+                          <a:latin typeface="Meiryo"/>
+                          <a:ea typeface="Meiryo"/>
+                          <a:cs typeface="Meiryo"/>
+                        </a:rPr>
+                        <a:t>0.848</a:t>
+                      </a:r>
+                    </a:p>
+                  </a:txBody>
+                  <a:tcPr marL="91440" marR="73152" marT="27432" marB="27432" anchor="ctr">
+                    <a:solidFill>
+                      <a:srgbClr val="FFFFFF"/>
+                    </a:solidFill>
+                  </a:tcPr>
+                </a:tc>
+                <a:tc>
+                  <a:txBody>
+                    <a:bodyPr/>
+                    <a:lstStyle/>
+                    <a:p>
+                      <a:pPr algn="l"/>
+                      <a:r>
+                        <a:rPr sz="1200" b="0">
+                          <a:solidFill>
+                            <a:srgbClr val="222222"/>
+                          </a:solidFill>
+                          <a:latin typeface="Meiryo"/>
+                          <a:ea typeface="Meiryo"/>
+                          <a:cs typeface="Meiryo"/>
+                        </a:rPr>
+                        <a:t>0.011</a:t>
+                      </a:r>
+                    </a:p>
+                  </a:txBody>
+                  <a:tcPr marL="91440" marR="73152" marT="27432" marB="27432" anchor="ctr">
+                    <a:solidFill>
+                      <a:srgbClr val="FFFFFF"/>
+                    </a:solidFill>
+                  </a:tcPr>
+                </a:tc>
+              </a:tr>
+              <a:tr h="274320">
+                <a:tc>
+                  <a:txBody>
+                    <a:bodyPr/>
+                    <a:lstStyle/>
+                    <a:p>
+                      <a:pPr algn="l"/>
+                      <a:r>
+                        <a:rPr sz="1200" b="0">
+                          <a:solidFill>
+                            <a:srgbClr val="222222"/>
+                          </a:solidFill>
+                          <a:latin typeface="Meiryo"/>
+                          <a:ea typeface="Meiryo"/>
+                          <a:cs typeface="Meiryo"/>
+                        </a:rPr>
+                        <a:t>r_y2　サワラが自然に減る速さ</a:t>
+                      </a:r>
+                    </a:p>
+                  </a:txBody>
+                  <a:tcPr marL="91440" marR="73152" marT="27432" marB="27432" anchor="ctr">
+                    <a:solidFill>
+                      <a:srgbClr val="F2F5F9"/>
+                    </a:solidFill>
+                  </a:tcPr>
+                </a:tc>
+                <a:tc>
+                  <a:txBody>
+                    <a:bodyPr/>
+                    <a:lstStyle/>
+                    <a:p>
+                      <a:pPr algn="l"/>
+                      <a:r>
+                        <a:rPr sz="1200" b="0">
+                          <a:solidFill>
+                            <a:srgbClr val="222222"/>
+                          </a:solidFill>
+                          <a:latin typeface="Meiryo"/>
+                          <a:ea typeface="Meiryo"/>
+                          <a:cs typeface="Meiryo"/>
+                        </a:rPr>
+                        <a:t>0.011</a:t>
+                      </a:r>
+                    </a:p>
+                  </a:txBody>
+                  <a:tcPr marL="91440" marR="73152" marT="27432" marB="27432" anchor="ctr">
+                    <a:solidFill>
+                      <a:srgbClr val="F2F5F9"/>
+                    </a:solidFill>
+                  </a:tcPr>
+                </a:tc>
+                <a:tc>
+                  <a:txBody>
+                    <a:bodyPr/>
+                    <a:lstStyle/>
+                    <a:p>
+                      <a:pPr algn="l"/>
+                      <a:r>
+                        <a:rPr sz="1200" b="0">
+                          <a:solidFill>
+                            <a:srgbClr val="222222"/>
+                          </a:solidFill>
+                          <a:latin typeface="Meiryo"/>
+                          <a:ea typeface="Meiryo"/>
+                          <a:cs typeface="Meiryo"/>
+                        </a:rPr>
+                        <a:t>0.011</a:t>
+                      </a:r>
+                    </a:p>
+                  </a:txBody>
+                  <a:tcPr marL="91440" marR="73152" marT="27432" marB="27432" anchor="ctr">
+                    <a:solidFill>
+                      <a:srgbClr val="F2F5F9"/>
+                    </a:solidFill>
+                  </a:tcPr>
+                </a:tc>
+                <a:tc>
+                  <a:txBody>
+                    <a:bodyPr/>
+                    <a:lstStyle/>
+                    <a:p>
+                      <a:pPr algn="l"/>
+                      <a:r>
+                        <a:rPr sz="1200" b="0">
+                          <a:solidFill>
+                            <a:srgbClr val="222222"/>
+                          </a:solidFill>
+                          <a:latin typeface="Meiryo"/>
+                          <a:ea typeface="Meiryo"/>
+                          <a:cs typeface="Meiryo"/>
+                        </a:rPr>
+                        <a:t>0.010</a:t>
+                      </a:r>
+                    </a:p>
+                  </a:txBody>
+                  <a:tcPr marL="91440" marR="73152" marT="27432" marB="27432" anchor="ctr">
+                    <a:solidFill>
+                      <a:srgbClr val="F2F5F9"/>
+                    </a:solidFill>
+                  </a:tcPr>
+                </a:tc>
+                <a:tc>
+                  <a:txBody>
+                    <a:bodyPr/>
+                    <a:lstStyle/>
+                    <a:p>
+                      <a:pPr algn="l"/>
+                      <a:r>
+                        <a:rPr sz="1200" b="0">
+                          <a:solidFill>
+                            <a:srgbClr val="222222"/>
+                          </a:solidFill>
+                          <a:latin typeface="Meiryo"/>
+                          <a:ea typeface="Meiryo"/>
+                          <a:cs typeface="Meiryo"/>
+                        </a:rPr>
+                        <a:t>0.069</a:t>
+                      </a:r>
+                    </a:p>
+                  </a:txBody>
+                  <a:tcPr marL="91440" marR="73152" marT="27432" marB="27432" anchor="ctr">
+                    <a:solidFill>
+                      <a:srgbClr val="F2F5F9"/>
+                    </a:solidFill>
+                  </a:tcPr>
+                </a:tc>
+                <a:tc>
+                  <a:txBody>
+                    <a:bodyPr/>
+                    <a:lstStyle/>
+                    <a:p>
+                      <a:pPr algn="l"/>
+                      <a:r>
+                        <a:rPr sz="1200" b="0">
+                          <a:solidFill>
+                            <a:srgbClr val="222222"/>
+                          </a:solidFill>
+                          <a:latin typeface="Meiryo"/>
+                          <a:ea typeface="Meiryo"/>
+                          <a:cs typeface="Meiryo"/>
+                        </a:rPr>
+                        <a:t>0.063</a:t>
+                      </a:r>
+                    </a:p>
+                  </a:txBody>
+                  <a:tcPr marL="91440" marR="73152" marT="27432" marB="27432" anchor="ctr">
+                    <a:solidFill>
+                      <a:srgbClr val="F2F5F9"/>
+                    </a:solidFill>
+                  </a:tcPr>
+                </a:tc>
+                <a:tc>
+                  <a:txBody>
+                    <a:bodyPr/>
+                    <a:lstStyle/>
+                    <a:p>
+                      <a:pPr algn="l"/>
+                      <a:r>
+                        <a:rPr sz="1200" b="0">
+                          <a:solidFill>
+                            <a:srgbClr val="222222"/>
+                          </a:solidFill>
+                          <a:latin typeface="Meiryo"/>
+                          <a:ea typeface="Meiryo"/>
+                          <a:cs typeface="Meiryo"/>
+                        </a:rPr>
+                        <a:t>0.163</a:t>
+                      </a:r>
+                    </a:p>
+                  </a:txBody>
+                  <a:tcPr marL="91440" marR="73152" marT="27432" marB="27432" anchor="ctr">
+                    <a:solidFill>
+                      <a:srgbClr val="F2F5F9"/>
+                    </a:solidFill>
+                  </a:tcPr>
+                </a:tc>
+              </a:tr>
+              <a:tr h="274320">
+                <a:tc>
+                  <a:txBody>
+                    <a:bodyPr/>
+                    <a:lstStyle/>
+                    <a:p>
+                      <a:pPr algn="l"/>
+                      <a:r>
+                        <a:rPr sz="1200" b="0">
+                          <a:solidFill>
+                            <a:srgbClr val="222222"/>
+                          </a:solidFill>
+                          <a:latin typeface="Meiryo"/>
+                          <a:ea typeface="Meiryo"/>
+                          <a:cs typeface="Meiryo"/>
+                        </a:rPr>
+                        <a:t>λ11　食べられる強さ：マイワシ→ブリ</a:t>
+                      </a:r>
+                    </a:p>
+                  </a:txBody>
+                  <a:tcPr marL="91440" marR="73152" marT="27432" marB="27432" anchor="ctr">
+                    <a:solidFill>
+                      <a:srgbClr val="FFFFFF"/>
+                    </a:solidFill>
+                  </a:tcPr>
+                </a:tc>
+                <a:tc>
+                  <a:txBody>
+                    <a:bodyPr/>
+                    <a:lstStyle/>
+                    <a:p>
+                      <a:pPr algn="l"/>
+                      <a:r>
+                        <a:rPr sz="1200" b="0">
+                          <a:solidFill>
+                            <a:srgbClr val="222222"/>
+                          </a:solidFill>
+                          <a:latin typeface="Meiryo"/>
+                          <a:ea typeface="Meiryo"/>
+                          <a:cs typeface="Meiryo"/>
+                        </a:rPr>
+                        <a:t>0.035</a:t>
+                      </a:r>
+                    </a:p>
+                  </a:txBody>
+                  <a:tcPr marL="91440" marR="73152" marT="27432" marB="27432" anchor="ctr">
+                    <a:solidFill>
+                      <a:srgbClr val="FFFFFF"/>
+                    </a:solidFill>
+                  </a:tcPr>
+                </a:tc>
+                <a:tc>
+                  <a:txBody>
+                    <a:bodyPr/>
+                    <a:lstStyle/>
+                    <a:p>
+                      <a:pPr algn="l"/>
+                      <a:r>
+                        <a:rPr sz="1200" b="0">
+                          <a:solidFill>
+                            <a:srgbClr val="222222"/>
+                          </a:solidFill>
+                          <a:latin typeface="Meiryo"/>
+                          <a:ea typeface="Meiryo"/>
+                          <a:cs typeface="Meiryo"/>
+                        </a:rPr>
+                        <a:t>≈0</a:t>
+                      </a:r>
+                    </a:p>
+                  </a:txBody>
+                  <a:tcPr marL="91440" marR="73152" marT="27432" marB="27432" anchor="ctr">
+                    <a:solidFill>
+                      <a:srgbClr val="FFFFFF"/>
+                    </a:solidFill>
+                  </a:tcPr>
+                </a:tc>
+                <a:tc>
+                  <a:txBody>
+                    <a:bodyPr/>
+                    <a:lstStyle/>
+                    <a:p>
+                      <a:pPr algn="l"/>
+                      <a:r>
+                        <a:rPr sz="1200" b="0">
+                          <a:solidFill>
+                            <a:srgbClr val="222222"/>
+                          </a:solidFill>
+                          <a:latin typeface="Meiryo"/>
+                          <a:ea typeface="Meiryo"/>
+                          <a:cs typeface="Meiryo"/>
+                        </a:rPr>
+                        <a:t>0.692</a:t>
+                      </a:r>
+                    </a:p>
+                  </a:txBody>
+                  <a:tcPr marL="91440" marR="73152" marT="27432" marB="27432" anchor="ctr">
+                    <a:solidFill>
+                      <a:srgbClr val="FFFFFF"/>
+                    </a:solidFill>
+                  </a:tcPr>
+                </a:tc>
+                <a:tc>
+                  <a:txBody>
+                    <a:bodyPr/>
+                    <a:lstStyle/>
+                    <a:p>
+                      <a:pPr algn="l"/>
+                      <a:r>
+                        <a:rPr sz="1200" b="0">
+                          <a:solidFill>
+                            <a:srgbClr val="222222"/>
+                          </a:solidFill>
+                          <a:latin typeface="Meiryo"/>
+                          <a:ea typeface="Meiryo"/>
+                          <a:cs typeface="Meiryo"/>
+                        </a:rPr>
+                        <a:t>2.077</a:t>
+                      </a:r>
+                    </a:p>
+                  </a:txBody>
+                  <a:tcPr marL="91440" marR="73152" marT="27432" marB="27432" anchor="ctr">
+                    <a:solidFill>
+                      <a:srgbClr val="FFFFFF"/>
+                    </a:solidFill>
+                  </a:tcPr>
+                </a:tc>
+                <a:tc>
+                  <a:txBody>
+                    <a:bodyPr/>
+                    <a:lstStyle/>
+                    <a:p>
+                      <a:pPr algn="l"/>
+                      <a:r>
+                        <a:rPr sz="1200" b="0">
+                          <a:solidFill>
+                            <a:srgbClr val="222222"/>
+                          </a:solidFill>
+                          <a:latin typeface="Meiryo"/>
+                          <a:ea typeface="Meiryo"/>
+                          <a:cs typeface="Meiryo"/>
+                        </a:rPr>
+                        <a:t>0.595</a:t>
+                      </a:r>
+                    </a:p>
+                  </a:txBody>
+                  <a:tcPr marL="91440" marR="73152" marT="27432" marB="27432" anchor="ctr">
+                    <a:solidFill>
+                      <a:srgbClr val="FFFFFF"/>
+                    </a:solidFill>
+                  </a:tcPr>
+                </a:tc>
+                <a:tc>
+                  <a:txBody>
+                    <a:bodyPr/>
+                    <a:lstStyle/>
+                    <a:p>
+                      <a:pPr algn="l"/>
+                      <a:r>
+                        <a:rPr sz="1200" b="0">
+                          <a:solidFill>
+                            <a:srgbClr val="222222"/>
+                          </a:solidFill>
+                          <a:latin typeface="Meiryo"/>
+                          <a:ea typeface="Meiryo"/>
+                          <a:cs typeface="Meiryo"/>
+                        </a:rPr>
+                        <a:t>0.619</a:t>
+                      </a:r>
+                    </a:p>
+                  </a:txBody>
+                  <a:tcPr marL="91440" marR="73152" marT="27432" marB="27432" anchor="ctr">
+                    <a:solidFill>
+                      <a:srgbClr val="FFFFFF"/>
+                    </a:solidFill>
+                  </a:tcPr>
+                </a:tc>
+              </a:tr>
+              <a:tr h="274320">
+                <a:tc>
+                  <a:txBody>
+                    <a:bodyPr/>
+                    <a:lstStyle/>
+                    <a:p>
+                      <a:pPr algn="l"/>
+                      <a:r>
+                        <a:rPr sz="1200" b="0">
+                          <a:solidFill>
+                            <a:srgbClr val="222222"/>
+                          </a:solidFill>
+                          <a:latin typeface="Meiryo"/>
+                          <a:ea typeface="Meiryo"/>
+                          <a:cs typeface="Meiryo"/>
+                        </a:rPr>
+                        <a:t>λ12　食べられる強さ：マイワシ→サワラ</a:t>
+                      </a:r>
+                    </a:p>
+                  </a:txBody>
+                  <a:tcPr marL="91440" marR="73152" marT="27432" marB="27432" anchor="ctr">
+                    <a:solidFill>
+                      <a:srgbClr val="F2F5F9"/>
+                    </a:solidFill>
+                  </a:tcPr>
+                </a:tc>
+                <a:tc>
+                  <a:txBody>
+                    <a:bodyPr/>
+                    <a:lstStyle/>
+                    <a:p>
+                      <a:pPr algn="l"/>
+                      <a:r>
+                        <a:rPr sz="1200" b="0">
+                          <a:solidFill>
+                            <a:srgbClr val="222222"/>
+                          </a:solidFill>
+                          <a:latin typeface="Meiryo"/>
+                          <a:ea typeface="Meiryo"/>
+                          <a:cs typeface="Meiryo"/>
+                        </a:rPr>
+                        <a:t>0.055</a:t>
+                      </a:r>
+                    </a:p>
+                  </a:txBody>
+                  <a:tcPr marL="91440" marR="73152" marT="27432" marB="27432" anchor="ctr">
+                    <a:solidFill>
+                      <a:srgbClr val="F2F5F9"/>
+                    </a:solidFill>
+                  </a:tcPr>
+                </a:tc>
+                <a:tc>
+                  <a:txBody>
+                    <a:bodyPr/>
+                    <a:lstStyle/>
+                    <a:p>
+                      <a:pPr algn="l"/>
+                      <a:r>
+                        <a:rPr sz="1200" b="0">
+                          <a:solidFill>
+                            <a:srgbClr val="222222"/>
+                          </a:solidFill>
+                          <a:latin typeface="Meiryo"/>
+                          <a:ea typeface="Meiryo"/>
+                          <a:cs typeface="Meiryo"/>
+                        </a:rPr>
+                        <a:t>0.563</a:t>
+                      </a:r>
+                    </a:p>
+                  </a:txBody>
+                  <a:tcPr marL="91440" marR="73152" marT="27432" marB="27432" anchor="ctr">
+                    <a:solidFill>
+                      <a:srgbClr val="F2F5F9"/>
+                    </a:solidFill>
+                  </a:tcPr>
+                </a:tc>
+                <a:tc>
+                  <a:txBody>
+                    <a:bodyPr/>
+                    <a:lstStyle/>
+                    <a:p>
+                      <a:pPr algn="l"/>
+                      <a:r>
+                        <a:rPr sz="1200" b="0">
+                          <a:solidFill>
+                            <a:srgbClr val="222222"/>
+                          </a:solidFill>
+                          <a:latin typeface="Meiryo"/>
+                          <a:ea typeface="Meiryo"/>
+                          <a:cs typeface="Meiryo"/>
+                        </a:rPr>
+                        <a:t>0.005</a:t>
+                      </a:r>
+                    </a:p>
+                  </a:txBody>
+                  <a:tcPr marL="91440" marR="73152" marT="27432" marB="27432" anchor="ctr">
+                    <a:solidFill>
+                      <a:srgbClr val="F2F5F9"/>
+                    </a:solidFill>
+                  </a:tcPr>
+                </a:tc>
+                <a:tc>
+                  <a:txBody>
+                    <a:bodyPr/>
+                    <a:lstStyle/>
+                    <a:p>
+                      <a:pPr algn="l"/>
+                      <a:r>
+                        <a:rPr sz="1200" b="0">
+                          <a:solidFill>
+                            <a:srgbClr val="222222"/>
+                          </a:solidFill>
+                          <a:latin typeface="Meiryo"/>
+                          <a:ea typeface="Meiryo"/>
+                          <a:cs typeface="Meiryo"/>
+                        </a:rPr>
+                        <a:t>0.563</a:t>
+                      </a:r>
+                    </a:p>
+                  </a:txBody>
+                  <a:tcPr marL="91440" marR="73152" marT="27432" marB="27432" anchor="ctr">
+                    <a:solidFill>
+                      <a:srgbClr val="F2F5F9"/>
+                    </a:solidFill>
+                  </a:tcPr>
+                </a:tc>
+                <a:tc>
+                  <a:txBody>
+                    <a:bodyPr/>
+                    <a:lstStyle/>
+                    <a:p>
+                      <a:pPr algn="l"/>
+                      <a:r>
+                        <a:rPr sz="1200" b="0">
+                          <a:solidFill>
+                            <a:srgbClr val="222222"/>
+                          </a:solidFill>
+                          <a:latin typeface="Meiryo"/>
+                          <a:ea typeface="Meiryo"/>
+                          <a:cs typeface="Meiryo"/>
+                        </a:rPr>
+                        <a:t>≈0</a:t>
+                      </a:r>
+                    </a:p>
+                  </a:txBody>
+                  <a:tcPr marL="91440" marR="73152" marT="27432" marB="27432" anchor="ctr">
+                    <a:solidFill>
+                      <a:srgbClr val="F2F5F9"/>
+                    </a:solidFill>
+                  </a:tcPr>
+                </a:tc>
+                <a:tc>
+                  <a:txBody>
+                    <a:bodyPr/>
+                    <a:lstStyle/>
+                    <a:p>
+                      <a:pPr algn="l"/>
+                      <a:r>
+                        <a:rPr sz="1200" b="0">
+                          <a:solidFill>
+                            <a:srgbClr val="222222"/>
+                          </a:solidFill>
+                          <a:latin typeface="Meiryo"/>
+                          <a:ea typeface="Meiryo"/>
+                          <a:cs typeface="Meiryo"/>
+                        </a:rPr>
+                        <a:t>≈0</a:t>
+                      </a:r>
+                    </a:p>
+                  </a:txBody>
+                  <a:tcPr marL="91440" marR="73152" marT="27432" marB="27432" anchor="ctr">
+                    <a:solidFill>
+                      <a:srgbClr val="F2F5F9"/>
+                    </a:solidFill>
+                  </a:tcPr>
+                </a:tc>
+              </a:tr>
+              <a:tr h="274320">
+                <a:tc>
+                  <a:txBody>
+                    <a:bodyPr/>
+                    <a:lstStyle/>
+                    <a:p>
+                      <a:pPr algn="l"/>
+                      <a:r>
+                        <a:rPr sz="1200" b="0">
+                          <a:solidFill>
+                            <a:srgbClr val="222222"/>
+                          </a:solidFill>
+                          <a:latin typeface="Meiryo"/>
+                          <a:ea typeface="Meiryo"/>
+                          <a:cs typeface="Meiryo"/>
+                        </a:rPr>
+                        <a:t>λ21　食べられる強さ：ウルメ→ブリ</a:t>
+                      </a:r>
+                    </a:p>
+                  </a:txBody>
+                  <a:tcPr marL="91440" marR="73152" marT="27432" marB="27432" anchor="ctr">
+                    <a:solidFill>
+                      <a:srgbClr val="FFFFFF"/>
+                    </a:solidFill>
+                  </a:tcPr>
+                </a:tc>
+                <a:tc>
+                  <a:txBody>
+                    <a:bodyPr/>
+                    <a:lstStyle/>
+                    <a:p>
+                      <a:pPr algn="l"/>
+                      <a:r>
+                        <a:rPr sz="1200" b="0">
+                          <a:solidFill>
+                            <a:srgbClr val="222222"/>
+                          </a:solidFill>
+                          <a:latin typeface="Meiryo"/>
+                          <a:ea typeface="Meiryo"/>
+                          <a:cs typeface="Meiryo"/>
+                        </a:rPr>
+                        <a:t>0.224</a:t>
+                      </a:r>
+                    </a:p>
+                  </a:txBody>
+                  <a:tcPr marL="91440" marR="73152" marT="27432" marB="27432" anchor="ctr">
+                    <a:solidFill>
+                      <a:srgbClr val="FFFFFF"/>
+                    </a:solidFill>
+                  </a:tcPr>
+                </a:tc>
+                <a:tc>
+                  <a:txBody>
+                    <a:bodyPr/>
+                    <a:lstStyle/>
+                    <a:p>
+                      <a:pPr algn="l"/>
+                      <a:r>
+                        <a:rPr sz="1200" b="0">
+                          <a:solidFill>
+                            <a:srgbClr val="222222"/>
+                          </a:solidFill>
+                          <a:latin typeface="Meiryo"/>
+                          <a:ea typeface="Meiryo"/>
+                          <a:cs typeface="Meiryo"/>
+                        </a:rPr>
+                        <a:t>0.560</a:t>
+                      </a:r>
+                    </a:p>
+                  </a:txBody>
+                  <a:tcPr marL="91440" marR="73152" marT="27432" marB="27432" anchor="ctr">
+                    <a:solidFill>
+                      <a:srgbClr val="FFFFFF"/>
+                    </a:solidFill>
+                  </a:tcPr>
+                </a:tc>
+                <a:tc>
+                  <a:txBody>
+                    <a:bodyPr/>
+                    <a:lstStyle/>
+                    <a:p>
+                      <a:pPr algn="l"/>
+                      <a:r>
+                        <a:rPr sz="1200" b="1">
+                          <a:solidFill>
+                            <a:srgbClr val="C0561A"/>
+                          </a:solidFill>
+                          <a:latin typeface="Meiryo"/>
+                          <a:ea typeface="Meiryo"/>
+                          <a:cs typeface="Meiryo"/>
+                        </a:rPr>
+                        <a:t>0.945</a:t>
+                      </a:r>
+                    </a:p>
+                  </a:txBody>
+                  <a:tcPr marL="91440" marR="73152" marT="27432" marB="27432" anchor="ctr">
+                    <a:solidFill>
+                      <a:srgbClr val="FFFFFF"/>
+                    </a:solidFill>
+                  </a:tcPr>
+                </a:tc>
+                <a:tc>
+                  <a:txBody>
+                    <a:bodyPr/>
+                    <a:lstStyle/>
+                    <a:p>
+                      <a:pPr algn="l"/>
+                      <a:r>
+                        <a:rPr sz="1200" b="0">
+                          <a:solidFill>
+                            <a:srgbClr val="222222"/>
+                          </a:solidFill>
+                          <a:latin typeface="Meiryo"/>
+                          <a:ea typeface="Meiryo"/>
+                          <a:cs typeface="Meiryo"/>
+                        </a:rPr>
+                        <a:t>0.138</a:t>
+                      </a:r>
+                    </a:p>
+                  </a:txBody>
+                  <a:tcPr marL="91440" marR="73152" marT="27432" marB="27432" anchor="ctr">
+                    <a:solidFill>
+                      <a:srgbClr val="FFFFFF"/>
+                    </a:solidFill>
+                  </a:tcPr>
+                </a:tc>
+                <a:tc>
+                  <a:txBody>
+                    <a:bodyPr/>
+                    <a:lstStyle/>
+                    <a:p>
+                      <a:pPr algn="l"/>
+                      <a:r>
+                        <a:rPr sz="1200" b="0">
+                          <a:solidFill>
+                            <a:srgbClr val="222222"/>
+                          </a:solidFill>
+                          <a:latin typeface="Meiryo"/>
+                          <a:ea typeface="Meiryo"/>
+                          <a:cs typeface="Meiryo"/>
+                        </a:rPr>
+                        <a:t>0.379</a:t>
+                      </a:r>
+                    </a:p>
+                  </a:txBody>
+                  <a:tcPr marL="91440" marR="73152" marT="27432" marB="27432" anchor="ctr">
+                    <a:solidFill>
+                      <a:srgbClr val="FFFFFF"/>
+                    </a:solidFill>
+                  </a:tcPr>
+                </a:tc>
+                <a:tc>
+                  <a:txBody>
+                    <a:bodyPr/>
+                    <a:lstStyle/>
+                    <a:p>
+                      <a:pPr algn="l"/>
+                      <a:r>
+                        <a:rPr sz="1200" b="0">
+                          <a:solidFill>
+                            <a:srgbClr val="222222"/>
+                          </a:solidFill>
+                          <a:latin typeface="Meiryo"/>
+                          <a:ea typeface="Meiryo"/>
+                          <a:cs typeface="Meiryo"/>
+                        </a:rPr>
+                        <a:t>0.642</a:t>
+                      </a:r>
+                    </a:p>
+                  </a:txBody>
+                  <a:tcPr marL="91440" marR="73152" marT="27432" marB="27432" anchor="ctr">
+                    <a:solidFill>
+                      <a:srgbClr val="FFFFFF"/>
+                    </a:solidFill>
+                  </a:tcPr>
+                </a:tc>
+              </a:tr>
+              <a:tr h="274320">
+                <a:tc>
+                  <a:txBody>
+                    <a:bodyPr/>
+                    <a:lstStyle/>
+                    <a:p>
+                      <a:pPr algn="l"/>
+                      <a:r>
+                        <a:rPr sz="1200" b="0">
+                          <a:solidFill>
+                            <a:srgbClr val="222222"/>
+                          </a:solidFill>
+                          <a:latin typeface="Meiryo"/>
+                          <a:ea typeface="Meiryo"/>
+                          <a:cs typeface="Meiryo"/>
+                        </a:rPr>
+                        <a:t>λ22　食べられる強さ：ウルメ→サワラ</a:t>
+                      </a:r>
+                    </a:p>
+                  </a:txBody>
+                  <a:tcPr marL="91440" marR="73152" marT="27432" marB="27432" anchor="ctr">
+                    <a:solidFill>
+                      <a:srgbClr val="F2F5F9"/>
+                    </a:solidFill>
+                  </a:tcPr>
+                </a:tc>
+                <a:tc>
+                  <a:txBody>
+                    <a:bodyPr/>
+                    <a:lstStyle/>
+                    <a:p>
+                      <a:pPr algn="l"/>
+                      <a:r>
+                        <a:rPr sz="1200" b="0">
+                          <a:solidFill>
+                            <a:srgbClr val="222222"/>
+                          </a:solidFill>
+                          <a:latin typeface="Meiryo"/>
+                          <a:ea typeface="Meiryo"/>
+                          <a:cs typeface="Meiryo"/>
+                        </a:rPr>
+                        <a:t>0.175</a:t>
+                      </a:r>
+                    </a:p>
+                  </a:txBody>
+                  <a:tcPr marL="91440" marR="73152" marT="27432" marB="27432" anchor="ctr">
+                    <a:solidFill>
+                      <a:srgbClr val="F2F5F9"/>
+                    </a:solidFill>
+                  </a:tcPr>
+                </a:tc>
+                <a:tc>
+                  <a:txBody>
+                    <a:bodyPr/>
+                    <a:lstStyle/>
+                    <a:p>
+                      <a:pPr algn="l"/>
+                      <a:r>
+                        <a:rPr sz="1200" b="0">
+                          <a:solidFill>
+                            <a:srgbClr val="222222"/>
+                          </a:solidFill>
+                          <a:latin typeface="Meiryo"/>
+                          <a:ea typeface="Meiryo"/>
+                          <a:cs typeface="Meiryo"/>
+                        </a:rPr>
+                        <a:t>0.225</a:t>
+                      </a:r>
+                    </a:p>
+                  </a:txBody>
+                  <a:tcPr marL="91440" marR="73152" marT="27432" marB="27432" anchor="ctr">
+                    <a:solidFill>
+                      <a:srgbClr val="F2F5F9"/>
+                    </a:solidFill>
+                  </a:tcPr>
+                </a:tc>
+                <a:tc>
+                  <a:txBody>
+                    <a:bodyPr/>
+                    <a:lstStyle/>
+                    <a:p>
+                      <a:pPr algn="l"/>
+                      <a:r>
+                        <a:rPr sz="1200" b="0">
+                          <a:solidFill>
+                            <a:srgbClr val="222222"/>
+                          </a:solidFill>
+                          <a:latin typeface="Meiryo"/>
+                          <a:ea typeface="Meiryo"/>
+                          <a:cs typeface="Meiryo"/>
+                        </a:rPr>
+                        <a:t>0.028</a:t>
+                      </a:r>
+                    </a:p>
+                  </a:txBody>
+                  <a:tcPr marL="91440" marR="73152" marT="27432" marB="27432" anchor="ctr">
+                    <a:solidFill>
+                      <a:srgbClr val="F2F5F9"/>
+                    </a:solidFill>
+                  </a:tcPr>
+                </a:tc>
+                <a:tc>
+                  <a:txBody>
+                    <a:bodyPr/>
+                    <a:lstStyle/>
+                    <a:p>
+                      <a:pPr algn="l"/>
+                      <a:r>
+                        <a:rPr sz="1200" b="0">
+                          <a:solidFill>
+                            <a:srgbClr val="222222"/>
+                          </a:solidFill>
+                          <a:latin typeface="Meiryo"/>
+                          <a:ea typeface="Meiryo"/>
+                          <a:cs typeface="Meiryo"/>
+                        </a:rPr>
+                        <a:t>0.477</a:t>
+                      </a:r>
+                    </a:p>
+                  </a:txBody>
+                  <a:tcPr marL="91440" marR="73152" marT="27432" marB="27432" anchor="ctr">
+                    <a:solidFill>
+                      <a:srgbClr val="F2F5F9"/>
+                    </a:solidFill>
+                  </a:tcPr>
+                </a:tc>
+                <a:tc>
+                  <a:txBody>
+                    <a:bodyPr/>
+                    <a:lstStyle/>
+                    <a:p>
+                      <a:pPr algn="l"/>
+                      <a:r>
+                        <a:rPr sz="1200" b="0">
+                          <a:solidFill>
+                            <a:srgbClr val="222222"/>
+                          </a:solidFill>
+                          <a:latin typeface="Meiryo"/>
+                          <a:ea typeface="Meiryo"/>
+                          <a:cs typeface="Meiryo"/>
+                        </a:rPr>
+                        <a:t>0.333</a:t>
+                      </a:r>
+                    </a:p>
+                  </a:txBody>
+                  <a:tcPr marL="91440" marR="73152" marT="27432" marB="27432" anchor="ctr">
+                    <a:solidFill>
+                      <a:srgbClr val="F2F5F9"/>
+                    </a:solidFill>
+                  </a:tcPr>
+                </a:tc>
+                <a:tc>
+                  <a:txBody>
+                    <a:bodyPr/>
+                    <a:lstStyle/>
+                    <a:p>
+                      <a:pPr algn="l"/>
+                      <a:r>
+                        <a:rPr sz="1200" b="0">
+                          <a:solidFill>
+                            <a:srgbClr val="222222"/>
+                          </a:solidFill>
+                          <a:latin typeface="Meiryo"/>
+                          <a:ea typeface="Meiryo"/>
+                          <a:cs typeface="Meiryo"/>
+                        </a:rPr>
+                        <a:t>0.102</a:t>
+                      </a:r>
+                    </a:p>
+                  </a:txBody>
+                  <a:tcPr marL="91440" marR="73152" marT="27432" marB="27432" anchor="ctr">
+                    <a:solidFill>
+                      <a:srgbClr val="F2F5F9"/>
+                    </a:solidFill>
+                  </a:tcPr>
+                </a:tc>
+              </a:tr>
+              <a:tr h="274320">
+                <a:tc>
+                  <a:txBody>
+                    <a:bodyPr/>
+                    <a:lstStyle/>
+                    <a:p>
+                      <a:pPr algn="l"/>
+                      <a:r>
+                        <a:rPr sz="1200" b="0">
+                          <a:solidFill>
+                            <a:srgbClr val="222222"/>
+                          </a:solidFill>
+                          <a:latin typeface="Meiryo"/>
+                          <a:ea typeface="Meiryo"/>
+                          <a:cs typeface="Meiryo"/>
+                        </a:rPr>
+                        <a:t>C1　変換の割合：マイワシ→ブリ</a:t>
+                      </a:r>
+                    </a:p>
+                  </a:txBody>
+                  <a:tcPr marL="91440" marR="73152" marT="27432" marB="27432" anchor="ctr">
+                    <a:solidFill>
+                      <a:srgbClr val="FFFFFF"/>
+                    </a:solidFill>
+                  </a:tcPr>
+                </a:tc>
+                <a:tc>
+                  <a:txBody>
+                    <a:bodyPr/>
+                    <a:lstStyle/>
+                    <a:p>
+                      <a:pPr algn="l"/>
+                      <a:r>
+                        <a:rPr sz="1200" b="0">
+                          <a:solidFill>
+                            <a:srgbClr val="222222"/>
+                          </a:solidFill>
+                          <a:latin typeface="Meiryo"/>
+                          <a:ea typeface="Meiryo"/>
+                          <a:cs typeface="Meiryo"/>
+                        </a:rPr>
+                        <a:t>0.485</a:t>
+                      </a:r>
+                    </a:p>
+                  </a:txBody>
+                  <a:tcPr marL="91440" marR="73152" marT="27432" marB="27432" anchor="ctr">
+                    <a:solidFill>
+                      <a:srgbClr val="FFFFFF"/>
+                    </a:solidFill>
+                  </a:tcPr>
+                </a:tc>
+                <a:tc>
+                  <a:txBody>
+                    <a:bodyPr/>
+                    <a:lstStyle/>
+                    <a:p>
+                      <a:pPr algn="l"/>
+                      <a:r>
+                        <a:rPr sz="1200" b="1">
+                          <a:solidFill>
+                            <a:srgbClr val="C0561A"/>
+                          </a:solidFill>
+                          <a:latin typeface="Meiryo"/>
+                          <a:ea typeface="Meiryo"/>
+                          <a:cs typeface="Meiryo"/>
+                        </a:rPr>
+                        <a:t>6.012</a:t>
+                      </a:r>
+                    </a:p>
+                  </a:txBody>
+                  <a:tcPr marL="91440" marR="73152" marT="27432" marB="27432" anchor="ctr">
+                    <a:solidFill>
+                      <a:srgbClr val="FFFFFF"/>
+                    </a:solidFill>
+                  </a:tcPr>
+                </a:tc>
+                <a:tc>
+                  <a:txBody>
+                    <a:bodyPr/>
+                    <a:lstStyle/>
+                    <a:p>
+                      <a:pPr algn="l"/>
+                      <a:r>
+                        <a:rPr sz="1200" b="0">
+                          <a:solidFill>
+                            <a:srgbClr val="222222"/>
+                          </a:solidFill>
+                          <a:latin typeface="Meiryo"/>
+                          <a:ea typeface="Meiryo"/>
+                          <a:cs typeface="Meiryo"/>
+                        </a:rPr>
+                        <a:t>0.140</a:t>
+                      </a:r>
+                    </a:p>
+                  </a:txBody>
+                  <a:tcPr marL="91440" marR="73152" marT="27432" marB="27432" anchor="ctr">
+                    <a:solidFill>
+                      <a:srgbClr val="FFFFFF"/>
+                    </a:solidFill>
+                  </a:tcPr>
+                </a:tc>
+                <a:tc>
+                  <a:txBody>
+                    <a:bodyPr/>
+                    <a:lstStyle/>
+                    <a:p>
+                      <a:pPr algn="l"/>
+                      <a:r>
+                        <a:rPr sz="1200" b="0">
+                          <a:solidFill>
+                            <a:srgbClr val="222222"/>
+                          </a:solidFill>
+                          <a:latin typeface="Meiryo"/>
+                          <a:ea typeface="Meiryo"/>
+                          <a:cs typeface="Meiryo"/>
+                        </a:rPr>
+                        <a:t>0.101</a:t>
+                      </a:r>
+                    </a:p>
+                  </a:txBody>
+                  <a:tcPr marL="91440" marR="73152" marT="27432" marB="27432" anchor="ctr">
+                    <a:solidFill>
+                      <a:srgbClr val="FFFFFF"/>
+                    </a:solidFill>
+                  </a:tcPr>
+                </a:tc>
+                <a:tc>
+                  <a:txBody>
+                    <a:bodyPr/>
+                    <a:lstStyle/>
+                    <a:p>
+                      <a:pPr algn="l"/>
+                      <a:r>
+                        <a:rPr sz="1200" b="0">
+                          <a:solidFill>
+                            <a:srgbClr val="222222"/>
+                          </a:solidFill>
+                          <a:latin typeface="Meiryo"/>
+                          <a:ea typeface="Meiryo"/>
+                          <a:cs typeface="Meiryo"/>
+                        </a:rPr>
+                        <a:t>0.933</a:t>
+                      </a:r>
+                    </a:p>
+                  </a:txBody>
+                  <a:tcPr marL="91440" marR="73152" marT="27432" marB="27432" anchor="ctr">
+                    <a:solidFill>
+                      <a:srgbClr val="FFFFFF"/>
+                    </a:solidFill>
+                  </a:tcPr>
+                </a:tc>
+                <a:tc>
+                  <a:txBody>
+                    <a:bodyPr/>
+                    <a:lstStyle/>
+                    <a:p>
+                      <a:pPr algn="l"/>
+                      <a:r>
+                        <a:rPr sz="1200" b="0">
+                          <a:solidFill>
+                            <a:srgbClr val="222222"/>
+                          </a:solidFill>
+                          <a:latin typeface="Meiryo"/>
+                          <a:ea typeface="Meiryo"/>
+                          <a:cs typeface="Meiryo"/>
+                        </a:rPr>
+                        <a:t>0.387</a:t>
+                      </a:r>
+                    </a:p>
+                  </a:txBody>
+                  <a:tcPr marL="91440" marR="73152" marT="27432" marB="27432" anchor="ctr">
+                    <a:solidFill>
+                      <a:srgbClr val="FFFFFF"/>
+                    </a:solidFill>
+                  </a:tcPr>
+                </a:tc>
+              </a:tr>
+              <a:tr h="274320">
+                <a:tc>
+                  <a:txBody>
+                    <a:bodyPr/>
+                    <a:lstStyle/>
+                    <a:p>
+                      <a:pPr algn="l"/>
+                      <a:r>
+                        <a:rPr sz="1200" b="0">
+                          <a:solidFill>
+                            <a:srgbClr val="222222"/>
+                          </a:solidFill>
+                          <a:latin typeface="Meiryo"/>
+                          <a:ea typeface="Meiryo"/>
+                          <a:cs typeface="Meiryo"/>
+                        </a:rPr>
+                        <a:t>D1　変換の割合：ウルメ→ブリ</a:t>
+                      </a:r>
+                    </a:p>
+                  </a:txBody>
+                  <a:tcPr marL="91440" marR="73152" marT="27432" marB="27432" anchor="ctr">
+                    <a:solidFill>
+                      <a:srgbClr val="F2F5F9"/>
+                    </a:solidFill>
+                  </a:tcPr>
+                </a:tc>
+                <a:tc>
+                  <a:txBody>
+                    <a:bodyPr/>
+                    <a:lstStyle/>
+                    <a:p>
+                      <a:pPr algn="l"/>
+                      <a:r>
+                        <a:rPr sz="1200" b="0">
+                          <a:solidFill>
+                            <a:srgbClr val="222222"/>
+                          </a:solidFill>
+                          <a:latin typeface="Meiryo"/>
+                          <a:ea typeface="Meiryo"/>
+                          <a:cs typeface="Meiryo"/>
+                        </a:rPr>
+                        <a:t>2.119</a:t>
+                      </a:r>
+                    </a:p>
+                  </a:txBody>
+                  <a:tcPr marL="91440" marR="73152" marT="27432" marB="27432" anchor="ctr">
+                    <a:solidFill>
+                      <a:srgbClr val="F2F5F9"/>
+                    </a:solidFill>
+                  </a:tcPr>
+                </a:tc>
+                <a:tc>
+                  <a:txBody>
+                    <a:bodyPr/>
+                    <a:lstStyle/>
+                    <a:p>
+                      <a:pPr algn="l"/>
+                      <a:r>
+                        <a:rPr sz="1200" b="0">
+                          <a:solidFill>
+                            <a:srgbClr val="222222"/>
+                          </a:solidFill>
+                          <a:latin typeface="Meiryo"/>
+                          <a:ea typeface="Meiryo"/>
+                          <a:cs typeface="Meiryo"/>
+                        </a:rPr>
+                        <a:t>0.766</a:t>
+                      </a:r>
+                    </a:p>
+                  </a:txBody>
+                  <a:tcPr marL="91440" marR="73152" marT="27432" marB="27432" anchor="ctr">
+                    <a:solidFill>
+                      <a:srgbClr val="F2F5F9"/>
+                    </a:solidFill>
+                  </a:tcPr>
+                </a:tc>
+                <a:tc>
+                  <a:txBody>
+                    <a:bodyPr/>
+                    <a:lstStyle/>
+                    <a:p>
+                      <a:pPr algn="l"/>
+                      <a:r>
+                        <a:rPr sz="1200" b="0">
+                          <a:solidFill>
+                            <a:srgbClr val="222222"/>
+                          </a:solidFill>
+                          <a:latin typeface="Meiryo"/>
+                          <a:ea typeface="Meiryo"/>
+                          <a:cs typeface="Meiryo"/>
+                        </a:rPr>
+                        <a:t>0.272</a:t>
+                      </a:r>
+                    </a:p>
+                  </a:txBody>
+                  <a:tcPr marL="91440" marR="73152" marT="27432" marB="27432" anchor="ctr">
+                    <a:solidFill>
+                      <a:srgbClr val="F2F5F9"/>
+                    </a:solidFill>
+                  </a:tcPr>
+                </a:tc>
+                <a:tc>
+                  <a:txBody>
+                    <a:bodyPr/>
+                    <a:lstStyle/>
+                    <a:p>
+                      <a:pPr algn="l"/>
+                      <a:r>
+                        <a:rPr sz="1200" b="0">
+                          <a:solidFill>
+                            <a:srgbClr val="222222"/>
+                          </a:solidFill>
+                          <a:latin typeface="Meiryo"/>
+                          <a:ea typeface="Meiryo"/>
+                          <a:cs typeface="Meiryo"/>
+                        </a:rPr>
+                        <a:t>1.522</a:t>
+                      </a:r>
+                    </a:p>
+                  </a:txBody>
+                  <a:tcPr marL="91440" marR="73152" marT="27432" marB="27432" anchor="ctr">
+                    <a:solidFill>
+                      <a:srgbClr val="F2F5F9"/>
+                    </a:solidFill>
+                  </a:tcPr>
+                </a:tc>
+                <a:tc>
+                  <a:txBody>
+                    <a:bodyPr/>
+                    <a:lstStyle/>
+                    <a:p>
+                      <a:pPr algn="l"/>
+                      <a:r>
+                        <a:rPr sz="1200" b="0">
+                          <a:solidFill>
+                            <a:srgbClr val="222222"/>
+                          </a:solidFill>
+                          <a:latin typeface="Meiryo"/>
+                          <a:ea typeface="Meiryo"/>
+                          <a:cs typeface="Meiryo"/>
+                        </a:rPr>
+                        <a:t>1.654</a:t>
+                      </a:r>
+                    </a:p>
+                  </a:txBody>
+                  <a:tcPr marL="91440" marR="73152" marT="27432" marB="27432" anchor="ctr">
+                    <a:solidFill>
+                      <a:srgbClr val="F2F5F9"/>
+                    </a:solidFill>
+                  </a:tcPr>
+                </a:tc>
+                <a:tc>
+                  <a:txBody>
+                    <a:bodyPr/>
+                    <a:lstStyle/>
+                    <a:p>
+                      <a:pPr algn="l"/>
+                      <a:r>
+                        <a:rPr sz="1200" b="0">
+                          <a:solidFill>
+                            <a:srgbClr val="222222"/>
+                          </a:solidFill>
+                          <a:latin typeface="Meiryo"/>
+                          <a:ea typeface="Meiryo"/>
+                          <a:cs typeface="Meiryo"/>
+                        </a:rPr>
+                        <a:t>0.203</a:t>
+                      </a:r>
+                    </a:p>
+                  </a:txBody>
+                  <a:tcPr marL="91440" marR="73152" marT="27432" marB="27432" anchor="ctr">
+                    <a:solidFill>
+                      <a:srgbClr val="F2F5F9"/>
+                    </a:solidFill>
+                  </a:tcPr>
+                </a:tc>
+              </a:tr>
+              <a:tr h="274320">
+                <a:tc>
+                  <a:txBody>
+                    <a:bodyPr/>
+                    <a:lstStyle/>
+                    <a:p>
+                      <a:pPr algn="l"/>
+                      <a:r>
+                        <a:rPr sz="1200" b="0">
+                          <a:solidFill>
+                            <a:srgbClr val="222222"/>
+                          </a:solidFill>
+                          <a:latin typeface="Meiryo"/>
+                          <a:ea typeface="Meiryo"/>
+                          <a:cs typeface="Meiryo"/>
+                        </a:rPr>
+                        <a:t>C2　変換の割合：マイワシ→サワラ</a:t>
+                      </a:r>
+                    </a:p>
+                  </a:txBody>
+                  <a:tcPr marL="91440" marR="73152" marT="27432" marB="27432" anchor="ctr">
+                    <a:solidFill>
+                      <a:srgbClr val="FFFFFF"/>
+                    </a:solidFill>
+                  </a:tcPr>
+                </a:tc>
+                <a:tc>
+                  <a:txBody>
+                    <a:bodyPr/>
+                    <a:lstStyle/>
+                    <a:p>
+                      <a:pPr algn="l"/>
+                      <a:r>
+                        <a:rPr sz="1200" b="0">
+                          <a:solidFill>
+                            <a:srgbClr val="222222"/>
+                          </a:solidFill>
+                          <a:latin typeface="Meiryo"/>
+                          <a:ea typeface="Meiryo"/>
+                          <a:cs typeface="Meiryo"/>
+                        </a:rPr>
+                        <a:t>0.191</a:t>
+                      </a:r>
+                    </a:p>
+                  </a:txBody>
+                  <a:tcPr marL="91440" marR="73152" marT="27432" marB="27432" anchor="ctr">
+                    <a:solidFill>
+                      <a:srgbClr val="FFFFFF"/>
+                    </a:solidFill>
+                  </a:tcPr>
+                </a:tc>
+                <a:tc>
+                  <a:txBody>
+                    <a:bodyPr/>
+                    <a:lstStyle/>
+                    <a:p>
+                      <a:pPr algn="l"/>
+                      <a:r>
+                        <a:rPr sz="1200" b="0">
+                          <a:solidFill>
+                            <a:srgbClr val="222222"/>
+                          </a:solidFill>
+                          <a:latin typeface="Meiryo"/>
+                          <a:ea typeface="Meiryo"/>
+                          <a:cs typeface="Meiryo"/>
+                        </a:rPr>
+                        <a:t>0.105</a:t>
+                      </a:r>
+                    </a:p>
+                  </a:txBody>
+                  <a:tcPr marL="91440" marR="73152" marT="27432" marB="27432" anchor="ctr">
+                    <a:solidFill>
+                      <a:srgbClr val="FFFFFF"/>
+                    </a:solidFill>
+                  </a:tcPr>
+                </a:tc>
+                <a:tc>
+                  <a:txBody>
+                    <a:bodyPr/>
+                    <a:lstStyle/>
+                    <a:p>
+                      <a:pPr algn="l"/>
+                      <a:r>
+                        <a:rPr sz="1200" b="0">
+                          <a:solidFill>
+                            <a:srgbClr val="222222"/>
+                          </a:solidFill>
+                          <a:latin typeface="Meiryo"/>
+                          <a:ea typeface="Meiryo"/>
+                          <a:cs typeface="Meiryo"/>
+                        </a:rPr>
+                        <a:t>0.728</a:t>
+                      </a:r>
+                    </a:p>
+                  </a:txBody>
+                  <a:tcPr marL="91440" marR="73152" marT="27432" marB="27432" anchor="ctr">
+                    <a:solidFill>
+                      <a:srgbClr val="FFFFFF"/>
+                    </a:solidFill>
+                  </a:tcPr>
+                </a:tc>
+                <a:tc>
+                  <a:txBody>
+                    <a:bodyPr/>
+                    <a:lstStyle/>
+                    <a:p>
+                      <a:pPr algn="l"/>
+                      <a:r>
+                        <a:rPr sz="1200" b="0">
+                          <a:solidFill>
+                            <a:srgbClr val="222222"/>
+                          </a:solidFill>
+                          <a:latin typeface="Meiryo"/>
+                          <a:ea typeface="Meiryo"/>
+                          <a:cs typeface="Meiryo"/>
+                        </a:rPr>
+                        <a:t>0.030</a:t>
+                      </a:r>
+                    </a:p>
+                  </a:txBody>
+                  <a:tcPr marL="91440" marR="73152" marT="27432" marB="27432" anchor="ctr">
+                    <a:solidFill>
+                      <a:srgbClr val="FFFFFF"/>
+                    </a:solidFill>
+                  </a:tcPr>
+                </a:tc>
+                <a:tc>
+                  <a:txBody>
+                    <a:bodyPr/>
+                    <a:lstStyle/>
+                    <a:p>
+                      <a:pPr algn="l"/>
+                      <a:r>
+                        <a:rPr sz="1200" b="0">
+                          <a:solidFill>
+                            <a:srgbClr val="222222"/>
+                          </a:solidFill>
+                          <a:latin typeface="Meiryo"/>
+                          <a:ea typeface="Meiryo"/>
+                          <a:cs typeface="Meiryo"/>
+                        </a:rPr>
+                        <a:t>0.004</a:t>
+                      </a:r>
+                    </a:p>
+                  </a:txBody>
+                  <a:tcPr marL="91440" marR="73152" marT="27432" marB="27432" anchor="ctr">
+                    <a:solidFill>
+                      <a:srgbClr val="FFFFFF"/>
+                    </a:solidFill>
+                  </a:tcPr>
+                </a:tc>
+                <a:tc>
+                  <a:txBody>
+                    <a:bodyPr/>
+                    <a:lstStyle/>
+                    <a:p>
+                      <a:pPr algn="l"/>
+                      <a:r>
+                        <a:rPr sz="1200" b="1">
+                          <a:solidFill>
+                            <a:srgbClr val="C0561A"/>
+                          </a:solidFill>
+                          <a:latin typeface="Meiryo"/>
+                          <a:ea typeface="Meiryo"/>
+                          <a:cs typeface="Meiryo"/>
+                        </a:rPr>
+                        <a:t>64.2</a:t>
+                      </a:r>
+                    </a:p>
+                  </a:txBody>
+                  <a:tcPr marL="91440" marR="73152" marT="27432" marB="27432" anchor="ctr">
+                    <a:solidFill>
+                      <a:srgbClr val="FFFFFF"/>
+                    </a:solidFill>
+                  </a:tcPr>
+                </a:tc>
+              </a:tr>
+              <a:tr h="274320">
+                <a:tc>
+                  <a:txBody>
+                    <a:bodyPr/>
+                    <a:lstStyle/>
+                    <a:p>
+                      <a:pPr algn="l"/>
+                      <a:r>
+                        <a:rPr sz="1200" b="0">
+                          <a:solidFill>
+                            <a:srgbClr val="222222"/>
+                          </a:solidFill>
+                          <a:latin typeface="Meiryo"/>
+                          <a:ea typeface="Meiryo"/>
+                          <a:cs typeface="Meiryo"/>
+                        </a:rPr>
+                        <a:t>D2　変換の割合：ウルメ→サワラ</a:t>
+                      </a:r>
+                    </a:p>
+                  </a:txBody>
+                  <a:tcPr marL="91440" marR="73152" marT="27432" marB="27432" anchor="ctr">
+                    <a:solidFill>
+                      <a:srgbClr val="F2F5F9"/>
+                    </a:solidFill>
+                  </a:tcPr>
+                </a:tc>
+                <a:tc>
+                  <a:txBody>
+                    <a:bodyPr/>
+                    <a:lstStyle/>
+                    <a:p>
+                      <a:pPr algn="l"/>
+                      <a:r>
+                        <a:rPr sz="1200" b="0">
+                          <a:solidFill>
+                            <a:srgbClr val="222222"/>
+                          </a:solidFill>
+                          <a:latin typeface="Meiryo"/>
+                          <a:ea typeface="Meiryo"/>
+                          <a:cs typeface="Meiryo"/>
+                        </a:rPr>
+                        <a:t>2.544</a:t>
+                      </a:r>
+                    </a:p>
+                  </a:txBody>
+                  <a:tcPr marL="91440" marR="73152" marT="27432" marB="27432" anchor="ctr">
+                    <a:solidFill>
+                      <a:srgbClr val="F2F5F9"/>
+                    </a:solidFill>
+                  </a:tcPr>
+                </a:tc>
+                <a:tc>
+                  <a:txBody>
+                    <a:bodyPr/>
+                    <a:lstStyle/>
+                    <a:p>
+                      <a:pPr algn="l"/>
+                      <a:r>
+                        <a:rPr sz="1200" b="0">
+                          <a:solidFill>
+                            <a:srgbClr val="222222"/>
+                          </a:solidFill>
+                          <a:latin typeface="Meiryo"/>
+                          <a:ea typeface="Meiryo"/>
+                          <a:cs typeface="Meiryo"/>
+                        </a:rPr>
+                        <a:t>1.619</a:t>
+                      </a:r>
+                    </a:p>
+                  </a:txBody>
+                  <a:tcPr marL="91440" marR="73152" marT="27432" marB="27432" anchor="ctr">
+                    <a:solidFill>
+                      <a:srgbClr val="F2F5F9"/>
+                    </a:solidFill>
+                  </a:tcPr>
+                </a:tc>
+                <a:tc>
+                  <a:txBody>
+                    <a:bodyPr/>
+                    <a:lstStyle/>
+                    <a:p>
+                      <a:pPr algn="l"/>
+                      <a:r>
+                        <a:rPr sz="1200" b="1">
+                          <a:solidFill>
+                            <a:srgbClr val="C0561A"/>
+                          </a:solidFill>
+                          <a:latin typeface="Meiryo"/>
+                          <a:ea typeface="Meiryo"/>
+                          <a:cs typeface="Meiryo"/>
+                        </a:rPr>
+                        <a:t>12.8</a:t>
+                      </a:r>
+                    </a:p>
+                  </a:txBody>
+                  <a:tcPr marL="91440" marR="73152" marT="27432" marB="27432" anchor="ctr">
+                    <a:solidFill>
+                      <a:srgbClr val="F2F5F9"/>
+                    </a:solidFill>
+                  </a:tcPr>
+                </a:tc>
+                <a:tc>
+                  <a:txBody>
+                    <a:bodyPr/>
+                    <a:lstStyle/>
+                    <a:p>
+                      <a:pPr algn="l"/>
+                      <a:r>
+                        <a:rPr sz="1200" b="0">
+                          <a:solidFill>
+                            <a:srgbClr val="222222"/>
+                          </a:solidFill>
+                          <a:latin typeface="Meiryo"/>
+                          <a:ea typeface="Meiryo"/>
+                          <a:cs typeface="Meiryo"/>
+                        </a:rPr>
+                        <a:t>0.773</a:t>
+                      </a:r>
+                    </a:p>
+                  </a:txBody>
+                  <a:tcPr marL="91440" marR="73152" marT="27432" marB="27432" anchor="ctr">
+                    <a:solidFill>
+                      <a:srgbClr val="F2F5F9"/>
+                    </a:solidFill>
+                  </a:tcPr>
+                </a:tc>
+                <a:tc>
+                  <a:txBody>
+                    <a:bodyPr/>
+                    <a:lstStyle/>
+                    <a:p>
+                      <a:pPr algn="l"/>
+                      <a:r>
+                        <a:rPr sz="1200" b="0">
+                          <a:solidFill>
+                            <a:srgbClr val="222222"/>
+                          </a:solidFill>
+                          <a:latin typeface="Meiryo"/>
+                          <a:ea typeface="Meiryo"/>
+                          <a:cs typeface="Meiryo"/>
+                        </a:rPr>
+                        <a:t>1.113</a:t>
+                      </a:r>
+                    </a:p>
+                  </a:txBody>
+                  <a:tcPr marL="91440" marR="73152" marT="27432" marB="27432" anchor="ctr">
+                    <a:solidFill>
+                      <a:srgbClr val="F2F5F9"/>
+                    </a:solidFill>
+                  </a:tcPr>
+                </a:tc>
+                <a:tc>
+                  <a:txBody>
+                    <a:bodyPr/>
+                    <a:lstStyle/>
+                    <a:p>
+                      <a:pPr algn="l"/>
+                      <a:r>
+                        <a:rPr sz="1200" b="0">
+                          <a:solidFill>
+                            <a:srgbClr val="222222"/>
+                          </a:solidFill>
+                          <a:latin typeface="Meiryo"/>
+                          <a:ea typeface="Meiryo"/>
+                          <a:cs typeface="Meiryo"/>
+                        </a:rPr>
+                        <a:t>4.476</a:t>
+                      </a:r>
+                    </a:p>
+                  </a:txBody>
+                  <a:tcPr marL="91440" marR="73152" marT="27432" marB="27432" anchor="ctr">
+                    <a:solidFill>
+                      <a:srgbClr val="F2F5F9"/>
+                    </a:solidFill>
+                  </a:tcPr>
+                </a:tc>
+              </a:tr>
+              <a:tr h="274320">
+                <a:tc>
+                  <a:txBody>
+                    <a:bodyPr/>
+                    <a:lstStyle/>
+                    <a:p>
+                      <a:pPr algn="l"/>
+                      <a:r>
+                        <a:rPr sz="1200" b="1">
+                          <a:solidFill>
+                            <a:srgbClr val="222222"/>
+                          </a:solidFill>
+                          <a:latin typeface="Meiryo"/>
+                          <a:ea typeface="Meiryo"/>
+                          <a:cs typeface="Meiryo"/>
+                        </a:rPr>
+                        <a:t>平均のずれ（NRMSE, 4種平均）</a:t>
+                      </a:r>
+                    </a:p>
+                  </a:txBody>
+                  <a:tcPr marL="91440" marR="73152" marT="27432" marB="27432" anchor="ctr">
+                    <a:solidFill>
+                      <a:srgbClr val="FFFFFF"/>
+                    </a:solidFill>
+                  </a:tcPr>
+                </a:tc>
+                <a:tc>
+                  <a:txBody>
+                    <a:bodyPr/>
+                    <a:lstStyle/>
+                    <a:p>
+                      <a:pPr algn="l"/>
+                      <a:r>
+                        <a:rPr sz="1200" b="1">
+                          <a:solidFill>
+                            <a:srgbClr val="222222"/>
+                          </a:solidFill>
+                          <a:latin typeface="Meiryo"/>
+                          <a:ea typeface="Meiryo"/>
+                          <a:cs typeface="Meiryo"/>
+                        </a:rPr>
+                        <a:t>0.145</a:t>
+                      </a:r>
+                    </a:p>
+                  </a:txBody>
+                  <a:tcPr marL="91440" marR="73152" marT="27432" marB="27432" anchor="ctr">
+                    <a:solidFill>
+                      <a:srgbClr val="FFFFFF"/>
+                    </a:solidFill>
+                  </a:tcPr>
+                </a:tc>
+                <a:tc>
+                  <a:txBody>
+                    <a:bodyPr/>
+                    <a:lstStyle/>
+                    <a:p>
+                      <a:pPr algn="l"/>
+                      <a:r>
+                        <a:rPr sz="1200" b="1">
+                          <a:solidFill>
+                            <a:srgbClr val="222222"/>
+                          </a:solidFill>
+                          <a:latin typeface="Meiryo"/>
+                          <a:ea typeface="Meiryo"/>
+                          <a:cs typeface="Meiryo"/>
+                        </a:rPr>
+                        <a:t>0.306</a:t>
+                      </a:r>
+                    </a:p>
+                  </a:txBody>
+                  <a:tcPr marL="91440" marR="73152" marT="27432" marB="27432" anchor="ctr">
+                    <a:solidFill>
+                      <a:srgbClr val="FFFFFF"/>
+                    </a:solidFill>
+                  </a:tcPr>
+                </a:tc>
+                <a:tc>
+                  <a:txBody>
+                    <a:bodyPr/>
+                    <a:lstStyle/>
+                    <a:p>
+                      <a:pPr algn="l"/>
+                      <a:r>
+                        <a:rPr sz="1200" b="1">
+                          <a:solidFill>
+                            <a:srgbClr val="222222"/>
+                          </a:solidFill>
+                          <a:latin typeface="Meiryo"/>
+                          <a:ea typeface="Meiryo"/>
+                          <a:cs typeface="Meiryo"/>
+                        </a:rPr>
+                        <a:t>0.408</a:t>
+                      </a:r>
+                    </a:p>
+                  </a:txBody>
+                  <a:tcPr marL="91440" marR="73152" marT="27432" marB="27432" anchor="ctr">
+                    <a:solidFill>
+                      <a:srgbClr val="FFFFFF"/>
+                    </a:solidFill>
+                  </a:tcPr>
+                </a:tc>
+                <a:tc>
+                  <a:txBody>
+                    <a:bodyPr/>
+                    <a:lstStyle/>
+                    <a:p>
+                      <a:pPr algn="l"/>
+                      <a:r>
+                        <a:rPr sz="1200" b="1">
+                          <a:solidFill>
+                            <a:srgbClr val="222222"/>
+                          </a:solidFill>
+                          <a:latin typeface="Meiryo"/>
+                          <a:ea typeface="Meiryo"/>
+                          <a:cs typeface="Meiryo"/>
+                        </a:rPr>
+                        <a:t>0.079</a:t>
+                      </a:r>
+                    </a:p>
+                  </a:txBody>
+                  <a:tcPr marL="91440" marR="73152" marT="27432" marB="27432" anchor="ctr">
+                    <a:solidFill>
+                      <a:srgbClr val="FFFFFF"/>
+                    </a:solidFill>
+                  </a:tcPr>
+                </a:tc>
+                <a:tc>
+                  <a:txBody>
+                    <a:bodyPr/>
+                    <a:lstStyle/>
+                    <a:p>
+                      <a:pPr algn="l"/>
+                      <a:r>
+                        <a:rPr sz="1200" b="1">
+                          <a:solidFill>
+                            <a:srgbClr val="222222"/>
+                          </a:solidFill>
+                          <a:latin typeface="Meiryo"/>
+                          <a:ea typeface="Meiryo"/>
+                          <a:cs typeface="Meiryo"/>
+                        </a:rPr>
+                        <a:t>0.115</a:t>
+                      </a:r>
+                    </a:p>
+                  </a:txBody>
+                  <a:tcPr marL="91440" marR="73152" marT="27432" marB="27432" anchor="ctr">
+                    <a:solidFill>
+                      <a:srgbClr val="FFFFFF"/>
+                    </a:solidFill>
+                  </a:tcPr>
+                </a:tc>
+                <a:tc>
+                  <a:txBody>
+                    <a:bodyPr/>
+                    <a:lstStyle/>
+                    <a:p>
+                      <a:pPr algn="l"/>
+                      <a:r>
+                        <a:rPr sz="1200" b="1">
+                          <a:solidFill>
+                            <a:srgbClr val="222222"/>
+                          </a:solidFill>
+                          <a:latin typeface="Meiryo"/>
+                          <a:ea typeface="Meiryo"/>
+                          <a:cs typeface="Meiryo"/>
+                        </a:rPr>
+                        <a:t>0.122</a:t>
+                      </a:r>
+                    </a:p>
+                  </a:txBody>
+                  <a:tcPr marL="91440" marR="73152" marT="27432" marB="27432" anchor="ctr">
+                    <a:solidFill>
+                      <a:srgbClr val="FFFFFF"/>
+                    </a:solidFill>
+                  </a:tcPr>
+                </a:tc>
+              </a:tr>
+            </a:tbl>
+          </a:graphicData>
+        </a:graphic>
+      </p:graphicFrame>
+      <p:sp>
+        <p:nvSpPr>
+          <p:cNvPr id="8" name="TextBox 7"/>
+          <p:cNvSpPr txBox="1"/>
+          <p:nvPr/>
+        </p:nvSpPr>
+        <p:spPr>
+          <a:xfrm>
+            <a:off x="566928" y="5888736"/>
+            <a:ext cx="9869119" cy="585216"/>
+          </a:xfrm>
+          <a:prstGeom prst="rect">
+            <a:avLst/>
+          </a:prstGeom>
+          <a:noFill/>
+        </p:spPr>
+        <p:txBody>
+          <a:bodyPr wrap="square" anchor="t" lIns="0" rIns="0" tIns="0" bIns="0">
+            <a:spAutoFit/>
+          </a:bodyPr>
+          <a:lstStyle/>
+          <a:p>
+            <a:pPr algn="l">
+              <a:lnSpc>
+                <a:spcPct val="132000"/>
+              </a:lnSpc>
+              <a:spcAft>
+                <a:spcPts val="600"/>
+              </a:spcAft>
+            </a:pPr>
+            <a:r>
+              <a:rPr sz="1500" b="1">
+                <a:solidFill>
+                  <a:srgbClr val="C0561A"/>
+                </a:solidFill>
+                <a:latin typeface="Meiryo"/>
+                <a:ea typeface="Meiryo"/>
+                <a:cs typeface="Meiryo"/>
+              </a:rPr>
+              <a:t>固定を増やすほど、食べられる強さと変換の割合が極端な値へ動く（ウルメ→ブリ 0.224→0.945、マイワシ→サワラの変換 0.030→64.2）。当てはまりの悪化は、その歪みの結果。</a:t>
             </a:r>
           </a:p>
         </p:txBody>
